--- a/results/ppt/formation_coop_cn_v2.pptx
+++ b/results/ppt/formation_coop_cn_v2.pptx
@@ -4,23 +4,27 @@
   <p:sldMasterIdLst>
     <p:sldMasterId id="2147483648" r:id="rId1"/>
   </p:sldMasterIdLst>
+  <p:notesMasterIdLst>
+    <p:notesMasterId r:id="rId18"/>
+  </p:notesMasterIdLst>
   <p:sldIdLst>
     <p:sldId id="256" r:id="rId2"/>
     <p:sldId id="257" r:id="rId3"/>
-    <p:sldId id="258" r:id="rId4"/>
-    <p:sldId id="259" r:id="rId5"/>
-    <p:sldId id="260" r:id="rId6"/>
-    <p:sldId id="261" r:id="rId7"/>
-    <p:sldId id="262" r:id="rId8"/>
-    <p:sldId id="263" r:id="rId9"/>
-    <p:sldId id="264" r:id="rId10"/>
-    <p:sldId id="265" r:id="rId11"/>
-    <p:sldId id="266" r:id="rId12"/>
-    <p:sldId id="267" r:id="rId13"/>
+    <p:sldId id="268" r:id="rId4"/>
+    <p:sldId id="258" r:id="rId5"/>
+    <p:sldId id="259" r:id="rId6"/>
+    <p:sldId id="260" r:id="rId7"/>
+    <p:sldId id="261" r:id="rId8"/>
+    <p:sldId id="262" r:id="rId9"/>
+    <p:sldId id="263" r:id="rId10"/>
+    <p:sldId id="264" r:id="rId11"/>
+    <p:sldId id="270" r:id="rId12"/>
+    <p:sldId id="271" r:id="rId13"/>
+    <p:sldId id="269" r:id="rId14"/>
+    <p:sldId id="265" r:id="rId15"/>
+    <p:sldId id="266" r:id="rId16"/>
+    <p:sldId id="267" r:id="rId17"/>
   </p:sldIdLst>
-  <p:notesMasterIdLst>
-    <p:notesMasterId r:id="rId14"/>
-  </p:notesMasterIdLst>
   <p:sldSz cx="12192000" cy="6858000"/>
   <p:notesSz cx="6858000" cy="12192000"/>
   <p:defaultTextStyle>
@@ -115,6 +119,11 @@
       </a:defRPr>
     </a:lvl9pPr>
   </p:defaultTextStyle>
+  <p:extLst>
+    <p:ext uri="{EFAFB233-063F-42B5-8137-9DF3F51BA10A}">
+      <p15:sldGuideLst xmlns:p15="http://schemas.microsoft.com/office/powerpoint/2012/main"/>
+    </p:ext>
+  </p:extLst>
 </p:presentation>
 </file>
 
@@ -140,234 +149,10 @@
           <a:chExt cx="0" cy="0"/>
         </a:xfrm>
       </p:grpSpPr>
-      <p:sp>
-        <p:nvSpPr>
-          <p:cNvPr id="2" name="Header Placeholder 1"/>
-          <p:cNvSpPr>
-            <a:spLocks noGrp="1"/>
-          </p:cNvSpPr>
-          <p:nvPr>
-            <p:ph type="hdr" sz="quarter"/>
-          </p:nvPr>
-        </p:nvSpPr>
-        <p:spPr>
-          <a:xfrm>
-            <a:off x="0" y="0"/>
-            <a:ext cx="2971800" cy="458788"/>
-          </a:xfrm>
-          <a:prstGeom prst="rect">
-            <a:avLst/>
-          </a:prstGeom>
-        </p:spPr>
-        <p:txBody>
-          <a:bodyPr vert="horz" lIns="91440" tIns="45720" rIns="91440" bIns="45720" rtlCol="0"/>
-          <a:lstStyle>
-            <a:lvl1pPr algn="l">
-              <a:defRPr sz="1200"/>
-            </a:lvl1pPr>
-          </a:lstStyle>
-          <a:p>
-            <a:endParaRPr lang="en-US"/>
-          </a:p>
-        </p:txBody>
-      </p:sp>
-      <p:sp>
-        <p:nvSpPr>
-          <p:cNvPr id="3" name="Date Placeholder 2"/>
-          <p:cNvSpPr>
-            <a:spLocks noGrp="1"/>
-          </p:cNvSpPr>
-          <p:nvPr>
-            <p:ph type="dt" idx="1"/>
-          </p:nvPr>
-        </p:nvSpPr>
-        <p:spPr>
-          <a:xfrm>
-            <a:off x="3884613" y="0"/>
-            <a:ext cx="2971800" cy="458788"/>
-          </a:xfrm>
-          <a:prstGeom prst="rect">
-            <a:avLst/>
-          </a:prstGeom>
-        </p:spPr>
-        <p:txBody>
-          <a:bodyPr vert="horz" lIns="91440" tIns="45720" rIns="91440" bIns="45720" rtlCol="0"/>
-          <a:lstStyle>
-            <a:lvl1pPr algn="r">
-              <a:defRPr sz="1200"/>
-            </a:lvl1pPr>
-          </a:lstStyle>
-          <a:p>
-            <a:fld id="{5282F153-3F37-0F45-9E97-73ACFA13230C}" type="datetimeFigureOut">
-              <a:rPr lang="en-US"/>
-              <a:t>7/23/19</a:t>
-            </a:fld>
-            <a:endParaRPr lang="en-US"/>
-          </a:p>
-        </p:txBody>
-      </p:sp>
-      <p:sp>
-        <p:nvSpPr>
-          <p:cNvPr id="4" name="Slide Image Placeholder 3"/>
-          <p:cNvSpPr>
-            <a:spLocks noGrp="1" noRot="1" noChangeAspect="1"/>
-          </p:cNvSpPr>
-          <p:nvPr>
-            <p:ph type="sldImg" idx="2"/>
-          </p:nvPr>
-        </p:nvSpPr>
-        <p:spPr>
-          <a:xfrm>
-            <a:off x="685800" y="1143000"/>
-            <a:ext cx="5486400" cy="3086100"/>
-          </a:xfrm>
-          <a:prstGeom prst="rect">
-            <a:avLst/>
-          </a:prstGeom>
-          <a:noFill/>
-          <a:ln w="12700">
-            <a:solidFill>
-              <a:prstClr val="black"/>
-            </a:solidFill>
-          </a:ln>
-        </p:spPr>
-        <p:txBody>
-          <a:bodyPr vert="horz" lIns="91440" tIns="45720" rIns="91440" bIns="45720" rtlCol="0" anchor="ctr"/>
-          <a:lstStyle/>
-          <a:p>
-            <a:endParaRPr lang="en-US"/>
-          </a:p>
-        </p:txBody>
-      </p:sp>
-      <p:sp>
-        <p:nvSpPr>
-          <p:cNvPr id="5" name="Notes Placeholder 4"/>
-          <p:cNvSpPr>
-            <a:spLocks noGrp="1"/>
-          </p:cNvSpPr>
-          <p:nvPr>
-            <p:ph type="body" sz="quarter" idx="3"/>
-          </p:nvPr>
-        </p:nvSpPr>
-        <p:spPr>
-          <a:xfrm>
-            <a:off x="685800" y="4400550"/>
-            <a:ext cx="5486400" cy="3600450"/>
-          </a:xfrm>
-          <a:prstGeom prst="rect">
-            <a:avLst/>
-          </a:prstGeom>
-        </p:spPr>
-        <p:txBody>
-          <a:bodyPr vert="horz" lIns="91440" tIns="45720" rIns="91440" bIns="45720" rtlCol="0"/>
-          <a:lstStyle/>
-          <a:p>
-            <a:pPr lvl="0"/>
-            <a:r>
-              <a:rPr lang="en-US"/>
-              <a:t>Click to edit Master text styles</a:t>
-            </a:r>
-          </a:p>
-          <a:p>
-            <a:pPr lvl="1"/>
-            <a:r>
-              <a:rPr lang="en-US"/>
-              <a:t>Second level</a:t>
-            </a:r>
-          </a:p>
-          <a:p>
-            <a:pPr lvl="2"/>
-            <a:r>
-              <a:rPr lang="en-US"/>
-              <a:t>Third level</a:t>
-            </a:r>
-          </a:p>
-          <a:p>
-            <a:pPr lvl="3"/>
-            <a:r>
-              <a:rPr lang="en-US"/>
-              <a:t>Fourth level</a:t>
-            </a:r>
-          </a:p>
-          <a:p>
-            <a:pPr lvl="4"/>
-            <a:r>
-              <a:rPr lang="en-US"/>
-              <a:t>Fifth level</a:t>
-            </a:r>
-          </a:p>
-        </p:txBody>
-      </p:sp>
-      <p:sp>
-        <p:nvSpPr>
-          <p:cNvPr id="6" name="Footer Placeholder 5"/>
-          <p:cNvSpPr>
-            <a:spLocks noGrp="1"/>
-          </p:cNvSpPr>
-          <p:nvPr>
-            <p:ph type="ftr" sz="quarter" idx="4"/>
-          </p:nvPr>
-        </p:nvSpPr>
-        <p:spPr>
-          <a:xfrm>
-            <a:off x="0" y="8685213"/>
-            <a:ext cx="2971800" cy="458787"/>
-          </a:xfrm>
-          <a:prstGeom prst="rect">
-            <a:avLst/>
-          </a:prstGeom>
-        </p:spPr>
-        <p:txBody>
-          <a:bodyPr vert="horz" lIns="91440" tIns="45720" rIns="91440" bIns="45720" rtlCol="0" anchor="b"/>
-          <a:lstStyle>
-            <a:lvl1pPr algn="l">
-              <a:defRPr sz="1200"/>
-            </a:lvl1pPr>
-          </a:lstStyle>
-          <a:p>
-            <a:endParaRPr lang="en-US"/>
-          </a:p>
-        </p:txBody>
-      </p:sp>
-      <p:sp>
-        <p:nvSpPr>
-          <p:cNvPr id="7" name="Slide Number Placeholder 6"/>
-          <p:cNvSpPr>
-            <a:spLocks noGrp="1"/>
-          </p:cNvSpPr>
-          <p:nvPr>
-            <p:ph type="sldNum" sz="quarter" idx="5"/>
-          </p:nvPr>
-        </p:nvSpPr>
-        <p:spPr>
-          <a:xfrm>
-            <a:off x="3884613" y="8685213"/>
-            <a:ext cx="2971800" cy="458787"/>
-          </a:xfrm>
-          <a:prstGeom prst="rect">
-            <a:avLst/>
-          </a:prstGeom>
-        </p:spPr>
-        <p:txBody>
-          <a:bodyPr vert="horz" lIns="91440" tIns="45720" rIns="91440" bIns="45720" rtlCol="0" anchor="b"/>
-          <a:lstStyle>
-            <a:lvl1pPr algn="r">
-              <a:defRPr sz="1200"/>
-            </a:lvl1pPr>
-          </a:lstStyle>
-          <a:p>
-            <a:fld id="{CE5E9CC1-C706-0F49-92D6-E571CC5EEA8F}" type="slidenum">
-              <a:rPr lang="en-US"/>
-              <a:t>‹#›</a:t>
-            </a:fld>
-            <a:endParaRPr lang="en-US"/>
-          </a:p>
-        </p:txBody>
-      </p:sp>
     </p:spTree>
     <p:extLst>
       <p:ext uri="{BB962C8B-B14F-4D97-AF65-F5344CB8AC3E}">
-        <p14:creationId xmlns:p14="http://schemas.microsoft.com/office/powerpoint/2010/main" val="1024086991"/>
+        <p14:creationId xmlns:p14="http://schemas.microsoft.com/office/powerpoint/2010/main" val="3285159630"/>
       </p:ext>
     </p:extLst>
   </p:cSld>
@@ -511,10 +296,6 @@
           <a:bodyPr/>
           <a:lstStyle/>
           <a:p>
-            <a:r>
-              <a:rPr lang="en-US" dirty="0"/>
-              <a:t/>
-            </a:r>
             <a:endParaRPr lang="en-US" dirty="0"/>
           </a:p>
         </p:txBody>
@@ -599,10 +380,6 @@
           <a:bodyPr/>
           <a:lstStyle/>
           <a:p>
-            <a:r>
-              <a:rPr lang="en-US" dirty="0"/>
-              <a:t/>
-            </a:r>
             <a:endParaRPr lang="en-US" dirty="0"/>
           </a:p>
         </p:txBody>
@@ -624,7 +401,7 @@
           <a:p>
             <a:fld id="{F7021451-1387-4CA6-816F-3879F97B5CBC}" type="slidenum">
               <a:rPr lang="en-US"/>
-              <a:t>10</a:t>
+              <a:t>14</a:t>
             </a:fld>
             <a:endParaRPr lang="en-US"/>
           </a:p>
@@ -687,10 +464,6 @@
           <a:bodyPr/>
           <a:lstStyle/>
           <a:p>
-            <a:r>
-              <a:rPr lang="en-US" dirty="0"/>
-              <a:t/>
-            </a:r>
             <a:endParaRPr lang="en-US" dirty="0"/>
           </a:p>
         </p:txBody>
@@ -712,7 +485,7 @@
           <a:p>
             <a:fld id="{F7021451-1387-4CA6-816F-3879F97B5CBC}" type="slidenum">
               <a:rPr lang="en-US"/>
-              <a:t>11</a:t>
+              <a:t>15</a:t>
             </a:fld>
             <a:endParaRPr lang="en-US"/>
           </a:p>
@@ -775,10 +548,6 @@
           <a:bodyPr/>
           <a:lstStyle/>
           <a:p>
-            <a:r>
-              <a:rPr lang="en-US" dirty="0"/>
-              <a:t/>
-            </a:r>
             <a:endParaRPr lang="en-US" dirty="0"/>
           </a:p>
         </p:txBody>
@@ -800,7 +569,7 @@
           <a:p>
             <a:fld id="{F7021451-1387-4CA6-816F-3879F97B5CBC}" type="slidenum">
               <a:rPr lang="en-US"/>
-              <a:t>12</a:t>
+              <a:t>16</a:t>
             </a:fld>
             <a:endParaRPr lang="en-US"/>
           </a:p>
@@ -863,10 +632,6 @@
           <a:bodyPr/>
           <a:lstStyle/>
           <a:p>
-            <a:r>
-              <a:rPr lang="en-US" dirty="0"/>
-              <a:t/>
-            </a:r>
             <a:endParaRPr lang="en-US" dirty="0"/>
           </a:p>
         </p:txBody>
@@ -951,10 +716,6 @@
           <a:bodyPr/>
           <a:lstStyle/>
           <a:p>
-            <a:r>
-              <a:rPr lang="en-US" dirty="0"/>
-              <a:t/>
-            </a:r>
             <a:endParaRPr lang="en-US" dirty="0"/>
           </a:p>
         </p:txBody>
@@ -976,7 +737,7 @@
           <a:p>
             <a:fld id="{F7021451-1387-4CA6-816F-3879F97B5CBC}" type="slidenum">
               <a:rPr lang="en-US"/>
-              <a:t>3</a:t>
+              <a:t>4</a:t>
             </a:fld>
             <a:endParaRPr lang="en-US"/>
           </a:p>
@@ -1039,10 +800,6 @@
           <a:bodyPr/>
           <a:lstStyle/>
           <a:p>
-            <a:r>
-              <a:rPr lang="en-US" dirty="0"/>
-              <a:t/>
-            </a:r>
             <a:endParaRPr lang="en-US" dirty="0"/>
           </a:p>
         </p:txBody>
@@ -1064,7 +821,7 @@
           <a:p>
             <a:fld id="{F7021451-1387-4CA6-816F-3879F97B5CBC}" type="slidenum">
               <a:rPr lang="en-US"/>
-              <a:t>4</a:t>
+              <a:t>5</a:t>
             </a:fld>
             <a:endParaRPr lang="en-US"/>
           </a:p>
@@ -1127,10 +884,6 @@
           <a:bodyPr/>
           <a:lstStyle/>
           <a:p>
-            <a:r>
-              <a:rPr lang="en-US" dirty="0"/>
-              <a:t/>
-            </a:r>
             <a:endParaRPr lang="en-US" dirty="0"/>
           </a:p>
         </p:txBody>
@@ -1152,7 +905,7 @@
           <a:p>
             <a:fld id="{F7021451-1387-4CA6-816F-3879F97B5CBC}" type="slidenum">
               <a:rPr lang="en-US"/>
-              <a:t>5</a:t>
+              <a:t>6</a:t>
             </a:fld>
             <a:endParaRPr lang="en-US"/>
           </a:p>
@@ -1215,10 +968,6 @@
           <a:bodyPr/>
           <a:lstStyle/>
           <a:p>
-            <a:r>
-              <a:rPr lang="en-US" dirty="0"/>
-              <a:t/>
-            </a:r>
             <a:endParaRPr lang="en-US" dirty="0"/>
           </a:p>
         </p:txBody>
@@ -1240,7 +989,7 @@
           <a:p>
             <a:fld id="{F7021451-1387-4CA6-816F-3879F97B5CBC}" type="slidenum">
               <a:rPr lang="en-US"/>
-              <a:t>6</a:t>
+              <a:t>7</a:t>
             </a:fld>
             <a:endParaRPr lang="en-US"/>
           </a:p>
@@ -1303,10 +1052,6 @@
           <a:bodyPr/>
           <a:lstStyle/>
           <a:p>
-            <a:r>
-              <a:rPr lang="en-US" dirty="0"/>
-              <a:t/>
-            </a:r>
             <a:endParaRPr lang="en-US" dirty="0"/>
           </a:p>
         </p:txBody>
@@ -1328,7 +1073,7 @@
           <a:p>
             <a:fld id="{F7021451-1387-4CA6-816F-3879F97B5CBC}" type="slidenum">
               <a:rPr lang="en-US"/>
-              <a:t>7</a:t>
+              <a:t>8</a:t>
             </a:fld>
             <a:endParaRPr lang="en-US"/>
           </a:p>
@@ -1391,10 +1136,6 @@
           <a:bodyPr/>
           <a:lstStyle/>
           <a:p>
-            <a:r>
-              <a:rPr lang="en-US" dirty="0"/>
-              <a:t/>
-            </a:r>
             <a:endParaRPr lang="en-US" dirty="0"/>
           </a:p>
         </p:txBody>
@@ -1416,7 +1157,7 @@
           <a:p>
             <a:fld id="{F7021451-1387-4CA6-816F-3879F97B5CBC}" type="slidenum">
               <a:rPr lang="en-US"/>
-              <a:t>8</a:t>
+              <a:t>9</a:t>
             </a:fld>
             <a:endParaRPr lang="en-US"/>
           </a:p>
@@ -1479,10 +1220,6 @@
           <a:bodyPr/>
           <a:lstStyle/>
           <a:p>
-            <a:r>
-              <a:rPr lang="en-US" dirty="0"/>
-              <a:t/>
-            </a:r>
             <a:endParaRPr lang="en-US" dirty="0"/>
           </a:p>
         </p:txBody>
@@ -1504,7 +1241,7 @@
           <a:p>
             <a:fld id="{F7021451-1387-4CA6-816F-3879F97B5CBC}" type="slidenum">
               <a:rPr lang="en-US"/>
-              <a:t>9</a:t>
+              <a:t>10</a:t>
             </a:fld>
             <a:endParaRPr lang="en-US"/>
           </a:p>
@@ -1556,6 +1293,11 @@
 <file path=ppt/slideMasters/slideMaster1.xml><?xml version="1.0" encoding="utf-8"?>
 <p:sldMaster xmlns:a="http://schemas.openxmlformats.org/drawingml/2006/main" xmlns:r="http://schemas.openxmlformats.org/officeDocument/2006/relationships" xmlns:p="http://schemas.openxmlformats.org/presentationml/2006/main">
   <p:cSld>
+    <p:bg>
+      <p:bgRef idx="1001">
+        <a:schemeClr val="bg1"/>
+      </p:bgRef>
+    </p:bg>
     <p:spTree>
       <p:nvGrpSpPr>
         <p:cNvPr id="1" name=""/>
@@ -1838,6 +1580,7 @@
         <a:solidFill>
           <a:srgbClr val="FFFFFF"/>
         </a:solidFill>
+        <a:effectLst/>
       </p:bgPr>
     </p:bg>
     <p:spTree>
@@ -1856,53 +1599,33 @@
       </p:grpSpPr>
       <p:sp>
         <p:nvSpPr>
-          <p:cNvPr id="2" name="Shape 0"/>
-          <p:cNvSpPr/>
-          <p:nvPr/>
-        </p:nvSpPr>
-        <p:spPr>
-          <a:xfrm>
-            <a:off x="731520" y="2011680"/>
-            <a:ext cx="1828800" cy="45720"/>
-          </a:xfrm>
-          <a:prstGeom prst="rect">
-            <a:avLst/>
-          </a:prstGeom>
-          <a:solidFill>
-            <a:srgbClr val="F96167"/>
-          </a:solidFill>
-          <a:ln/>
-        </p:spPr>
-      </p:sp>
-      <p:sp>
-        <p:nvSpPr>
           <p:cNvPr id="3" name="Text 1"/>
           <p:cNvSpPr/>
           <p:nvPr/>
         </p:nvSpPr>
         <p:spPr>
           <a:xfrm>
-            <a:off x="731520" y="914400"/>
-            <a:ext cx="10515600" cy="1463040"/>
-          </a:xfrm>
-          <a:prstGeom prst="rect">
-            <a:avLst/>
-          </a:prstGeom>
-          <a:noFill/>
-          <a:ln/>
-        </p:spPr>
-        <p:txBody>
-          <a:bodyPr wrap="square" rtlCol="0" anchor="ctr"/>
-          <a:lstStyle/>
-          <a:p>
-            <a:pPr indent="0" marL="0">
+            <a:off x="2928069" y="1215556"/>
+            <a:ext cx="5758732" cy="1463040"/>
+          </a:xfrm>
+          <a:prstGeom prst="rect">
+            <a:avLst/>
+          </a:prstGeom>
+          <a:noFill/>
+          <a:ln/>
+        </p:spPr>
+        <p:txBody>
+          <a:bodyPr wrap="square" rtlCol="0" anchor="ctr"/>
+          <a:lstStyle/>
+          <a:p>
+            <a:pPr marL="0" indent="0">
               <a:lnSpc>
                 <a:spcPct val="110000"/>
               </a:lnSpc>
               <a:buNone/>
             </a:pPr>
             <a:r>
-              <a:rPr lang="en-US" sz="4200" b="1" dirty="0">
+              <a:rPr lang="en-US" sz="4200" b="1" dirty="0" err="1">
                 <a:solidFill>
                   <a:srgbClr val="065A82"/>
                 </a:solidFill>
@@ -1910,30 +1633,10 @@
                 <a:ea typeface="Georgia" pitchFamily="34" charset="-122"/>
                 <a:cs typeface="Georgia" pitchFamily="34" charset="-120"/>
               </a:rPr>
-              <a:t>基于多智能体强化学习的</a:t>
+              <a:t>基于多智能体强化学习的协同飞行决策与规划</a:t>
             </a:r>
             <a:endParaRPr lang="en-US" sz="4200" dirty="0"/>
           </a:p>
-          <a:p>
-            <a:pPr indent="0" marL="0">
-              <a:lnSpc>
-                <a:spcPct val="110000"/>
-              </a:lnSpc>
-              <a:buNone/>
-            </a:pPr>
-            <a:r>
-              <a:rPr lang="en-US" sz="4200" b="1" dirty="0">
-                <a:solidFill>
-                  <a:srgbClr val="065A82"/>
-                </a:solidFill>
-                <a:latin typeface="Georgia" pitchFamily="34" charset="0"/>
-                <a:ea typeface="Georgia" pitchFamily="34" charset="-122"/>
-                <a:cs typeface="Georgia" pitchFamily="34" charset="-120"/>
-              </a:rPr>
-              <a:t>协同编队飞行决策与规划</a:t>
-            </a:r>
-            <a:endParaRPr lang="en-US" sz="4200" dirty="0"/>
-          </a:p>
         </p:txBody>
       </p:sp>
       <p:sp>
@@ -1944,7 +1647,7 @@
         </p:nvSpPr>
         <p:spPr>
           <a:xfrm>
-            <a:off x="731520" y="2468880"/>
+            <a:off x="3007581" y="3072186"/>
             <a:ext cx="10515600" cy="731520"/>
           </a:xfrm>
           <a:prstGeom prst="rect">
@@ -1957,7 +1660,7 @@
           <a:bodyPr wrap="square" rtlCol="0" anchor="ctr"/>
           <a:lstStyle/>
           <a:p>
-            <a:pPr indent="0" marL="0">
+            <a:pPr marL="0" indent="0">
               <a:lnSpc>
                 <a:spcPct val="120000"/>
               </a:lnSpc>
@@ -1976,11 +1679,30 @@
             </a:r>
             <a:endParaRPr lang="en-US" sz="1700" dirty="0"/>
           </a:p>
-          <a:p>
-            <a:pPr indent="0" marL="0">
-              <a:lnSpc>
-                <a:spcPct val="120000"/>
-              </a:lnSpc>
+        </p:txBody>
+      </p:sp>
+      <p:sp>
+        <p:nvSpPr>
+          <p:cNvPr id="5" name="Text 3"/>
+          <p:cNvSpPr/>
+          <p:nvPr/>
+        </p:nvSpPr>
+        <p:spPr>
+          <a:xfrm>
+            <a:off x="4975530" y="4504416"/>
+            <a:ext cx="10515600" cy="320040"/>
+          </a:xfrm>
+          <a:prstGeom prst="rect">
+            <a:avLst/>
+          </a:prstGeom>
+          <a:noFill/>
+          <a:ln/>
+        </p:spPr>
+        <p:txBody>
+          <a:bodyPr wrap="square" rtlCol="0" anchor="ctr"/>
+          <a:lstStyle/>
+          <a:p>
+            <a:pPr marL="0" indent="0">
               <a:buNone/>
             </a:pPr>
             <a:r>
@@ -1989,51 +1711,10 @@
                   <a:srgbClr val="1C7293"/>
                 </a:solidFill>
                 <a:latin typeface="Calibri" pitchFamily="34" charset="0"/>
-                <a:ea typeface="Calibri" pitchFamily="34" charset="-122"/>
-                <a:cs typeface="Calibri" pitchFamily="34" charset="-120"/>
-              </a:rPr>
-              <a:t>在 JSBSim 6-DOF F-16 编队追猎中超越集中式 PPO 上限</a:t>
-            </a:r>
-            <a:endParaRPr lang="en-US" sz="1700" dirty="0"/>
-          </a:p>
-        </p:txBody>
-      </p:sp>
-      <p:sp>
-        <p:nvSpPr>
-          <p:cNvPr id="5" name="Text 3"/>
-          <p:cNvSpPr/>
-          <p:nvPr/>
-        </p:nvSpPr>
-        <p:spPr>
-          <a:xfrm>
-            <a:off x="731520" y="5120640"/>
-            <a:ext cx="10515600" cy="320040"/>
-          </a:xfrm>
-          <a:prstGeom prst="rect">
-            <a:avLst/>
-          </a:prstGeom>
-          <a:noFill/>
-          <a:ln/>
-        </p:spPr>
-        <p:txBody>
-          <a:bodyPr wrap="square" rtlCol="0" anchor="ctr"/>
-          <a:lstStyle/>
-          <a:p>
-            <a:pPr indent="0" marL="0">
-              <a:buNone/>
-            </a:pPr>
-            <a:r>
-              <a:rPr lang="en-US" sz="1100" dirty="0">
-                <a:solidFill>
-                  <a:srgbClr val="8899A6"/>
-                </a:solidFill>
-                <a:latin typeface="Calibri" pitchFamily="34" charset="0"/>
-                <a:ea typeface="Calibri" pitchFamily="34" charset="-122"/>
-                <a:cs typeface="Calibri" pitchFamily="34" charset="-120"/>
-              </a:rPr>
-              <a:t>Sean Nishimiya  ·  Zhejiang University  ·  July 2026  ·  github.com/NishimiyaXSean/jsbsim-marl-formation</a:t>
-            </a:r>
-            <a:endParaRPr lang="en-US" sz="1100" dirty="0"/>
+                <a:cs typeface="Calibri" pitchFamily="34" charset="-120"/>
+              </a:rPr>
+              <a:t>26.7.10</a:t>
+            </a:r>
           </a:p>
         </p:txBody>
       </p:sp>
@@ -2047,12 +1728,13 @@
 
 <file path=ppt/slides/slide10.xml><?xml version="1.0" encoding="utf-8"?>
 <p:sld xmlns:a="http://schemas.openxmlformats.org/drawingml/2006/main" xmlns:r="http://schemas.openxmlformats.org/officeDocument/2006/relationships" xmlns:p="http://schemas.openxmlformats.org/presentationml/2006/main">
-  <p:cSld name="Slide 10">
+  <p:cSld name="Slide 9">
     <p:bg>
       <p:bgPr>
         <a:solidFill>
           <a:srgbClr val="FFFFFF"/>
         </a:solidFill>
+        <a:effectLst/>
       </p:bgPr>
     </p:bg>
     <p:spTree>
@@ -2110,7 +1792,7 @@
           <a:bodyPr wrap="square" lIns="0" tIns="0" rIns="0" bIns="0" rtlCol="0" anchor="ctr"/>
           <a:lstStyle/>
           <a:p>
-            <a:pPr indent="0" marL="0">
+            <a:pPr marL="0" indent="0">
               <a:buNone/>
             </a:pPr>
             <a:r>
@@ -2122,7 +1804,7 @@
                 <a:ea typeface="Georgia" pitchFamily="34" charset="-122"/>
                 <a:cs typeface="Georgia" pitchFamily="34" charset="-120"/>
               </a:rPr>
-              <a:t>9</a:t>
+              <a:t>8</a:t>
             </a:r>
             <a:endParaRPr lang="en-US" sz="2600" dirty="0"/>
           </a:p>
@@ -2149,11 +1831,11 @@
           <a:bodyPr wrap="square" rtlCol="0" anchor="ctr"/>
           <a:lstStyle/>
           <a:p>
-            <a:pPr indent="0" marL="0">
-              <a:buNone/>
-            </a:pPr>
-            <a:r>
-              <a:rPr lang="en-US" sz="3000" b="1" dirty="0">
+            <a:pPr marL="0" indent="0">
+              <a:buNone/>
+            </a:pPr>
+            <a:r>
+              <a:rPr lang="en-US" sz="3000" b="1" dirty="0" err="1">
                 <a:solidFill>
                   <a:srgbClr val="065A82"/>
                 </a:solidFill>
@@ -2161,7 +1843,18 @@
                 <a:ea typeface="Georgia" pitchFamily="34" charset="-122"/>
                 <a:cs typeface="Georgia" pitchFamily="34" charset="-120"/>
               </a:rPr>
-              <a:t>数学铁证: 参数共享网络的自发角色分化</a:t>
+              <a:t>从零涌现的协同战术</a:t>
+            </a:r>
+            <a:r>
+              <a:rPr lang="en-US" sz="3000" b="1" dirty="0">
+                <a:solidFill>
+                  <a:srgbClr val="065A82"/>
+                </a:solidFill>
+                <a:latin typeface="Georgia" pitchFamily="34" charset="0"/>
+                <a:ea typeface="Georgia" pitchFamily="34" charset="-122"/>
+                <a:cs typeface="Georgia" pitchFamily="34" charset="-120"/>
+              </a:rPr>
+              <a:t> (Zero-Knowledge Emergence)</a:t>
             </a:r>
             <a:endParaRPr lang="en-US" sz="3000" dirty="0"/>
           </a:p>
@@ -2196,19 +1889,19 @@
         <p:spPr>
           <a:xfrm>
             <a:off x="365760" y="1051560"/>
-            <a:ext cx="5943600" cy="320040"/>
-          </a:xfrm>
-          <a:prstGeom prst="rect">
-            <a:avLst/>
-          </a:prstGeom>
-          <a:noFill/>
-          <a:ln/>
-        </p:spPr>
-        <p:txBody>
-          <a:bodyPr wrap="square" rtlCol="0" anchor="ctr"/>
-          <a:lstStyle/>
-          <a:p>
-            <a:pPr indent="0" marL="0">
+            <a:ext cx="6400800" cy="320040"/>
+          </a:xfrm>
+          <a:prstGeom prst="rect">
+            <a:avLst/>
+          </a:prstGeom>
+          <a:noFill/>
+          <a:ln/>
+        </p:spPr>
+        <p:txBody>
+          <a:bodyPr wrap="square" rtlCol="0" anchor="ctr"/>
+          <a:lstStyle/>
+          <a:p>
+            <a:pPr marL="0" indent="0">
               <a:buNone/>
             </a:pPr>
             <a:r>
@@ -2220,7 +1913,7 @@
                 <a:ea typeface="Georgia" pitchFamily="34" charset="-122"/>
                 <a:cs typeface="Georgia" pitchFamily="34" charset="-120"/>
               </a:rPr>
-              <a:t>角色分组均值注意力矩阵 (49 集, 7,858 步/角色, 按瞬时几何分角色)</a:t>
+              <a:t>冷启动 Self-Attention — 320 轮, 零专家数据, 零 BC</a:t>
             </a:r>
             <a:endParaRPr lang="en-US" sz="1800" dirty="0"/>
           </a:p>
@@ -2234,22 +1927,22 @@
         </p:nvSpPr>
         <p:spPr>
           <a:xfrm>
-            <a:off x="365760" y="1508760"/>
-            <a:ext cx="5669280" cy="3200400"/>
-          </a:xfrm>
-          <a:prstGeom prst="rect">
-            <a:avLst/>
-          </a:prstGeom>
-          <a:noFill/>
-          <a:ln/>
-        </p:spPr>
-        <p:txBody>
-          <a:bodyPr wrap="square" rtlCol="0" anchor="ctr"/>
-          <a:lstStyle/>
-          <a:p>
-            <a:pPr indent="0" marL="0">
+            <a:off x="365760" y="1007828"/>
+            <a:ext cx="6400800" cy="2286000"/>
+          </a:xfrm>
+          <a:prstGeom prst="rect">
+            <a:avLst/>
+          </a:prstGeom>
+          <a:noFill/>
+          <a:ln/>
+        </p:spPr>
+        <p:txBody>
+          <a:bodyPr wrap="square" rtlCol="0" anchor="ctr"/>
+          <a:lstStyle/>
+          <a:p>
+            <a:pPr marL="0" indent="0">
               <a:lnSpc>
-                <a:spcPct val="135000"/>
+                <a:spcPct val="130000"/>
               </a:lnSpc>
               <a:buNone/>
             </a:pPr>
@@ -2262,14 +1955,14 @@
                 <a:ea typeface="Calibri" pitchFamily="34" charset="-122"/>
                 <a:cs typeface="Calibri" pitchFamily="34" charset="-120"/>
               </a:rPr>
-              <a:t>Striker MHA:  Self-&gt;Mate = 0.450 (协调)    Pool Mate = 0.341</a:t>
+              <a:t>训练峰值: +5,401 (第 300 轮)    |    策略熵: 2.49 -&gt; 1.87 (健康收敛)</a:t>
             </a:r>
             <a:endParaRPr lang="en-US" sz="1400" dirty="0"/>
           </a:p>
           <a:p>
-            <a:pPr indent="0" marL="0">
+            <a:pPr marL="0" indent="0">
               <a:lnSpc>
-                <a:spcPct val="135000"/>
+                <a:spcPct val="130000"/>
               </a:lnSpc>
               <a:buNone/>
             </a:pPr>
@@ -2282,23 +1975,34 @@
                 <a:ea typeface="Calibri" pitchFamily="34" charset="-122"/>
                 <a:cs typeface="Calibri" pitchFamily="34" charset="-120"/>
               </a:rPr>
-              <a:t>Interceptor MHA: Self-&gt;Target = 0.389 (追击)  Pool Mate = 0.298</a:t>
+              <a:t>+1,345,  +2,376,  +4.0 — 三次 Eval 正向突破!    |    KL: 0.004-0.013 (平稳可控)</a:t>
             </a:r>
             <a:endParaRPr lang="en-US" sz="1400" dirty="0"/>
           </a:p>
           <a:p>
-            <a:pPr indent="0" marL="0">
+            <a:pPr marL="0" indent="0">
               <a:lnSpc>
-                <a:spcPct val="135000"/>
+                <a:spcPct val="130000"/>
               </a:lnSpc>
               <a:buNone/>
             </a:pPr>
+            <a:r>
+              <a:rPr lang="en-US" sz="1400" dirty="0">
+                <a:solidFill>
+                  <a:srgbClr val="4A5568"/>
+                </a:solidFill>
+                <a:latin typeface="Calibri" pitchFamily="34" charset="0"/>
+                <a:ea typeface="Calibri" pitchFamily="34" charset="-122"/>
+                <a:cs typeface="Calibri" pitchFamily="34" charset="-120"/>
+              </a:rPr>
+              <a:t>纯 MLP 基线: 0 次正向突破, 最佳 -4,542.    Self-Attn: 3 次突破, 差距 5,887 分.</a:t>
+            </a:r>
             <a:endParaRPr lang="en-US" sz="1400" dirty="0"/>
           </a:p>
           <a:p>
-            <a:pPr indent="0" marL="0">
+            <a:pPr marL="0" indent="0">
               <a:lnSpc>
-                <a:spcPct val="135000"/>
+                <a:spcPct val="130000"/>
               </a:lnSpc>
               <a:buNone/>
             </a:pPr>
@@ -2311,98 +2015,479 @@
                 <a:ea typeface="Calibri" pitchFamily="34" charset="-122"/>
                 <a:cs typeface="Calibri" pitchFamily="34" charset="-120"/>
               </a:rPr>
-              <a:t>Cohen's d = -0.53 (大效应量, p &lt; 0.001)</a:t>
+              <a:t>结构决定上限. Token 架构仅凭物理交互, 零专家知识, 自发涌现协同追猎行为.</a:t>
             </a:r>
             <a:endParaRPr lang="en-US" sz="1400" dirty="0"/>
           </a:p>
-          <a:p>
-            <a:pPr indent="0" marL="0">
+        </p:txBody>
+      </p:sp>
+      <p:sp>
+        <p:nvSpPr>
+          <p:cNvPr id="8" name="Shape 6"/>
+          <p:cNvSpPr/>
+          <p:nvPr/>
+        </p:nvSpPr>
+        <p:spPr>
+          <a:xfrm>
+            <a:off x="365760" y="3840480"/>
+            <a:ext cx="2423160" cy="1234440"/>
+          </a:xfrm>
+          <a:prstGeom prst="roundRect">
+            <a:avLst>
+              <a:gd name="adj" fmla="val 4444"/>
+            </a:avLst>
+          </a:prstGeom>
+          <a:solidFill>
+            <a:srgbClr val="FFFFFF"/>
+          </a:solidFill>
+          <a:ln/>
+          <a:effectLst>
+            <a:outerShdw blurRad="38100" dist="12700" dir="16200000" algn="bl" rotWithShape="0">
+              <a:srgbClr val="C0D0D8">
+                <a:alpha val="18000"/>
+              </a:srgbClr>
+            </a:outerShdw>
+          </a:effectLst>
+        </p:spPr>
+      </p:sp>
+      <p:sp>
+        <p:nvSpPr>
+          <p:cNvPr id="9" name="Text 7"/>
+          <p:cNvSpPr/>
+          <p:nvPr/>
+        </p:nvSpPr>
+        <p:spPr>
+          <a:xfrm>
+            <a:off x="6627412" y="1090124"/>
+            <a:ext cx="2423160" cy="548640"/>
+          </a:xfrm>
+          <a:prstGeom prst="rect">
+            <a:avLst/>
+          </a:prstGeom>
+          <a:noFill/>
+          <a:ln/>
+        </p:spPr>
+        <p:txBody>
+          <a:bodyPr wrap="square" rtlCol="0" anchor="ctr"/>
+          <a:lstStyle/>
+          <a:p>
+            <a:pPr marL="0" indent="0" algn="ctr">
+              <a:buNone/>
+            </a:pPr>
+            <a:r>
+              <a:rPr lang="en-US" sz="3000" b="1" dirty="0">
+                <a:solidFill>
+                  <a:srgbClr val="F96167"/>
+                </a:solidFill>
+                <a:latin typeface="Georgia" pitchFamily="34" charset="0"/>
+                <a:ea typeface="Georgia" pitchFamily="34" charset="-122"/>
+                <a:cs typeface="Georgia" pitchFamily="34" charset="-120"/>
+              </a:rPr>
+              <a:t>+2,376</a:t>
+            </a:r>
+            <a:endParaRPr lang="en-US" sz="3000" dirty="0"/>
+          </a:p>
+        </p:txBody>
+      </p:sp>
+      <p:sp>
+        <p:nvSpPr>
+          <p:cNvPr id="10" name="Text 8"/>
+          <p:cNvSpPr/>
+          <p:nvPr/>
+        </p:nvSpPr>
+        <p:spPr>
+          <a:xfrm>
+            <a:off x="6627412" y="1657052"/>
+            <a:ext cx="2423160" cy="320040"/>
+          </a:xfrm>
+          <a:prstGeom prst="rect">
+            <a:avLst/>
+          </a:prstGeom>
+          <a:noFill/>
+          <a:ln/>
+        </p:spPr>
+        <p:txBody>
+          <a:bodyPr wrap="square" rtlCol="0" anchor="ctr"/>
+          <a:lstStyle/>
+          <a:p>
+            <a:pPr marL="0" indent="0" algn="ctr">
               <a:lnSpc>
-                <a:spcPct val="135000"/>
+                <a:spcPct val="110000"/>
               </a:lnSpc>
               <a:buNone/>
             </a:pPr>
             <a:r>
-              <a:rPr lang="en-US" sz="1400" dirty="0">
-                <a:solidFill>
-                  <a:srgbClr val="4A5568"/>
-                </a:solidFill>
-                <a:latin typeface="Calibri" pitchFamily="34" charset="0"/>
-                <a:ea typeface="Calibri" pitchFamily="34" charset="-122"/>
-                <a:cs typeface="Calibri" pitchFamily="34" charset="-120"/>
-              </a:rPr>
-              <a:t>Interceptor 对 Target 的关注比 Striker 高 31%.</a:t>
-            </a:r>
-            <a:endParaRPr lang="en-US" sz="1400" dirty="0"/>
-          </a:p>
-          <a:p>
-            <a:pPr indent="0" marL="0">
+              <a:rPr lang="en-US" sz="1300" b="1" dirty="0">
+                <a:solidFill>
+                  <a:srgbClr val="4A5568"/>
+                </a:solidFill>
+                <a:latin typeface="Calibri" pitchFamily="34" charset="0"/>
+                <a:ea typeface="Calibri" pitchFamily="34" charset="-122"/>
+                <a:cs typeface="Calibri" pitchFamily="34" charset="-120"/>
+              </a:rPr>
+              <a:t>最佳 Eval</a:t>
+            </a:r>
+            <a:endParaRPr lang="en-US" sz="1300" dirty="0"/>
+          </a:p>
+        </p:txBody>
+      </p:sp>
+      <p:sp>
+        <p:nvSpPr>
+          <p:cNvPr id="11" name="Shape 9"/>
+          <p:cNvSpPr/>
+          <p:nvPr/>
+        </p:nvSpPr>
+        <p:spPr>
+          <a:xfrm>
+            <a:off x="1260282" y="4997196"/>
+            <a:ext cx="2423160" cy="1234440"/>
+          </a:xfrm>
+          <a:prstGeom prst="roundRect">
+            <a:avLst>
+              <a:gd name="adj" fmla="val 4444"/>
+            </a:avLst>
+          </a:prstGeom>
+          <a:solidFill>
+            <a:srgbClr val="FFFFFF"/>
+          </a:solidFill>
+          <a:ln/>
+          <a:effectLst>
+            <a:outerShdw blurRad="38100" dist="12700" dir="16200000" algn="bl" rotWithShape="0">
+              <a:srgbClr val="C0D0D8">
+                <a:alpha val="18000"/>
+              </a:srgbClr>
+            </a:outerShdw>
+          </a:effectLst>
+        </p:spPr>
+      </p:sp>
+      <p:sp>
+        <p:nvSpPr>
+          <p:cNvPr id="12" name="Text 10"/>
+          <p:cNvSpPr/>
+          <p:nvPr/>
+        </p:nvSpPr>
+        <p:spPr>
+          <a:xfrm>
+            <a:off x="6627412" y="2324564"/>
+            <a:ext cx="2423160" cy="548640"/>
+          </a:xfrm>
+          <a:prstGeom prst="rect">
+            <a:avLst/>
+          </a:prstGeom>
+          <a:noFill/>
+          <a:ln/>
+        </p:spPr>
+        <p:txBody>
+          <a:bodyPr wrap="square" rtlCol="0" anchor="ctr"/>
+          <a:lstStyle/>
+          <a:p>
+            <a:pPr marL="0" indent="0" algn="ctr">
+              <a:buNone/>
+            </a:pPr>
+            <a:r>
+              <a:rPr lang="en-US" sz="3000" b="1" dirty="0">
+                <a:solidFill>
+                  <a:srgbClr val="F96167"/>
+                </a:solidFill>
+                <a:latin typeface="Georgia" pitchFamily="34" charset="0"/>
+                <a:ea typeface="Georgia" pitchFamily="34" charset="-122"/>
+                <a:cs typeface="Georgia" pitchFamily="34" charset="-120"/>
+              </a:rPr>
+              <a:t>3x</a:t>
+            </a:r>
+            <a:endParaRPr lang="en-US" sz="3000" dirty="0"/>
+          </a:p>
+        </p:txBody>
+      </p:sp>
+      <p:sp>
+        <p:nvSpPr>
+          <p:cNvPr id="13" name="Text 11"/>
+          <p:cNvSpPr/>
+          <p:nvPr/>
+        </p:nvSpPr>
+        <p:spPr>
+          <a:xfrm>
+            <a:off x="6627412" y="2891492"/>
+            <a:ext cx="2423160" cy="320040"/>
+          </a:xfrm>
+          <a:prstGeom prst="rect">
+            <a:avLst/>
+          </a:prstGeom>
+          <a:noFill/>
+          <a:ln/>
+        </p:spPr>
+        <p:txBody>
+          <a:bodyPr wrap="square" rtlCol="0" anchor="ctr"/>
+          <a:lstStyle/>
+          <a:p>
+            <a:pPr marL="0" indent="0" algn="ctr">
               <a:lnSpc>
-                <a:spcPct val="135000"/>
+                <a:spcPct val="110000"/>
               </a:lnSpc>
               <a:buNone/>
             </a:pPr>
-            <a:endParaRPr lang="en-US" sz="1400" dirty="0"/>
-          </a:p>
-          <a:p>
-            <a:pPr indent="0" marL="0">
+            <a:r>
+              <a:rPr lang="en-US" sz="1300" b="1" dirty="0">
+                <a:solidFill>
+                  <a:srgbClr val="4A5568"/>
+                </a:solidFill>
+                <a:latin typeface="Calibri" pitchFamily="34" charset="0"/>
+                <a:ea typeface="Calibri" pitchFamily="34" charset="-122"/>
+                <a:cs typeface="Calibri" pitchFamily="34" charset="-120"/>
+              </a:rPr>
+              <a:t>正向突破</a:t>
+            </a:r>
+            <a:endParaRPr lang="en-US" sz="1300" dirty="0"/>
+          </a:p>
+        </p:txBody>
+      </p:sp>
+      <p:sp>
+        <p:nvSpPr>
+          <p:cNvPr id="14" name="Shape 12"/>
+          <p:cNvSpPr/>
+          <p:nvPr/>
+        </p:nvSpPr>
+        <p:spPr>
+          <a:xfrm>
+            <a:off x="8959132" y="1007828"/>
+            <a:ext cx="2423160" cy="1234440"/>
+          </a:xfrm>
+          <a:prstGeom prst="roundRect">
+            <a:avLst>
+              <a:gd name="adj" fmla="val 4444"/>
+            </a:avLst>
+          </a:prstGeom>
+          <a:solidFill>
+            <a:srgbClr val="FFFFFF"/>
+          </a:solidFill>
+          <a:ln/>
+          <a:effectLst>
+            <a:outerShdw blurRad="38100" dist="12700" dir="16200000" algn="bl" rotWithShape="0">
+              <a:srgbClr val="C0D0D8">
+                <a:alpha val="18000"/>
+              </a:srgbClr>
+            </a:outerShdw>
+          </a:effectLst>
+        </p:spPr>
+      </p:sp>
+      <p:sp>
+        <p:nvSpPr>
+          <p:cNvPr id="15" name="Text 13"/>
+          <p:cNvSpPr/>
+          <p:nvPr/>
+        </p:nvSpPr>
+        <p:spPr>
+          <a:xfrm>
+            <a:off x="8959132" y="1080980"/>
+            <a:ext cx="2423160" cy="548640"/>
+          </a:xfrm>
+          <a:prstGeom prst="rect">
+            <a:avLst/>
+          </a:prstGeom>
+          <a:noFill/>
+          <a:ln/>
+        </p:spPr>
+        <p:txBody>
+          <a:bodyPr wrap="square" rtlCol="0" anchor="ctr"/>
+          <a:lstStyle/>
+          <a:p>
+            <a:pPr marL="0" indent="0" algn="ctr">
+              <a:buNone/>
+            </a:pPr>
+            <a:r>
+              <a:rPr lang="en-US" sz="3000" b="1" dirty="0">
+                <a:solidFill>
+                  <a:srgbClr val="F96167"/>
+                </a:solidFill>
+                <a:latin typeface="Georgia" pitchFamily="34" charset="0"/>
+                <a:ea typeface="Georgia" pitchFamily="34" charset="-122"/>
+                <a:cs typeface="Georgia" pitchFamily="34" charset="-120"/>
+              </a:rPr>
+              <a:t>320</a:t>
+            </a:r>
+            <a:endParaRPr lang="en-US" sz="3000" dirty="0"/>
+          </a:p>
+        </p:txBody>
+      </p:sp>
+      <p:sp>
+        <p:nvSpPr>
+          <p:cNvPr id="16" name="Text 14"/>
+          <p:cNvSpPr/>
+          <p:nvPr/>
+        </p:nvSpPr>
+        <p:spPr>
+          <a:xfrm>
+            <a:off x="8959132" y="1647908"/>
+            <a:ext cx="2423160" cy="320040"/>
+          </a:xfrm>
+          <a:prstGeom prst="rect">
+            <a:avLst/>
+          </a:prstGeom>
+          <a:noFill/>
+          <a:ln/>
+        </p:spPr>
+        <p:txBody>
+          <a:bodyPr wrap="square" rtlCol="0" anchor="ctr"/>
+          <a:lstStyle/>
+          <a:p>
+            <a:pPr marL="0" indent="0" algn="ctr">
               <a:lnSpc>
-                <a:spcPct val="135000"/>
+                <a:spcPct val="110000"/>
               </a:lnSpc>
               <a:buNone/>
             </a:pPr>
             <a:r>
-              <a:rPr lang="en-US" sz="1400" dirty="0">
-                <a:solidFill>
-                  <a:srgbClr val="4A5568"/>
-                </a:solidFill>
-                <a:latin typeface="Calibri" pitchFamily="34" charset="0"/>
-                <a:ea typeface="Calibri" pitchFamily="34" charset="-122"/>
-                <a:cs typeface="Calibri" pitchFamily="34" charset="-120"/>
-              </a:rPr>
-              <a:t>双机 MHA Self-&gt;Mate 均维持 ~0.44 高水平.</a:t>
-            </a:r>
-            <a:endParaRPr lang="en-US" sz="1400" dirty="0"/>
-          </a:p>
-          <a:p>
-            <a:pPr indent="0" marL="0">
+              <a:rPr lang="en-US" sz="1300" b="1" dirty="0">
+                <a:solidFill>
+                  <a:srgbClr val="4A5568"/>
+                </a:solidFill>
+                <a:latin typeface="Calibri" pitchFamily="34" charset="0"/>
+                <a:ea typeface="Calibri" pitchFamily="34" charset="-122"/>
+                <a:cs typeface="Calibri" pitchFamily="34" charset="-120"/>
+              </a:rPr>
+              <a:t>训练轮数</a:t>
+            </a:r>
+            <a:endParaRPr lang="en-US" sz="1300" dirty="0"/>
+          </a:p>
+        </p:txBody>
+      </p:sp>
+      <p:sp>
+        <p:nvSpPr>
+          <p:cNvPr id="18" name="Text 16"/>
+          <p:cNvSpPr/>
+          <p:nvPr/>
+        </p:nvSpPr>
+        <p:spPr>
+          <a:xfrm>
+            <a:off x="8959132" y="2253797"/>
+            <a:ext cx="2423160" cy="548640"/>
+          </a:xfrm>
+          <a:prstGeom prst="rect">
+            <a:avLst/>
+          </a:prstGeom>
+          <a:noFill/>
+          <a:ln/>
+        </p:spPr>
+        <p:txBody>
+          <a:bodyPr wrap="square" rtlCol="0" anchor="ctr"/>
+          <a:lstStyle/>
+          <a:p>
+            <a:pPr marL="0" indent="0" algn="ctr">
+              <a:buNone/>
+            </a:pPr>
+            <a:r>
+              <a:rPr lang="en-US" sz="3000" b="1" dirty="0">
+                <a:solidFill>
+                  <a:srgbClr val="F96167"/>
+                </a:solidFill>
+                <a:latin typeface="Georgia" pitchFamily="34" charset="0"/>
+                <a:ea typeface="Georgia" pitchFamily="34" charset="-122"/>
+                <a:cs typeface="Georgia" pitchFamily="34" charset="-120"/>
+              </a:rPr>
+              <a:t>0</a:t>
+            </a:r>
+            <a:endParaRPr lang="en-US" sz="3000" dirty="0"/>
+          </a:p>
+        </p:txBody>
+      </p:sp>
+      <p:sp>
+        <p:nvSpPr>
+          <p:cNvPr id="19" name="Text 17"/>
+          <p:cNvSpPr/>
+          <p:nvPr/>
+        </p:nvSpPr>
+        <p:spPr>
+          <a:xfrm>
+            <a:off x="8959132" y="2820725"/>
+            <a:ext cx="2423160" cy="320040"/>
+          </a:xfrm>
+          <a:prstGeom prst="rect">
+            <a:avLst/>
+          </a:prstGeom>
+          <a:noFill/>
+          <a:ln/>
+        </p:spPr>
+        <p:txBody>
+          <a:bodyPr wrap="square" rtlCol="0" anchor="ctr"/>
+          <a:lstStyle/>
+          <a:p>
+            <a:pPr marL="0" indent="0" algn="ctr">
               <a:lnSpc>
-                <a:spcPct val="135000"/>
+                <a:spcPct val="110000"/>
               </a:lnSpc>
               <a:buNone/>
             </a:pPr>
             <a:r>
-              <a:rPr lang="en-US" sz="1400" dirty="0">
-                <a:solidFill>
-                  <a:srgbClr val="4A5568"/>
-                </a:solidFill>
-                <a:latin typeface="Calibri" pitchFamily="34" charset="0"/>
-                <a:ea typeface="Calibri" pitchFamily="34" charset="-122"/>
-                <a:cs typeface="Calibri" pitchFamily="34" charset="-120"/>
-              </a:rPr>
-              <a:t>持续性隐式协调 — 非二元切换 — 参数共享网络自发打破对称性的终极证据.</a:t>
-            </a:r>
-            <a:endParaRPr lang="en-US" sz="1400" dirty="0"/>
+              <a:rPr lang="en-US" sz="1300" b="1" dirty="0">
+                <a:solidFill>
+                  <a:srgbClr val="4A5568"/>
+                </a:solidFill>
+                <a:latin typeface="Calibri" pitchFamily="34" charset="0"/>
+                <a:ea typeface="Calibri" pitchFamily="34" charset="-122"/>
+                <a:cs typeface="Calibri" pitchFamily="34" charset="-120"/>
+              </a:rPr>
+              <a:t>专家样本</a:t>
+            </a:r>
+            <a:endParaRPr lang="en-US" sz="1300" dirty="0"/>
+          </a:p>
+        </p:txBody>
+      </p:sp>
+      <p:sp>
+        <p:nvSpPr>
+          <p:cNvPr id="21" name="Text 18"/>
+          <p:cNvSpPr/>
+          <p:nvPr/>
+        </p:nvSpPr>
+        <p:spPr>
+          <a:xfrm>
+            <a:off x="7256702" y="4840992"/>
+            <a:ext cx="3810662" cy="457200"/>
+          </a:xfrm>
+          <a:prstGeom prst="rect">
+            <a:avLst/>
+          </a:prstGeom>
+          <a:noFill/>
+          <a:ln/>
+        </p:spPr>
+        <p:txBody>
+          <a:bodyPr wrap="square" rtlCol="0" anchor="ctr"/>
+          <a:lstStyle/>
+          <a:p>
+            <a:pPr marL="0" indent="0">
+              <a:buNone/>
+            </a:pPr>
+            <a:r>
+              <a:rPr lang="en-US" sz="1100" i="1" dirty="0">
+                <a:solidFill>
+                  <a:srgbClr val="8899A6"/>
+                </a:solidFill>
+                <a:latin typeface="Calibri" pitchFamily="34" charset="0"/>
+                <a:ea typeface="Calibri" pitchFamily="34" charset="-122"/>
+                <a:cs typeface="Calibri" pitchFamily="34" charset="-120"/>
+              </a:rPr>
+              <a:t>Spatial KDE: 50 集 Eval, 127K 帧. 目标尾部 30-60 deg 扇区高密度聚集 — 统计级合围几何收敛.</a:t>
+            </a:r>
+            <a:endParaRPr lang="en-US" sz="1100" dirty="0"/>
           </a:p>
         </p:txBody>
       </p:sp>
       <p:pic>
         <p:nvPicPr>
-          <p:cNvPr id="8" name="Image 0" descr="results/viz/fig3_role_attention_matrix.png">    </p:cNvPr>
+          <p:cNvPr id="22" name="Image 1" descr="results/viz/paper_charts/chart5_health_metrics.png"/>
           <p:cNvPicPr>
             <a:picLocks noChangeAspect="1"/>
           </p:cNvPicPr>
           <p:nvPr/>
         </p:nvPicPr>
         <p:blipFill>
-          <a:blip r:embed="rId1"/>
-          <a:srcRect l="0" r="0" t="0" b="0"/>
+          <a:blip r:embed="rId3"/>
+          <a:srcRect/>
           <a:stretch/>
         </p:blipFill>
         <p:spPr>
           <a:xfrm>
-            <a:off x="6400800" y="1051560"/>
-            <a:ext cx="5303520" cy="5486400"/>
+            <a:off x="237971" y="2907434"/>
+            <a:ext cx="6890942" cy="3727929"/>
           </a:xfrm>
           <a:prstGeom prst="rect">
             <a:avLst/>
@@ -2419,12 +2504,222 @@
 
 <file path=ppt/slides/slide11.xml><?xml version="1.0" encoding="utf-8"?>
 <p:sld xmlns:a="http://schemas.openxmlformats.org/drawingml/2006/main" xmlns:r="http://schemas.openxmlformats.org/officeDocument/2006/relationships" xmlns:p="http://schemas.openxmlformats.org/presentationml/2006/main">
-  <p:cSld name="Slide 11">
+  <p:cSld>
+    <p:spTree>
+      <p:nvGrpSpPr>
+        <p:cNvPr id="1" name=""/>
+        <p:cNvGrpSpPr/>
+        <p:nvPr/>
+      </p:nvGrpSpPr>
+      <p:grpSpPr>
+        <a:xfrm>
+          <a:off x="0" y="0"/>
+          <a:ext cx="0" cy="0"/>
+          <a:chOff x="0" y="0"/>
+          <a:chExt cx="0" cy="0"/>
+        </a:xfrm>
+      </p:grpSpPr>
+      <p:pic>
+        <p:nvPicPr>
+          <p:cNvPr id="2" name="图片 1">
+            <a:extLst>
+              <a:ext uri="{FF2B5EF4-FFF2-40B4-BE49-F238E27FC236}">
+                <a16:creationId xmlns:a16="http://schemas.microsoft.com/office/drawing/2014/main" id="{EB764CE5-D208-4DB2-930F-6285DEBBC138}"/>
+              </a:ext>
+            </a:extLst>
+          </p:cNvPr>
+          <p:cNvPicPr>
+            <a:picLocks noChangeAspect="1"/>
+          </p:cNvPicPr>
+          <p:nvPr/>
+        </p:nvPicPr>
+        <p:blipFill>
+          <a:blip r:embed="rId2"/>
+          <a:stretch>
+            <a:fillRect/>
+          </a:stretch>
+        </p:blipFill>
+        <p:spPr>
+          <a:xfrm>
+            <a:off x="146327" y="437321"/>
+            <a:ext cx="5638779" cy="6065079"/>
+          </a:xfrm>
+          <a:prstGeom prst="rect">
+            <a:avLst/>
+          </a:prstGeom>
+        </p:spPr>
+      </p:pic>
+      <p:pic>
+        <p:nvPicPr>
+          <p:cNvPr id="4" name="图片 3">
+            <a:extLst>
+              <a:ext uri="{FF2B5EF4-FFF2-40B4-BE49-F238E27FC236}">
+                <a16:creationId xmlns:a16="http://schemas.microsoft.com/office/drawing/2014/main" id="{86A727F9-3792-47CC-B6F9-57A2BE5BE23C}"/>
+              </a:ext>
+            </a:extLst>
+          </p:cNvPr>
+          <p:cNvPicPr>
+            <a:picLocks noChangeAspect="1"/>
+          </p:cNvPicPr>
+          <p:nvPr/>
+        </p:nvPicPr>
+        <p:blipFill>
+          <a:blip r:embed="rId3"/>
+          <a:stretch>
+            <a:fillRect/>
+          </a:stretch>
+        </p:blipFill>
+        <p:spPr>
+          <a:xfrm>
+            <a:off x="6142517" y="546100"/>
+            <a:ext cx="5447340" cy="5765800"/>
+          </a:xfrm>
+          <a:prstGeom prst="rect">
+            <a:avLst/>
+          </a:prstGeom>
+        </p:spPr>
+      </p:pic>
+    </p:spTree>
+    <p:extLst>
+      <p:ext uri="{BB962C8B-B14F-4D97-AF65-F5344CB8AC3E}">
+        <p14:creationId xmlns:p14="http://schemas.microsoft.com/office/powerpoint/2010/main" val="1616542810"/>
+      </p:ext>
+    </p:extLst>
+  </p:cSld>
+  <p:clrMapOvr>
+    <a:masterClrMapping/>
+  </p:clrMapOvr>
+</p:sld>
+</file>
+
+<file path=ppt/slides/slide12.xml><?xml version="1.0" encoding="utf-8"?>
+<p:sld xmlns:a="http://schemas.openxmlformats.org/drawingml/2006/main" xmlns:r="http://schemas.openxmlformats.org/officeDocument/2006/relationships" xmlns:p="http://schemas.openxmlformats.org/presentationml/2006/main">
+  <p:cSld>
+    <p:spTree>
+      <p:nvGrpSpPr>
+        <p:cNvPr id="1" name=""/>
+        <p:cNvGrpSpPr/>
+        <p:nvPr/>
+      </p:nvGrpSpPr>
+      <p:grpSpPr>
+        <a:xfrm>
+          <a:off x="0" y="0"/>
+          <a:ext cx="0" cy="0"/>
+          <a:chOff x="0" y="0"/>
+          <a:chExt cx="0" cy="0"/>
+        </a:xfrm>
+      </p:grpSpPr>
+      <p:pic>
+        <p:nvPicPr>
+          <p:cNvPr id="2" name="图片 1">
+            <a:extLst>
+              <a:ext uri="{FF2B5EF4-FFF2-40B4-BE49-F238E27FC236}">
+                <a16:creationId xmlns:a16="http://schemas.microsoft.com/office/drawing/2014/main" id="{B00B900A-6DE7-427F-9EA2-428B776033A2}"/>
+              </a:ext>
+            </a:extLst>
+          </p:cNvPr>
+          <p:cNvPicPr>
+            <a:picLocks noChangeAspect="1"/>
+          </p:cNvPicPr>
+          <p:nvPr/>
+        </p:nvPicPr>
+        <p:blipFill>
+          <a:blip r:embed="rId2"/>
+          <a:stretch>
+            <a:fillRect/>
+          </a:stretch>
+        </p:blipFill>
+        <p:spPr>
+          <a:xfrm>
+            <a:off x="266699" y="60454"/>
+            <a:ext cx="11340879" cy="6737092"/>
+          </a:xfrm>
+          <a:prstGeom prst="rect">
+            <a:avLst/>
+          </a:prstGeom>
+        </p:spPr>
+      </p:pic>
+    </p:spTree>
+    <p:extLst>
+      <p:ext uri="{BB962C8B-B14F-4D97-AF65-F5344CB8AC3E}">
+        <p14:creationId xmlns:p14="http://schemas.microsoft.com/office/powerpoint/2010/main" val="1192431324"/>
+      </p:ext>
+    </p:extLst>
+  </p:cSld>
+  <p:clrMapOvr>
+    <a:masterClrMapping/>
+  </p:clrMapOvr>
+</p:sld>
+</file>
+
+<file path=ppt/slides/slide13.xml><?xml version="1.0" encoding="utf-8"?>
+<p:sld xmlns:a="http://schemas.openxmlformats.org/drawingml/2006/main" xmlns:r="http://schemas.openxmlformats.org/officeDocument/2006/relationships" xmlns:p="http://schemas.openxmlformats.org/presentationml/2006/main">
+  <p:cSld>
+    <p:spTree>
+      <p:nvGrpSpPr>
+        <p:cNvPr id="1" name=""/>
+        <p:cNvGrpSpPr/>
+        <p:nvPr/>
+      </p:nvGrpSpPr>
+      <p:grpSpPr>
+        <a:xfrm>
+          <a:off x="0" y="0"/>
+          <a:ext cx="0" cy="0"/>
+          <a:chOff x="0" y="0"/>
+          <a:chExt cx="0" cy="0"/>
+        </a:xfrm>
+      </p:grpSpPr>
+      <p:pic>
+        <p:nvPicPr>
+          <p:cNvPr id="2" name="Image 0" descr="results/viz/paper_charts/chart2_spatial_kde.png">
+            <a:extLst>
+              <a:ext uri="{FF2B5EF4-FFF2-40B4-BE49-F238E27FC236}">
+                <a16:creationId xmlns:a16="http://schemas.microsoft.com/office/drawing/2014/main" id="{3BC32FDF-B6ED-4D1A-893B-BEC12242C2DE}"/>
+              </a:ext>
+            </a:extLst>
+          </p:cNvPr>
+          <p:cNvPicPr>
+            <a:picLocks noChangeAspect="1"/>
+          </p:cNvPicPr>
+          <p:nvPr/>
+        </p:nvPicPr>
+        <p:blipFill>
+          <a:blip r:embed="rId2"/>
+          <a:srcRect/>
+          <a:stretch/>
+        </p:blipFill>
+        <p:spPr>
+          <a:xfrm>
+            <a:off x="955593" y="438082"/>
+            <a:ext cx="9878058" cy="5584270"/>
+          </a:xfrm>
+          <a:prstGeom prst="rect">
+            <a:avLst/>
+          </a:prstGeom>
+        </p:spPr>
+      </p:pic>
+    </p:spTree>
+    <p:extLst>
+      <p:ext uri="{BB962C8B-B14F-4D97-AF65-F5344CB8AC3E}">
+        <p14:creationId xmlns:p14="http://schemas.microsoft.com/office/powerpoint/2010/main" val="3063867588"/>
+      </p:ext>
+    </p:extLst>
+  </p:cSld>
+  <p:clrMapOvr>
+    <a:masterClrMapping/>
+  </p:clrMapOvr>
+</p:sld>
+</file>
+
+<file path=ppt/slides/slide14.xml><?xml version="1.0" encoding="utf-8"?>
+<p:sld xmlns:a="http://schemas.openxmlformats.org/drawingml/2006/main" xmlns:r="http://schemas.openxmlformats.org/officeDocument/2006/relationships" xmlns:p="http://schemas.openxmlformats.org/presentationml/2006/main">
+  <p:cSld name="Slide 10">
     <p:bg>
       <p:bgPr>
         <a:solidFill>
           <a:srgbClr val="FFFFFF"/>
         </a:solidFill>
+        <a:effectLst/>
       </p:bgPr>
     </p:bg>
     <p:spTree>
@@ -2482,7 +2777,7 @@
           <a:bodyPr wrap="square" lIns="0" tIns="0" rIns="0" bIns="0" rtlCol="0" anchor="ctr"/>
           <a:lstStyle/>
           <a:p>
-            <a:pPr indent="0" marL="0">
+            <a:pPr marL="0" indent="0">
               <a:buNone/>
             </a:pPr>
             <a:r>
@@ -2494,7 +2789,7 @@
                 <a:ea typeface="Georgia" pitchFamily="34" charset="-122"/>
                 <a:cs typeface="Georgia" pitchFamily="34" charset="-120"/>
               </a:rPr>
-              <a:t>10</a:t>
+              <a:t>9</a:t>
             </a:r>
             <a:endParaRPr lang="en-US" sz="2600" dirty="0"/>
           </a:p>
@@ -2521,11 +2816,11 @@
           <a:bodyPr wrap="square" rtlCol="0" anchor="ctr"/>
           <a:lstStyle/>
           <a:p>
-            <a:pPr indent="0" marL="0">
-              <a:buNone/>
-            </a:pPr>
-            <a:r>
-              <a:rPr lang="en-US" sz="3000" b="1" dirty="0">
+            <a:pPr marL="0" indent="0">
+              <a:buNone/>
+            </a:pPr>
+            <a:r>
+              <a:rPr lang="en-US" sz="3000" b="1" dirty="0" err="1">
                 <a:solidFill>
                   <a:srgbClr val="065A82"/>
                 </a:solidFill>
@@ -2533,7 +2828,7 @@
                 <a:ea typeface="Georgia" pitchFamily="34" charset="-122"/>
                 <a:cs typeface="Georgia" pitchFamily="34" charset="-120"/>
               </a:rPr>
-              <a:t>边界分析: AND-Gate 为何最终回落</a:t>
+              <a:t>参数共享网络的自发角色分化</a:t>
             </a:r>
             <a:endParaRPr lang="en-US" sz="3000" dirty="0"/>
           </a:p>
@@ -2567,20 +2862,20 @@
         </p:nvSpPr>
         <p:spPr>
           <a:xfrm>
-            <a:off x="365760" y="1051560"/>
-            <a:ext cx="5943600" cy="320040"/>
-          </a:xfrm>
-          <a:prstGeom prst="rect">
-            <a:avLst/>
-          </a:prstGeom>
-          <a:noFill/>
-          <a:ln/>
-        </p:spPr>
-        <p:txBody>
-          <a:bodyPr wrap="square" rtlCol="0" anchor="ctr"/>
-          <a:lstStyle/>
-          <a:p>
-            <a:pPr indent="0" marL="0">
+            <a:off x="420624" y="1016625"/>
+            <a:ext cx="3839119" cy="650165"/>
+          </a:xfrm>
+          <a:prstGeom prst="rect">
+            <a:avLst/>
+          </a:prstGeom>
+          <a:noFill/>
+          <a:ln/>
+        </p:spPr>
+        <p:txBody>
+          <a:bodyPr wrap="square" rtlCol="0" anchor="ctr"/>
+          <a:lstStyle/>
+          <a:p>
+            <a:pPr marL="0" indent="0">
               <a:buNone/>
             </a:pPr>
             <a:r>
@@ -2592,7 +2887,7 @@
                 <a:ea typeface="Georgia" pitchFamily="34" charset="-122"/>
                 <a:cs typeface="Georgia" pitchFamily="34" charset="-120"/>
               </a:rPr>
-              <a:t>AND-Gate 死亡解剖 (Exp 3 checkpoint, 10 集 Eval)</a:t>
+              <a:t>角色分组均值注意力矩阵 (49 集, 7,858 步/角色, 按瞬时几何分角色)</a:t>
             </a:r>
             <a:endParaRPr lang="en-US" sz="1800" dirty="0"/>
           </a:p>
@@ -2600,761 +2895,194 @@
       </p:sp>
       <p:sp>
         <p:nvSpPr>
-          <p:cNvPr id="7" name="Shape 5"/>
-          <p:cNvSpPr/>
-          <p:nvPr/>
-        </p:nvSpPr>
-        <p:spPr>
-          <a:xfrm>
-            <a:off x="365760" y="1554480"/>
-            <a:ext cx="5120640" cy="621792"/>
-          </a:xfrm>
-          <a:prstGeom prst="roundRect">
-            <a:avLst>
-              <a:gd name="adj" fmla="val 8824"/>
-            </a:avLst>
-          </a:prstGeom>
-          <a:solidFill>
-            <a:srgbClr val="F2F7F9"/>
-          </a:solidFill>
-          <a:ln/>
-        </p:spPr>
-      </p:sp>
-      <p:sp>
-        <p:nvSpPr>
-          <p:cNvPr id="8" name="Text 6"/>
-          <p:cNvSpPr/>
-          <p:nvPr/>
-        </p:nvSpPr>
-        <p:spPr>
-          <a:xfrm>
-            <a:off x="548640" y="1554480"/>
-            <a:ext cx="3291840" cy="347472"/>
-          </a:xfrm>
-          <a:prstGeom prst="rect">
-            <a:avLst/>
-          </a:prstGeom>
-          <a:noFill/>
-          <a:ln/>
-        </p:spPr>
-        <p:txBody>
-          <a:bodyPr wrap="square" rtlCol="0" anchor="b"/>
-          <a:lstStyle/>
-          <a:p>
-            <a:pPr indent="0" marL="0">
-              <a:buNone/>
-            </a:pPr>
-            <a:r>
-              <a:rPr lang="en-US" sz="1200" dirty="0">
-                <a:solidFill>
-                  <a:srgbClr val="4A5568"/>
-                </a:solidFill>
-                <a:latin typeface="Calibri" pitchFamily="34" charset="0"/>
-                <a:ea typeface="Calibri" pitchFamily="34" charset="-122"/>
-                <a:cs typeface="Calibri" pitchFamily="34" charset="-120"/>
-              </a:rPr>
-              <a:t>双机同步入线率 (BOTH &lt; 800m)</a:t>
-            </a:r>
-            <a:endParaRPr lang="en-US" sz="1200" dirty="0"/>
-          </a:p>
-        </p:txBody>
-      </p:sp>
-      <p:sp>
-        <p:nvSpPr>
-          <p:cNvPr id="9" name="Text 7"/>
-          <p:cNvSpPr/>
-          <p:nvPr/>
-        </p:nvSpPr>
-        <p:spPr>
-          <a:xfrm>
-            <a:off x="4023360" y="1554480"/>
-            <a:ext cx="1097280" cy="347472"/>
-          </a:xfrm>
-          <a:prstGeom prst="rect">
-            <a:avLst/>
-          </a:prstGeom>
-          <a:noFill/>
-          <a:ln/>
-        </p:spPr>
-        <p:txBody>
-          <a:bodyPr wrap="square" rtlCol="0" anchor="b"/>
-          <a:lstStyle/>
-          <a:p>
-            <a:pPr algn="r" indent="0" marL="0">
-              <a:buNone/>
-            </a:pPr>
-            <a:r>
-              <a:rPr lang="en-US" sz="1600" b="1" dirty="0">
-                <a:solidFill>
-                  <a:srgbClr val="F96167"/>
-                </a:solidFill>
-                <a:latin typeface="Georgia" pitchFamily="34" charset="0"/>
-                <a:ea typeface="Georgia" pitchFamily="34" charset="-122"/>
-                <a:cs typeface="Georgia" pitchFamily="34" charset="-120"/>
-              </a:rPr>
-              <a:t>0.0%</a:t>
-            </a:r>
-            <a:endParaRPr lang="en-US" sz="1600" dirty="0"/>
-          </a:p>
-        </p:txBody>
-      </p:sp>
-      <p:sp>
-        <p:nvSpPr>
-          <p:cNvPr id="10" name="Text 8"/>
-          <p:cNvSpPr/>
-          <p:nvPr/>
-        </p:nvSpPr>
-        <p:spPr>
-          <a:xfrm>
-            <a:off x="548640" y="1901952"/>
-            <a:ext cx="4572000" cy="201168"/>
-          </a:xfrm>
-          <a:prstGeom prst="rect">
-            <a:avLst/>
-          </a:prstGeom>
-          <a:noFill/>
-          <a:ln/>
-        </p:spPr>
-        <p:txBody>
-          <a:bodyPr wrap="square" rtlCol="0" anchor="t"/>
-          <a:lstStyle/>
-          <a:p>
-            <a:pPr indent="0" marL="0">
-              <a:buNone/>
-            </a:pPr>
-            <a:r>
-              <a:rPr lang="en-US" sz="1000" dirty="0">
-                <a:solidFill>
-                  <a:srgbClr val="8899A6"/>
-                </a:solidFill>
-                <a:latin typeface="Calibri" pitchFamily="34" charset="0"/>
-                <a:ea typeface="Calibri" pitchFamily="34" charset="-122"/>
-                <a:cs typeface="Calibri" pitchFamily="34" charset="-120"/>
-              </a:rPr>
-              <a:t>致命瓶颈 — 零次!</a:t>
-            </a:r>
-            <a:endParaRPr lang="en-US" sz="1000" dirty="0"/>
-          </a:p>
-        </p:txBody>
-      </p:sp>
-      <p:sp>
-        <p:nvSpPr>
-          <p:cNvPr id="11" name="Shape 9"/>
-          <p:cNvSpPr/>
-          <p:nvPr/>
-        </p:nvSpPr>
-        <p:spPr>
-          <a:xfrm>
-            <a:off x="365760" y="2231136"/>
-            <a:ext cx="5120640" cy="621792"/>
-          </a:xfrm>
-          <a:prstGeom prst="roundRect">
-            <a:avLst>
-              <a:gd name="adj" fmla="val 8824"/>
-            </a:avLst>
-          </a:prstGeom>
-          <a:solidFill>
-            <a:srgbClr val="F2F7F9"/>
-          </a:solidFill>
-          <a:ln/>
-        </p:spPr>
-      </p:sp>
-      <p:sp>
-        <p:nvSpPr>
-          <p:cNvPr id="12" name="Text 10"/>
-          <p:cNvSpPr/>
-          <p:nvPr/>
-        </p:nvSpPr>
-        <p:spPr>
-          <a:xfrm>
-            <a:off x="548640" y="2231136"/>
-            <a:ext cx="3291840" cy="347472"/>
-          </a:xfrm>
-          <a:prstGeom prst="rect">
-            <a:avLst/>
-          </a:prstGeom>
-          <a:noFill/>
-          <a:ln/>
-        </p:spPr>
-        <p:txBody>
-          <a:bodyPr wrap="square" rtlCol="0" anchor="b"/>
-          <a:lstStyle/>
-          <a:p>
-            <a:pPr indent="0" marL="0">
-              <a:buNone/>
-            </a:pPr>
-            <a:r>
-              <a:rPr lang="en-US" sz="1200" dirty="0">
-                <a:solidFill>
-                  <a:srgbClr val="4A5568"/>
-                </a:solidFill>
-                <a:latin typeface="Calibri" pitchFamily="34" charset="0"/>
-                <a:ea typeface="Calibri" pitchFamily="34" charset="-122"/>
-                <a:cs typeface="Calibri" pitchFamily="34" charset="-120"/>
-              </a:rPr>
-              <a:t>单机入线率 (&gt;=1 &lt; 800m)</a:t>
-            </a:r>
-            <a:endParaRPr lang="en-US" sz="1200" dirty="0"/>
-          </a:p>
-        </p:txBody>
-      </p:sp>
-      <p:sp>
-        <p:nvSpPr>
-          <p:cNvPr id="13" name="Text 11"/>
-          <p:cNvSpPr/>
-          <p:nvPr/>
-        </p:nvSpPr>
-        <p:spPr>
-          <a:xfrm>
-            <a:off x="4023360" y="2231136"/>
-            <a:ext cx="1097280" cy="347472"/>
-          </a:xfrm>
-          <a:prstGeom prst="rect">
-            <a:avLst/>
-          </a:prstGeom>
-          <a:noFill/>
-          <a:ln/>
-        </p:spPr>
-        <p:txBody>
-          <a:bodyPr wrap="square" rtlCol="0" anchor="b"/>
-          <a:lstStyle/>
-          <a:p>
-            <a:pPr algn="r" indent="0" marL="0">
-              <a:buNone/>
-            </a:pPr>
-            <a:r>
-              <a:rPr lang="en-US" sz="1600" b="1" dirty="0">
-                <a:solidFill>
-                  <a:srgbClr val="F96167"/>
-                </a:solidFill>
-                <a:latin typeface="Georgia" pitchFamily="34" charset="0"/>
-                <a:ea typeface="Georgia" pitchFamily="34" charset="-122"/>
-                <a:cs typeface="Georgia" pitchFamily="34" charset="-120"/>
-              </a:rPr>
-              <a:t>22.1%</a:t>
-            </a:r>
-            <a:endParaRPr lang="en-US" sz="1600" dirty="0"/>
-          </a:p>
-        </p:txBody>
-      </p:sp>
-      <p:sp>
-        <p:nvSpPr>
-          <p:cNvPr id="14" name="Text 12"/>
-          <p:cNvSpPr/>
-          <p:nvPr/>
-        </p:nvSpPr>
-        <p:spPr>
-          <a:xfrm>
-            <a:off x="548640" y="2578608"/>
-            <a:ext cx="4572000" cy="201168"/>
-          </a:xfrm>
-          <a:prstGeom prst="rect">
-            <a:avLst/>
-          </a:prstGeom>
-          <a:noFill/>
-          <a:ln/>
-        </p:spPr>
-        <p:txBody>
-          <a:bodyPr wrap="square" rtlCol="0" anchor="t"/>
-          <a:lstStyle/>
-          <a:p>
-            <a:pPr indent="0" marL="0">
-              <a:buNone/>
-            </a:pPr>
-            <a:r>
-              <a:rPr lang="en-US" sz="1000" dirty="0">
-                <a:solidFill>
-                  <a:srgbClr val="8899A6"/>
-                </a:solidFill>
-                <a:latin typeface="Calibri" pitchFamily="34" charset="0"/>
-                <a:ea typeface="Calibri" pitchFamily="34" charset="-122"/>
-                <a:cs typeface="Calibri" pitchFamily="34" charset="-120"/>
-              </a:rPr>
-              <a:t>P0 可以接近</a:t>
-            </a:r>
-            <a:endParaRPr lang="en-US" sz="1000" dirty="0"/>
-          </a:p>
-        </p:txBody>
-      </p:sp>
-      <p:sp>
-        <p:nvSpPr>
-          <p:cNvPr id="15" name="Shape 13"/>
-          <p:cNvSpPr/>
-          <p:nvPr/>
-        </p:nvSpPr>
-        <p:spPr>
-          <a:xfrm>
-            <a:off x="365760" y="2907792"/>
-            <a:ext cx="5120640" cy="621792"/>
-          </a:xfrm>
-          <a:prstGeom prst="roundRect">
-            <a:avLst>
-              <a:gd name="adj" fmla="val 8824"/>
-            </a:avLst>
-          </a:prstGeom>
-          <a:solidFill>
-            <a:srgbClr val="F2F7F9"/>
-          </a:solidFill>
-          <a:ln/>
-        </p:spPr>
-      </p:sp>
-      <p:sp>
-        <p:nvSpPr>
-          <p:cNvPr id="16" name="Text 14"/>
-          <p:cNvSpPr/>
-          <p:nvPr/>
-        </p:nvSpPr>
-        <p:spPr>
-          <a:xfrm>
-            <a:off x="548640" y="2907792"/>
-            <a:ext cx="3291840" cy="347472"/>
-          </a:xfrm>
-          <a:prstGeom prst="rect">
-            <a:avLst/>
-          </a:prstGeom>
-          <a:noFill/>
-          <a:ln/>
-        </p:spPr>
-        <p:txBody>
-          <a:bodyPr wrap="square" rtlCol="0" anchor="b"/>
-          <a:lstStyle/>
-          <a:p>
-            <a:pPr indent="0" marL="0">
-              <a:buNone/>
-            </a:pPr>
-            <a:r>
-              <a:rPr lang="en-US" sz="1200" dirty="0">
-                <a:solidFill>
-                  <a:srgbClr val="4A5568"/>
-                </a:solidFill>
-                <a:latin typeface="Calibri" pitchFamily="34" charset="0"/>
-                <a:ea typeface="Calibri" pitchFamily="34" charset="-122"/>
-                <a:cs typeface="Calibri" pitchFamily="34" charset="-120"/>
-              </a:rPr>
-              <a:t>夹击角 &gt; 30 deg</a:t>
-            </a:r>
-            <a:endParaRPr lang="en-US" sz="1200" dirty="0"/>
-          </a:p>
-        </p:txBody>
-      </p:sp>
-      <p:sp>
-        <p:nvSpPr>
-          <p:cNvPr id="17" name="Text 15"/>
-          <p:cNvSpPr/>
-          <p:nvPr/>
-        </p:nvSpPr>
-        <p:spPr>
-          <a:xfrm>
-            <a:off x="4023360" y="2907792"/>
-            <a:ext cx="1097280" cy="347472"/>
-          </a:xfrm>
-          <a:prstGeom prst="rect">
-            <a:avLst/>
-          </a:prstGeom>
-          <a:noFill/>
-          <a:ln/>
-        </p:spPr>
-        <p:txBody>
-          <a:bodyPr wrap="square" rtlCol="0" anchor="b"/>
-          <a:lstStyle/>
-          <a:p>
-            <a:pPr algn="r" indent="0" marL="0">
-              <a:buNone/>
-            </a:pPr>
-            <a:r>
-              <a:rPr lang="en-US" sz="1600" b="1" dirty="0">
-                <a:solidFill>
-                  <a:srgbClr val="F96167"/>
-                </a:solidFill>
-                <a:latin typeface="Georgia" pitchFamily="34" charset="0"/>
-                <a:ea typeface="Georgia" pitchFamily="34" charset="-122"/>
-                <a:cs typeface="Georgia" pitchFamily="34" charset="-120"/>
-              </a:rPr>
-              <a:t>58.4%</a:t>
-            </a:r>
-            <a:endParaRPr lang="en-US" sz="1600" dirty="0"/>
-          </a:p>
-        </p:txBody>
-      </p:sp>
-      <p:sp>
-        <p:nvSpPr>
-          <p:cNvPr id="18" name="Text 16"/>
-          <p:cNvSpPr/>
-          <p:nvPr/>
-        </p:nvSpPr>
-        <p:spPr>
-          <a:xfrm>
-            <a:off x="548640" y="3255264"/>
-            <a:ext cx="4572000" cy="201168"/>
-          </a:xfrm>
-          <a:prstGeom prst="rect">
-            <a:avLst/>
-          </a:prstGeom>
-          <a:noFill/>
-          <a:ln/>
-        </p:spPr>
-        <p:txBody>
-          <a:bodyPr wrap="square" rtlCol="0" anchor="t"/>
-          <a:lstStyle/>
-          <a:p>
-            <a:pPr indent="0" marL="0">
-              <a:buNone/>
-            </a:pPr>
-            <a:r>
-              <a:rPr lang="en-US" sz="1000" dirty="0">
-                <a:solidFill>
-                  <a:srgbClr val="8899A6"/>
-                </a:solidFill>
-                <a:latin typeface="Calibri" pitchFamily="34" charset="0"/>
-                <a:ea typeface="Calibri" pitchFamily="34" charset="-122"/>
-                <a:cs typeface="Calibri" pitchFamily="34" charset="-120"/>
-              </a:rPr>
-              <a:t>空间几何合格!</a:t>
-            </a:r>
-            <a:endParaRPr lang="en-US" sz="1000" dirty="0"/>
-          </a:p>
-        </p:txBody>
-      </p:sp>
-      <p:sp>
-        <p:nvSpPr>
-          <p:cNvPr id="19" name="Shape 17"/>
-          <p:cNvSpPr/>
-          <p:nvPr/>
-        </p:nvSpPr>
-        <p:spPr>
-          <a:xfrm>
-            <a:off x="365760" y="3584448"/>
-            <a:ext cx="5120640" cy="621792"/>
-          </a:xfrm>
-          <a:prstGeom prst="roundRect">
-            <a:avLst>
-              <a:gd name="adj" fmla="val 8824"/>
-            </a:avLst>
-          </a:prstGeom>
-          <a:solidFill>
-            <a:srgbClr val="F2F7F9"/>
-          </a:solidFill>
-          <a:ln/>
-        </p:spPr>
-      </p:sp>
-      <p:sp>
-        <p:nvSpPr>
-          <p:cNvPr id="20" name="Text 18"/>
-          <p:cNvSpPr/>
-          <p:nvPr/>
-        </p:nvSpPr>
-        <p:spPr>
-          <a:xfrm>
-            <a:off x="548640" y="3584448"/>
-            <a:ext cx="3291840" cy="347472"/>
-          </a:xfrm>
-          <a:prstGeom prst="rect">
-            <a:avLst/>
-          </a:prstGeom>
-          <a:noFill/>
-          <a:ln/>
-        </p:spPr>
-        <p:txBody>
-          <a:bodyPr wrap="square" rtlCol="0" anchor="b"/>
-          <a:lstStyle/>
-          <a:p>
-            <a:pPr indent="0" marL="0">
-              <a:buNone/>
-            </a:pPr>
-            <a:r>
-              <a:rPr lang="en-US" sz="1200" dirty="0">
-                <a:solidFill>
-                  <a:srgbClr val="4A5568"/>
-                </a:solidFill>
-                <a:latin typeface="Calibri" pitchFamily="34" charset="0"/>
-                <a:ea typeface="Calibri" pitchFamily="34" charset="-122"/>
-                <a:cs typeface="Calibri" pitchFamily="34" charset="-120"/>
-              </a:rPr>
-              <a:t>P0 中位距离</a:t>
-            </a:r>
-            <a:endParaRPr lang="en-US" sz="1200" dirty="0"/>
-          </a:p>
-        </p:txBody>
-      </p:sp>
-      <p:sp>
-        <p:nvSpPr>
-          <p:cNvPr id="21" name="Text 19"/>
-          <p:cNvSpPr/>
-          <p:nvPr/>
-        </p:nvSpPr>
-        <p:spPr>
-          <a:xfrm>
-            <a:off x="4023360" y="3584448"/>
-            <a:ext cx="1097280" cy="347472"/>
-          </a:xfrm>
-          <a:prstGeom prst="rect">
-            <a:avLst/>
-          </a:prstGeom>
-          <a:noFill/>
-          <a:ln/>
-        </p:spPr>
-        <p:txBody>
-          <a:bodyPr wrap="square" rtlCol="0" anchor="b"/>
-          <a:lstStyle/>
-          <a:p>
-            <a:pPr algn="r" indent="0" marL="0">
-              <a:buNone/>
-            </a:pPr>
-            <a:r>
-              <a:rPr lang="en-US" sz="1600" b="1" dirty="0">
-                <a:solidFill>
-                  <a:srgbClr val="F96167"/>
-                </a:solidFill>
-                <a:latin typeface="Georgia" pitchFamily="34" charset="0"/>
-                <a:ea typeface="Georgia" pitchFamily="34" charset="-122"/>
-                <a:cs typeface="Georgia" pitchFamily="34" charset="-120"/>
-              </a:rPr>
-              <a:t>329 m</a:t>
-            </a:r>
-            <a:endParaRPr lang="en-US" sz="1600" dirty="0"/>
-          </a:p>
-        </p:txBody>
-      </p:sp>
-      <p:sp>
-        <p:nvSpPr>
-          <p:cNvPr id="22" name="Text 20"/>
-          <p:cNvSpPr/>
-          <p:nvPr/>
-        </p:nvSpPr>
-        <p:spPr>
-          <a:xfrm>
-            <a:off x="548640" y="3931920"/>
-            <a:ext cx="4572000" cy="201168"/>
-          </a:xfrm>
-          <a:prstGeom prst="rect">
-            <a:avLst/>
-          </a:prstGeom>
-          <a:noFill/>
-          <a:ln/>
-        </p:spPr>
-        <p:txBody>
-          <a:bodyPr wrap="square" rtlCol="0" anchor="t"/>
-          <a:lstStyle/>
-          <a:p>
-            <a:pPr indent="0" marL="0">
-              <a:buNone/>
-            </a:pPr>
-            <a:r>
-              <a:rPr lang="en-US" sz="1000" dirty="0">
-                <a:solidFill>
-                  <a:srgbClr val="8899A6"/>
-                </a:solidFill>
-                <a:latin typeface="Calibri" pitchFamily="34" charset="0"/>
-                <a:ea typeface="Calibri" pitchFamily="34" charset="-122"/>
-                <a:cs typeface="Calibri" pitchFamily="34" charset="-120"/>
-              </a:rPr>
-              <a:t>逼近出色</a:t>
-            </a:r>
-            <a:endParaRPr lang="en-US" sz="1000" dirty="0"/>
-          </a:p>
-        </p:txBody>
-      </p:sp>
-      <p:sp>
-        <p:nvSpPr>
-          <p:cNvPr id="23" name="Shape 21"/>
-          <p:cNvSpPr/>
-          <p:nvPr/>
-        </p:nvSpPr>
-        <p:spPr>
-          <a:xfrm>
-            <a:off x="365760" y="4261104"/>
-            <a:ext cx="5120640" cy="621792"/>
-          </a:xfrm>
-          <a:prstGeom prst="roundRect">
-            <a:avLst>
-              <a:gd name="adj" fmla="val 8824"/>
-            </a:avLst>
-          </a:prstGeom>
-          <a:solidFill>
-            <a:srgbClr val="F2F7F9"/>
-          </a:solidFill>
-          <a:ln/>
-        </p:spPr>
-      </p:sp>
-      <p:sp>
-        <p:nvSpPr>
-          <p:cNvPr id="24" name="Text 22"/>
-          <p:cNvSpPr/>
-          <p:nvPr/>
-        </p:nvSpPr>
-        <p:spPr>
-          <a:xfrm>
-            <a:off x="548640" y="4261104"/>
-            <a:ext cx="3291840" cy="347472"/>
-          </a:xfrm>
-          <a:prstGeom prst="rect">
-            <a:avLst/>
-          </a:prstGeom>
-          <a:noFill/>
-          <a:ln/>
-        </p:spPr>
-        <p:txBody>
-          <a:bodyPr wrap="square" rtlCol="0" anchor="b"/>
-          <a:lstStyle/>
-          <a:p>
-            <a:pPr indent="0" marL="0">
-              <a:buNone/>
-            </a:pPr>
-            <a:r>
-              <a:rPr lang="en-US" sz="1200" dirty="0">
-                <a:solidFill>
-                  <a:srgbClr val="4A5568"/>
-                </a:solidFill>
-                <a:latin typeface="Calibri" pitchFamily="34" charset="0"/>
-                <a:ea typeface="Calibri" pitchFamily="34" charset="-122"/>
-                <a:cs typeface="Calibri" pitchFamily="34" charset="-120"/>
-              </a:rPr>
-              <a:t>P1 中位距离</a:t>
-            </a:r>
-            <a:endParaRPr lang="en-US" sz="1200" dirty="0"/>
-          </a:p>
-        </p:txBody>
-      </p:sp>
-      <p:sp>
-        <p:nvSpPr>
-          <p:cNvPr id="25" name="Text 23"/>
-          <p:cNvSpPr/>
-          <p:nvPr/>
-        </p:nvSpPr>
-        <p:spPr>
-          <a:xfrm>
-            <a:off x="4023360" y="4261104"/>
-            <a:ext cx="1097280" cy="347472"/>
-          </a:xfrm>
-          <a:prstGeom prst="rect">
-            <a:avLst/>
-          </a:prstGeom>
-          <a:noFill/>
-          <a:ln/>
-        </p:spPr>
-        <p:txBody>
-          <a:bodyPr wrap="square" rtlCol="0" anchor="b"/>
-          <a:lstStyle/>
-          <a:p>
-            <a:pPr algn="r" indent="0" marL="0">
-              <a:buNone/>
-            </a:pPr>
-            <a:r>
-              <a:rPr lang="en-US" sz="1600" b="1" dirty="0">
-                <a:solidFill>
-                  <a:srgbClr val="F96167"/>
-                </a:solidFill>
-                <a:latin typeface="Georgia" pitchFamily="34" charset="0"/>
-                <a:ea typeface="Georgia" pitchFamily="34" charset="-122"/>
-                <a:cs typeface="Georgia" pitchFamily="34" charset="-120"/>
-              </a:rPr>
-              <a:t>1,974 m</a:t>
-            </a:r>
-            <a:endParaRPr lang="en-US" sz="1600" dirty="0"/>
-          </a:p>
-        </p:txBody>
-      </p:sp>
-      <p:sp>
-        <p:nvSpPr>
-          <p:cNvPr id="26" name="Text 24"/>
-          <p:cNvSpPr/>
-          <p:nvPr/>
-        </p:nvSpPr>
-        <p:spPr>
-          <a:xfrm>
-            <a:off x="548640" y="4608576"/>
-            <a:ext cx="4572000" cy="201168"/>
-          </a:xfrm>
-          <a:prstGeom prst="rect">
-            <a:avLst/>
-          </a:prstGeom>
-          <a:noFill/>
-          <a:ln/>
-        </p:spPr>
-        <p:txBody>
-          <a:bodyPr wrap="square" rtlCol="0" anchor="t"/>
-          <a:lstStyle/>
-          <a:p>
-            <a:pPr indent="0" marL="0">
-              <a:buNone/>
-            </a:pPr>
-            <a:r>
-              <a:rPr lang="en-US" sz="1000" dirty="0">
-                <a:solidFill>
-                  <a:srgbClr val="8899A6"/>
-                </a:solidFill>
-                <a:latin typeface="Calibri" pitchFamily="34" charset="0"/>
-                <a:ea typeface="Calibri" pitchFamily="34" charset="-122"/>
-                <a:cs typeface="Calibri" pitchFamily="34" charset="-120"/>
-              </a:rPr>
-              <a:t>无法缩小差距</a:t>
-            </a:r>
-            <a:endParaRPr lang="en-US" sz="1000" dirty="0"/>
+          <p:cNvPr id="7" name="Text 5"/>
+          <p:cNvSpPr/>
+          <p:nvPr/>
+        </p:nvSpPr>
+        <p:spPr>
+          <a:xfrm>
+            <a:off x="420624" y="2343646"/>
+            <a:ext cx="3932715" cy="3200400"/>
+          </a:xfrm>
+          <a:prstGeom prst="rect">
+            <a:avLst/>
+          </a:prstGeom>
+          <a:noFill/>
+          <a:ln/>
+        </p:spPr>
+        <p:txBody>
+          <a:bodyPr wrap="square" rtlCol="0" anchor="ctr"/>
+          <a:lstStyle/>
+          <a:p>
+            <a:pPr marL="0" indent="0">
+              <a:lnSpc>
+                <a:spcPct val="135000"/>
+              </a:lnSpc>
+              <a:buNone/>
+            </a:pPr>
+            <a:r>
+              <a:rPr lang="en-US" sz="1400" dirty="0">
+                <a:solidFill>
+                  <a:srgbClr val="4A5568"/>
+                </a:solidFill>
+                <a:latin typeface="Calibri" pitchFamily="34" charset="0"/>
+                <a:ea typeface="Calibri" pitchFamily="34" charset="-122"/>
+                <a:cs typeface="Calibri" pitchFamily="34" charset="-120"/>
+              </a:rPr>
+              <a:t>Striker MHA:  Self-&gt;Mate = 0.450 (协调)    Pool Mate = 0.341</a:t>
+            </a:r>
+            <a:endParaRPr lang="en-US" sz="1400" dirty="0"/>
+          </a:p>
+          <a:p>
+            <a:pPr marL="0" indent="0">
+              <a:lnSpc>
+                <a:spcPct val="135000"/>
+              </a:lnSpc>
+              <a:buNone/>
+            </a:pPr>
+            <a:r>
+              <a:rPr lang="en-US" sz="1400" dirty="0">
+                <a:solidFill>
+                  <a:srgbClr val="4A5568"/>
+                </a:solidFill>
+                <a:latin typeface="Calibri" pitchFamily="34" charset="0"/>
+                <a:ea typeface="Calibri" pitchFamily="34" charset="-122"/>
+                <a:cs typeface="Calibri" pitchFamily="34" charset="-120"/>
+              </a:rPr>
+              <a:t>Interceptor MHA: Self-&gt;Target = 0.389 (追击)  Pool Mate = 0.298</a:t>
+            </a:r>
+            <a:endParaRPr lang="en-US" sz="1400" dirty="0"/>
+          </a:p>
+          <a:p>
+            <a:pPr marL="0" indent="0">
+              <a:lnSpc>
+                <a:spcPct val="135000"/>
+              </a:lnSpc>
+              <a:buNone/>
+            </a:pPr>
+            <a:endParaRPr lang="en-US" sz="1400" dirty="0"/>
+          </a:p>
+          <a:p>
+            <a:pPr marL="0" indent="0">
+              <a:lnSpc>
+                <a:spcPct val="135000"/>
+              </a:lnSpc>
+              <a:buNone/>
+            </a:pPr>
+            <a:r>
+              <a:rPr lang="en-US" sz="1400" dirty="0">
+                <a:solidFill>
+                  <a:srgbClr val="4A5568"/>
+                </a:solidFill>
+                <a:latin typeface="Calibri" pitchFamily="34" charset="0"/>
+                <a:ea typeface="Calibri" pitchFamily="34" charset="-122"/>
+                <a:cs typeface="Calibri" pitchFamily="34" charset="-120"/>
+              </a:rPr>
+              <a:t>Cohen's d = -0.53 (大效应量, p &lt; 0.001)</a:t>
+            </a:r>
+            <a:endParaRPr lang="en-US" sz="1400" dirty="0"/>
+          </a:p>
+          <a:p>
+            <a:pPr marL="0" indent="0">
+              <a:lnSpc>
+                <a:spcPct val="135000"/>
+              </a:lnSpc>
+              <a:buNone/>
+            </a:pPr>
+            <a:r>
+              <a:rPr lang="en-US" sz="1400" dirty="0">
+                <a:solidFill>
+                  <a:srgbClr val="4A5568"/>
+                </a:solidFill>
+                <a:latin typeface="Calibri" pitchFamily="34" charset="0"/>
+                <a:ea typeface="Calibri" pitchFamily="34" charset="-122"/>
+                <a:cs typeface="Calibri" pitchFamily="34" charset="-120"/>
+              </a:rPr>
+              <a:t>Interceptor 对 Target 的关注比 Striker 高 31%.</a:t>
+            </a:r>
+            <a:endParaRPr lang="en-US" sz="1400" dirty="0"/>
+          </a:p>
+          <a:p>
+            <a:pPr marL="0" indent="0">
+              <a:lnSpc>
+                <a:spcPct val="135000"/>
+              </a:lnSpc>
+              <a:buNone/>
+            </a:pPr>
+            <a:endParaRPr lang="en-US" sz="1400" dirty="0"/>
+          </a:p>
+          <a:p>
+            <a:pPr marL="0" indent="0">
+              <a:lnSpc>
+                <a:spcPct val="135000"/>
+              </a:lnSpc>
+              <a:buNone/>
+            </a:pPr>
+            <a:r>
+              <a:rPr lang="en-US" sz="1400" dirty="0">
+                <a:solidFill>
+                  <a:srgbClr val="4A5568"/>
+                </a:solidFill>
+                <a:latin typeface="Calibri" pitchFamily="34" charset="0"/>
+                <a:ea typeface="Calibri" pitchFamily="34" charset="-122"/>
+                <a:cs typeface="Calibri" pitchFamily="34" charset="-120"/>
+              </a:rPr>
+              <a:t>双机 MHA Self-&gt;Mate 均维持 ~0.44 高水平.</a:t>
+            </a:r>
+            <a:endParaRPr lang="en-US" sz="1400" dirty="0"/>
+          </a:p>
+          <a:p>
+            <a:pPr marL="0" indent="0">
+              <a:lnSpc>
+                <a:spcPct val="135000"/>
+              </a:lnSpc>
+              <a:buNone/>
+            </a:pPr>
+            <a:r>
+              <a:rPr lang="en-US" sz="1400" dirty="0">
+                <a:solidFill>
+                  <a:srgbClr val="4A5568"/>
+                </a:solidFill>
+                <a:latin typeface="Calibri" pitchFamily="34" charset="0"/>
+                <a:ea typeface="Calibri" pitchFamily="34" charset="-122"/>
+                <a:cs typeface="Calibri" pitchFamily="34" charset="-120"/>
+              </a:rPr>
+              <a:t>持续性隐式协调 — 非二元切换 — 参数共享网络自发打破对称性的终极证据.</a:t>
+            </a:r>
+            <a:endParaRPr lang="en-US" sz="1400" dirty="0"/>
           </a:p>
         </p:txBody>
       </p:sp>
       <p:pic>
         <p:nvPicPr>
-          <p:cNvPr id="27" name="Image 0" descr="results/viz/paper_charts/chart4_termination_reasons.png">    </p:cNvPr>
+          <p:cNvPr id="10" name="图片 9">
+            <a:extLst>
+              <a:ext uri="{FF2B5EF4-FFF2-40B4-BE49-F238E27FC236}">
+                <a16:creationId xmlns:a16="http://schemas.microsoft.com/office/drawing/2014/main" id="{A20611D0-92BD-49E2-B4B3-7C100DFC0B6F}"/>
+              </a:ext>
+            </a:extLst>
+          </p:cNvPr>
           <p:cNvPicPr>
             <a:picLocks noChangeAspect="1"/>
           </p:cNvPicPr>
           <p:nvPr/>
         </p:nvPicPr>
         <p:blipFill>
-          <a:blip r:embed="rId1"/>
-          <a:srcRect l="0" r="0" t="0" b="0"/>
-          <a:stretch/>
+          <a:blip r:embed="rId3"/>
+          <a:stretch>
+            <a:fillRect/>
+          </a:stretch>
         </p:blipFill>
         <p:spPr>
           <a:xfrm>
-            <a:off x="5943600" y="1051560"/>
-            <a:ext cx="5943600" cy="3657600"/>
+            <a:off x="4530194" y="685031"/>
+            <a:ext cx="7107832" cy="6127701"/>
           </a:xfrm>
           <a:prstGeom prst="rect">
             <a:avLst/>
           </a:prstGeom>
         </p:spPr>
       </p:pic>
-      <p:sp>
-        <p:nvSpPr>
-          <p:cNvPr id="28" name="Text 25"/>
-          <p:cNvSpPr/>
-          <p:nvPr/>
-        </p:nvSpPr>
-        <p:spPr>
-          <a:xfrm>
-            <a:off x="365760" y="5760720"/>
-            <a:ext cx="11430000" cy="457200"/>
-          </a:xfrm>
-          <a:prstGeom prst="rect">
-            <a:avLst/>
-          </a:prstGeom>
-          <a:noFill/>
-          <a:ln/>
-        </p:spPr>
-        <p:txBody>
-          <a:bodyPr wrap="square" rtlCol="0" anchor="ctr"/>
-          <a:lstStyle/>
-          <a:p>
-            <a:pPr indent="0" marL="0">
-              <a:buNone/>
-            </a:pPr>
-            <a:r>
-              <a:rPr lang="en-US" sz="1200" i="1" dirty="0">
-                <a:solidFill>
-                  <a:srgbClr val="4A5568"/>
-                </a:solidFill>
-                <a:latin typeface="Calibri" pitchFamily="34" charset="0"/>
-                <a:ea typeface="Calibri" pitchFamily="34" charset="-122"/>
-                <a:cs typeface="Calibri" pitchFamily="34" charset="-120"/>
-              </a:rPr>
-              <a:t>三大理论天花板: (1) CTDE 信息不对称 — 33-dim 局部观测无法编码全局协调状态. (2) 离散探索边界 — 15 基元在严格 800m 下接近饱和. (3) 缺乏显式预期到达时间差 ΔTGO 信号.</a:t>
-            </a:r>
-            <a:endParaRPr lang="en-US" sz="1200" dirty="0"/>
-          </a:p>
-        </p:txBody>
-      </p:sp>
     </p:spTree>
   </p:cSld>
   <p:clrMapOvr>
@@ -3363,14 +3091,15 @@
 </p:sld>
 </file>
 
-<file path=ppt/slides/slide12.xml><?xml version="1.0" encoding="utf-8"?>
+<file path=ppt/slides/slide15.xml><?xml version="1.0" encoding="utf-8"?>
 <p:sld xmlns:a="http://schemas.openxmlformats.org/drawingml/2006/main" xmlns:r="http://schemas.openxmlformats.org/officeDocument/2006/relationships" xmlns:p="http://schemas.openxmlformats.org/presentationml/2006/main">
-  <p:cSld name="Slide 12">
+  <p:cSld name="Slide 11">
     <p:bg>
       <p:bgPr>
         <a:solidFill>
           <a:srgbClr val="FFFFFF"/>
         </a:solidFill>
+        <a:effectLst/>
       </p:bgPr>
     </p:bg>
     <p:spTree>
@@ -3428,7 +3157,7 @@
           <a:bodyPr wrap="square" lIns="0" tIns="0" rIns="0" bIns="0" rtlCol="0" anchor="ctr"/>
           <a:lstStyle/>
           <a:p>
-            <a:pPr indent="0" marL="0">
+            <a:pPr marL="0" indent="0">
               <a:buNone/>
             </a:pPr>
             <a:r>
@@ -3440,7 +3169,7 @@
                 <a:ea typeface="Georgia" pitchFamily="34" charset="-122"/>
                 <a:cs typeface="Georgia" pitchFamily="34" charset="-120"/>
               </a:rPr>
-              <a:t>11</a:t>
+              <a:t>10</a:t>
             </a:r>
             <a:endParaRPr lang="en-US" sz="2600" dirty="0"/>
           </a:p>
@@ -3467,7 +3196,954 @@
           <a:bodyPr wrap="square" rtlCol="0" anchor="ctr"/>
           <a:lstStyle/>
           <a:p>
-            <a:pPr indent="0" marL="0">
+            <a:pPr marL="0" indent="0">
+              <a:buNone/>
+            </a:pPr>
+            <a:r>
+              <a:rPr lang="en-US" sz="3000" b="1" dirty="0">
+                <a:solidFill>
+                  <a:srgbClr val="065A82"/>
+                </a:solidFill>
+                <a:latin typeface="Georgia" pitchFamily="34" charset="0"/>
+                <a:ea typeface="Georgia" pitchFamily="34" charset="-122"/>
+                <a:cs typeface="Georgia" pitchFamily="34" charset="-120"/>
+              </a:rPr>
+              <a:t>边界分析: AND-Gate 为何最终回落</a:t>
+            </a:r>
+            <a:endParaRPr lang="en-US" sz="3000" dirty="0"/>
+          </a:p>
+        </p:txBody>
+      </p:sp>
+      <p:sp>
+        <p:nvSpPr>
+          <p:cNvPr id="5" name="Shape 3"/>
+          <p:cNvSpPr/>
+          <p:nvPr/>
+        </p:nvSpPr>
+        <p:spPr>
+          <a:xfrm>
+            <a:off x="365760" y="822960"/>
+            <a:ext cx="11430000" cy="10973"/>
+          </a:xfrm>
+          <a:prstGeom prst="rect">
+            <a:avLst/>
+          </a:prstGeom>
+          <a:solidFill>
+            <a:srgbClr val="E8F0F4"/>
+          </a:solidFill>
+          <a:ln/>
+        </p:spPr>
+      </p:sp>
+      <p:sp>
+        <p:nvSpPr>
+          <p:cNvPr id="6" name="Text 4"/>
+          <p:cNvSpPr/>
+          <p:nvPr/>
+        </p:nvSpPr>
+        <p:spPr>
+          <a:xfrm>
+            <a:off x="365760" y="1051560"/>
+            <a:ext cx="5943600" cy="320040"/>
+          </a:xfrm>
+          <a:prstGeom prst="rect">
+            <a:avLst/>
+          </a:prstGeom>
+          <a:noFill/>
+          <a:ln/>
+        </p:spPr>
+        <p:txBody>
+          <a:bodyPr wrap="square" rtlCol="0" anchor="ctr"/>
+          <a:lstStyle/>
+          <a:p>
+            <a:pPr marL="0" indent="0">
+              <a:buNone/>
+            </a:pPr>
+            <a:r>
+              <a:rPr lang="en-US" sz="1800" b="1" dirty="0">
+                <a:solidFill>
+                  <a:srgbClr val="065A82"/>
+                </a:solidFill>
+                <a:latin typeface="Georgia" pitchFamily="34" charset="0"/>
+                <a:ea typeface="Georgia" pitchFamily="34" charset="-122"/>
+                <a:cs typeface="Georgia" pitchFamily="34" charset="-120"/>
+              </a:rPr>
+              <a:t>AND-Gate 死亡解剖 (Exp 3 checkpoint, 10 集 Eval)</a:t>
+            </a:r>
+            <a:endParaRPr lang="en-US" sz="1800" dirty="0"/>
+          </a:p>
+        </p:txBody>
+      </p:sp>
+      <p:sp>
+        <p:nvSpPr>
+          <p:cNvPr id="7" name="Shape 5"/>
+          <p:cNvSpPr/>
+          <p:nvPr/>
+        </p:nvSpPr>
+        <p:spPr>
+          <a:xfrm>
+            <a:off x="365760" y="1554480"/>
+            <a:ext cx="5120640" cy="621792"/>
+          </a:xfrm>
+          <a:prstGeom prst="roundRect">
+            <a:avLst>
+              <a:gd name="adj" fmla="val 8824"/>
+            </a:avLst>
+          </a:prstGeom>
+          <a:solidFill>
+            <a:srgbClr val="F2F7F9"/>
+          </a:solidFill>
+          <a:ln/>
+        </p:spPr>
+      </p:sp>
+      <p:sp>
+        <p:nvSpPr>
+          <p:cNvPr id="8" name="Text 6"/>
+          <p:cNvSpPr/>
+          <p:nvPr/>
+        </p:nvSpPr>
+        <p:spPr>
+          <a:xfrm>
+            <a:off x="548640" y="1554480"/>
+            <a:ext cx="3291840" cy="347472"/>
+          </a:xfrm>
+          <a:prstGeom prst="rect">
+            <a:avLst/>
+          </a:prstGeom>
+          <a:noFill/>
+          <a:ln/>
+        </p:spPr>
+        <p:txBody>
+          <a:bodyPr wrap="square" rtlCol="0" anchor="b"/>
+          <a:lstStyle/>
+          <a:p>
+            <a:pPr marL="0" indent="0">
+              <a:buNone/>
+            </a:pPr>
+            <a:r>
+              <a:rPr lang="en-US" sz="1200" dirty="0">
+                <a:solidFill>
+                  <a:srgbClr val="4A5568"/>
+                </a:solidFill>
+                <a:latin typeface="Calibri" pitchFamily="34" charset="0"/>
+                <a:ea typeface="Calibri" pitchFamily="34" charset="-122"/>
+                <a:cs typeface="Calibri" pitchFamily="34" charset="-120"/>
+              </a:rPr>
+              <a:t>双机同步入线率 (BOTH &lt; 800m)</a:t>
+            </a:r>
+            <a:endParaRPr lang="en-US" sz="1200" dirty="0"/>
+          </a:p>
+        </p:txBody>
+      </p:sp>
+      <p:sp>
+        <p:nvSpPr>
+          <p:cNvPr id="9" name="Text 7"/>
+          <p:cNvSpPr/>
+          <p:nvPr/>
+        </p:nvSpPr>
+        <p:spPr>
+          <a:xfrm>
+            <a:off x="4023360" y="1554480"/>
+            <a:ext cx="1097280" cy="347472"/>
+          </a:xfrm>
+          <a:prstGeom prst="rect">
+            <a:avLst/>
+          </a:prstGeom>
+          <a:noFill/>
+          <a:ln/>
+        </p:spPr>
+        <p:txBody>
+          <a:bodyPr wrap="square" rtlCol="0" anchor="b"/>
+          <a:lstStyle/>
+          <a:p>
+            <a:pPr marL="0" indent="0" algn="r">
+              <a:buNone/>
+            </a:pPr>
+            <a:r>
+              <a:rPr lang="en-US" sz="1600" b="1" dirty="0">
+                <a:solidFill>
+                  <a:srgbClr val="F96167"/>
+                </a:solidFill>
+                <a:latin typeface="Georgia" pitchFamily="34" charset="0"/>
+                <a:ea typeface="Georgia" pitchFamily="34" charset="-122"/>
+                <a:cs typeface="Georgia" pitchFamily="34" charset="-120"/>
+              </a:rPr>
+              <a:t>0.0%</a:t>
+            </a:r>
+            <a:endParaRPr lang="en-US" sz="1600" dirty="0"/>
+          </a:p>
+        </p:txBody>
+      </p:sp>
+      <p:sp>
+        <p:nvSpPr>
+          <p:cNvPr id="10" name="Text 8"/>
+          <p:cNvSpPr/>
+          <p:nvPr/>
+        </p:nvSpPr>
+        <p:spPr>
+          <a:xfrm>
+            <a:off x="548640" y="1901952"/>
+            <a:ext cx="4572000" cy="201168"/>
+          </a:xfrm>
+          <a:prstGeom prst="rect">
+            <a:avLst/>
+          </a:prstGeom>
+          <a:noFill/>
+          <a:ln/>
+        </p:spPr>
+        <p:txBody>
+          <a:bodyPr wrap="square" rtlCol="0" anchor="t"/>
+          <a:lstStyle/>
+          <a:p>
+            <a:pPr marL="0" indent="0">
+              <a:buNone/>
+            </a:pPr>
+            <a:r>
+              <a:rPr lang="en-US" sz="1000" dirty="0">
+                <a:solidFill>
+                  <a:srgbClr val="8899A6"/>
+                </a:solidFill>
+                <a:latin typeface="Calibri" pitchFamily="34" charset="0"/>
+                <a:ea typeface="Calibri" pitchFamily="34" charset="-122"/>
+                <a:cs typeface="Calibri" pitchFamily="34" charset="-120"/>
+              </a:rPr>
+              <a:t>致命瓶颈 — 零次!</a:t>
+            </a:r>
+            <a:endParaRPr lang="en-US" sz="1000" dirty="0"/>
+          </a:p>
+        </p:txBody>
+      </p:sp>
+      <p:sp>
+        <p:nvSpPr>
+          <p:cNvPr id="11" name="Shape 9"/>
+          <p:cNvSpPr/>
+          <p:nvPr/>
+        </p:nvSpPr>
+        <p:spPr>
+          <a:xfrm>
+            <a:off x="365760" y="2231136"/>
+            <a:ext cx="5120640" cy="621792"/>
+          </a:xfrm>
+          <a:prstGeom prst="roundRect">
+            <a:avLst>
+              <a:gd name="adj" fmla="val 8824"/>
+            </a:avLst>
+          </a:prstGeom>
+          <a:solidFill>
+            <a:srgbClr val="F2F7F9"/>
+          </a:solidFill>
+          <a:ln/>
+        </p:spPr>
+      </p:sp>
+      <p:sp>
+        <p:nvSpPr>
+          <p:cNvPr id="12" name="Text 10"/>
+          <p:cNvSpPr/>
+          <p:nvPr/>
+        </p:nvSpPr>
+        <p:spPr>
+          <a:xfrm>
+            <a:off x="548640" y="2231136"/>
+            <a:ext cx="3291840" cy="347472"/>
+          </a:xfrm>
+          <a:prstGeom prst="rect">
+            <a:avLst/>
+          </a:prstGeom>
+          <a:noFill/>
+          <a:ln/>
+        </p:spPr>
+        <p:txBody>
+          <a:bodyPr wrap="square" rtlCol="0" anchor="b"/>
+          <a:lstStyle/>
+          <a:p>
+            <a:pPr marL="0" indent="0">
+              <a:buNone/>
+            </a:pPr>
+            <a:r>
+              <a:rPr lang="en-US" sz="1200" dirty="0">
+                <a:solidFill>
+                  <a:srgbClr val="4A5568"/>
+                </a:solidFill>
+                <a:latin typeface="Calibri" pitchFamily="34" charset="0"/>
+                <a:ea typeface="Calibri" pitchFamily="34" charset="-122"/>
+                <a:cs typeface="Calibri" pitchFamily="34" charset="-120"/>
+              </a:rPr>
+              <a:t>单机入线率 (&gt;=1 &lt; 800m)</a:t>
+            </a:r>
+            <a:endParaRPr lang="en-US" sz="1200" dirty="0"/>
+          </a:p>
+        </p:txBody>
+      </p:sp>
+      <p:sp>
+        <p:nvSpPr>
+          <p:cNvPr id="13" name="Text 11"/>
+          <p:cNvSpPr/>
+          <p:nvPr/>
+        </p:nvSpPr>
+        <p:spPr>
+          <a:xfrm>
+            <a:off x="4023360" y="2231136"/>
+            <a:ext cx="1097280" cy="347472"/>
+          </a:xfrm>
+          <a:prstGeom prst="rect">
+            <a:avLst/>
+          </a:prstGeom>
+          <a:noFill/>
+          <a:ln/>
+        </p:spPr>
+        <p:txBody>
+          <a:bodyPr wrap="square" rtlCol="0" anchor="b"/>
+          <a:lstStyle/>
+          <a:p>
+            <a:pPr marL="0" indent="0" algn="r">
+              <a:buNone/>
+            </a:pPr>
+            <a:r>
+              <a:rPr lang="en-US" sz="1600" b="1" dirty="0">
+                <a:solidFill>
+                  <a:srgbClr val="F96167"/>
+                </a:solidFill>
+                <a:latin typeface="Georgia" pitchFamily="34" charset="0"/>
+                <a:ea typeface="Georgia" pitchFamily="34" charset="-122"/>
+                <a:cs typeface="Georgia" pitchFamily="34" charset="-120"/>
+              </a:rPr>
+              <a:t>22.1%</a:t>
+            </a:r>
+            <a:endParaRPr lang="en-US" sz="1600" dirty="0"/>
+          </a:p>
+        </p:txBody>
+      </p:sp>
+      <p:sp>
+        <p:nvSpPr>
+          <p:cNvPr id="14" name="Text 12"/>
+          <p:cNvSpPr/>
+          <p:nvPr/>
+        </p:nvSpPr>
+        <p:spPr>
+          <a:xfrm>
+            <a:off x="548640" y="2578608"/>
+            <a:ext cx="4572000" cy="201168"/>
+          </a:xfrm>
+          <a:prstGeom prst="rect">
+            <a:avLst/>
+          </a:prstGeom>
+          <a:noFill/>
+          <a:ln/>
+        </p:spPr>
+        <p:txBody>
+          <a:bodyPr wrap="square" rtlCol="0" anchor="t"/>
+          <a:lstStyle/>
+          <a:p>
+            <a:pPr marL="0" indent="0">
+              <a:buNone/>
+            </a:pPr>
+            <a:r>
+              <a:rPr lang="en-US" sz="1000" dirty="0">
+                <a:solidFill>
+                  <a:srgbClr val="8899A6"/>
+                </a:solidFill>
+                <a:latin typeface="Calibri" pitchFamily="34" charset="0"/>
+                <a:ea typeface="Calibri" pitchFamily="34" charset="-122"/>
+                <a:cs typeface="Calibri" pitchFamily="34" charset="-120"/>
+              </a:rPr>
+              <a:t>P0 可以接近</a:t>
+            </a:r>
+            <a:endParaRPr lang="en-US" sz="1000" dirty="0"/>
+          </a:p>
+        </p:txBody>
+      </p:sp>
+      <p:sp>
+        <p:nvSpPr>
+          <p:cNvPr id="15" name="Shape 13"/>
+          <p:cNvSpPr/>
+          <p:nvPr/>
+        </p:nvSpPr>
+        <p:spPr>
+          <a:xfrm>
+            <a:off x="365760" y="2907792"/>
+            <a:ext cx="5120640" cy="621792"/>
+          </a:xfrm>
+          <a:prstGeom prst="roundRect">
+            <a:avLst>
+              <a:gd name="adj" fmla="val 8824"/>
+            </a:avLst>
+          </a:prstGeom>
+          <a:solidFill>
+            <a:srgbClr val="F2F7F9"/>
+          </a:solidFill>
+          <a:ln/>
+        </p:spPr>
+      </p:sp>
+      <p:sp>
+        <p:nvSpPr>
+          <p:cNvPr id="16" name="Text 14"/>
+          <p:cNvSpPr/>
+          <p:nvPr/>
+        </p:nvSpPr>
+        <p:spPr>
+          <a:xfrm>
+            <a:off x="548640" y="2907792"/>
+            <a:ext cx="3291840" cy="347472"/>
+          </a:xfrm>
+          <a:prstGeom prst="rect">
+            <a:avLst/>
+          </a:prstGeom>
+          <a:noFill/>
+          <a:ln/>
+        </p:spPr>
+        <p:txBody>
+          <a:bodyPr wrap="square" rtlCol="0" anchor="b"/>
+          <a:lstStyle/>
+          <a:p>
+            <a:pPr marL="0" indent="0">
+              <a:buNone/>
+            </a:pPr>
+            <a:r>
+              <a:rPr lang="en-US" sz="1200" dirty="0">
+                <a:solidFill>
+                  <a:srgbClr val="4A5568"/>
+                </a:solidFill>
+                <a:latin typeface="Calibri" pitchFamily="34" charset="0"/>
+                <a:ea typeface="Calibri" pitchFamily="34" charset="-122"/>
+                <a:cs typeface="Calibri" pitchFamily="34" charset="-120"/>
+              </a:rPr>
+              <a:t>夹击角 &gt; 30 deg</a:t>
+            </a:r>
+            <a:endParaRPr lang="en-US" sz="1200" dirty="0"/>
+          </a:p>
+        </p:txBody>
+      </p:sp>
+      <p:sp>
+        <p:nvSpPr>
+          <p:cNvPr id="17" name="Text 15"/>
+          <p:cNvSpPr/>
+          <p:nvPr/>
+        </p:nvSpPr>
+        <p:spPr>
+          <a:xfrm>
+            <a:off x="4023360" y="2907792"/>
+            <a:ext cx="1097280" cy="347472"/>
+          </a:xfrm>
+          <a:prstGeom prst="rect">
+            <a:avLst/>
+          </a:prstGeom>
+          <a:noFill/>
+          <a:ln/>
+        </p:spPr>
+        <p:txBody>
+          <a:bodyPr wrap="square" rtlCol="0" anchor="b"/>
+          <a:lstStyle/>
+          <a:p>
+            <a:pPr marL="0" indent="0" algn="r">
+              <a:buNone/>
+            </a:pPr>
+            <a:r>
+              <a:rPr lang="en-US" sz="1600" b="1" dirty="0">
+                <a:solidFill>
+                  <a:srgbClr val="F96167"/>
+                </a:solidFill>
+                <a:latin typeface="Georgia" pitchFamily="34" charset="0"/>
+                <a:ea typeface="Georgia" pitchFamily="34" charset="-122"/>
+                <a:cs typeface="Georgia" pitchFamily="34" charset="-120"/>
+              </a:rPr>
+              <a:t>58.4%</a:t>
+            </a:r>
+            <a:endParaRPr lang="en-US" sz="1600" dirty="0"/>
+          </a:p>
+        </p:txBody>
+      </p:sp>
+      <p:sp>
+        <p:nvSpPr>
+          <p:cNvPr id="18" name="Text 16"/>
+          <p:cNvSpPr/>
+          <p:nvPr/>
+        </p:nvSpPr>
+        <p:spPr>
+          <a:xfrm>
+            <a:off x="548640" y="3255264"/>
+            <a:ext cx="4572000" cy="201168"/>
+          </a:xfrm>
+          <a:prstGeom prst="rect">
+            <a:avLst/>
+          </a:prstGeom>
+          <a:noFill/>
+          <a:ln/>
+        </p:spPr>
+        <p:txBody>
+          <a:bodyPr wrap="square" rtlCol="0" anchor="t"/>
+          <a:lstStyle/>
+          <a:p>
+            <a:pPr marL="0" indent="0">
+              <a:buNone/>
+            </a:pPr>
+            <a:r>
+              <a:rPr lang="en-US" sz="1000" dirty="0">
+                <a:solidFill>
+                  <a:srgbClr val="8899A6"/>
+                </a:solidFill>
+                <a:latin typeface="Calibri" pitchFamily="34" charset="0"/>
+                <a:ea typeface="Calibri" pitchFamily="34" charset="-122"/>
+                <a:cs typeface="Calibri" pitchFamily="34" charset="-120"/>
+              </a:rPr>
+              <a:t>空间几何合格!</a:t>
+            </a:r>
+            <a:endParaRPr lang="en-US" sz="1000" dirty="0"/>
+          </a:p>
+        </p:txBody>
+      </p:sp>
+      <p:sp>
+        <p:nvSpPr>
+          <p:cNvPr id="19" name="Shape 17"/>
+          <p:cNvSpPr/>
+          <p:nvPr/>
+        </p:nvSpPr>
+        <p:spPr>
+          <a:xfrm>
+            <a:off x="365760" y="3584448"/>
+            <a:ext cx="5120640" cy="621792"/>
+          </a:xfrm>
+          <a:prstGeom prst="roundRect">
+            <a:avLst>
+              <a:gd name="adj" fmla="val 8824"/>
+            </a:avLst>
+          </a:prstGeom>
+          <a:solidFill>
+            <a:srgbClr val="F2F7F9"/>
+          </a:solidFill>
+          <a:ln/>
+        </p:spPr>
+      </p:sp>
+      <p:sp>
+        <p:nvSpPr>
+          <p:cNvPr id="20" name="Text 18"/>
+          <p:cNvSpPr/>
+          <p:nvPr/>
+        </p:nvSpPr>
+        <p:spPr>
+          <a:xfrm>
+            <a:off x="548640" y="3584448"/>
+            <a:ext cx="3291840" cy="347472"/>
+          </a:xfrm>
+          <a:prstGeom prst="rect">
+            <a:avLst/>
+          </a:prstGeom>
+          <a:noFill/>
+          <a:ln/>
+        </p:spPr>
+        <p:txBody>
+          <a:bodyPr wrap="square" rtlCol="0" anchor="b"/>
+          <a:lstStyle/>
+          <a:p>
+            <a:pPr marL="0" indent="0">
+              <a:buNone/>
+            </a:pPr>
+            <a:r>
+              <a:rPr lang="en-US" sz="1200" dirty="0">
+                <a:solidFill>
+                  <a:srgbClr val="4A5568"/>
+                </a:solidFill>
+                <a:latin typeface="Calibri" pitchFamily="34" charset="0"/>
+                <a:ea typeface="Calibri" pitchFamily="34" charset="-122"/>
+                <a:cs typeface="Calibri" pitchFamily="34" charset="-120"/>
+              </a:rPr>
+              <a:t>P0 中位距离</a:t>
+            </a:r>
+            <a:endParaRPr lang="en-US" sz="1200" dirty="0"/>
+          </a:p>
+        </p:txBody>
+      </p:sp>
+      <p:sp>
+        <p:nvSpPr>
+          <p:cNvPr id="21" name="Text 19"/>
+          <p:cNvSpPr/>
+          <p:nvPr/>
+        </p:nvSpPr>
+        <p:spPr>
+          <a:xfrm>
+            <a:off x="4023360" y="3584448"/>
+            <a:ext cx="1097280" cy="347472"/>
+          </a:xfrm>
+          <a:prstGeom prst="rect">
+            <a:avLst/>
+          </a:prstGeom>
+          <a:noFill/>
+          <a:ln/>
+        </p:spPr>
+        <p:txBody>
+          <a:bodyPr wrap="square" rtlCol="0" anchor="b"/>
+          <a:lstStyle/>
+          <a:p>
+            <a:pPr marL="0" indent="0" algn="r">
+              <a:buNone/>
+            </a:pPr>
+            <a:r>
+              <a:rPr lang="en-US" sz="1600" b="1" dirty="0">
+                <a:solidFill>
+                  <a:srgbClr val="F96167"/>
+                </a:solidFill>
+                <a:latin typeface="Georgia" pitchFamily="34" charset="0"/>
+                <a:ea typeface="Georgia" pitchFamily="34" charset="-122"/>
+                <a:cs typeface="Georgia" pitchFamily="34" charset="-120"/>
+              </a:rPr>
+              <a:t>329 m</a:t>
+            </a:r>
+            <a:endParaRPr lang="en-US" sz="1600" dirty="0"/>
+          </a:p>
+        </p:txBody>
+      </p:sp>
+      <p:sp>
+        <p:nvSpPr>
+          <p:cNvPr id="22" name="Text 20"/>
+          <p:cNvSpPr/>
+          <p:nvPr/>
+        </p:nvSpPr>
+        <p:spPr>
+          <a:xfrm>
+            <a:off x="548640" y="3931920"/>
+            <a:ext cx="4572000" cy="201168"/>
+          </a:xfrm>
+          <a:prstGeom prst="rect">
+            <a:avLst/>
+          </a:prstGeom>
+          <a:noFill/>
+          <a:ln/>
+        </p:spPr>
+        <p:txBody>
+          <a:bodyPr wrap="square" rtlCol="0" anchor="t"/>
+          <a:lstStyle/>
+          <a:p>
+            <a:pPr marL="0" indent="0">
+              <a:buNone/>
+            </a:pPr>
+            <a:r>
+              <a:rPr lang="en-US" sz="1000" dirty="0">
+                <a:solidFill>
+                  <a:srgbClr val="8899A6"/>
+                </a:solidFill>
+                <a:latin typeface="Calibri" pitchFamily="34" charset="0"/>
+                <a:ea typeface="Calibri" pitchFamily="34" charset="-122"/>
+                <a:cs typeface="Calibri" pitchFamily="34" charset="-120"/>
+              </a:rPr>
+              <a:t>逼近出色</a:t>
+            </a:r>
+            <a:endParaRPr lang="en-US" sz="1000" dirty="0"/>
+          </a:p>
+        </p:txBody>
+      </p:sp>
+      <p:sp>
+        <p:nvSpPr>
+          <p:cNvPr id="23" name="Shape 21"/>
+          <p:cNvSpPr/>
+          <p:nvPr/>
+        </p:nvSpPr>
+        <p:spPr>
+          <a:xfrm>
+            <a:off x="381000" y="4302848"/>
+            <a:ext cx="5120640" cy="621792"/>
+          </a:xfrm>
+          <a:prstGeom prst="roundRect">
+            <a:avLst>
+              <a:gd name="adj" fmla="val 8824"/>
+            </a:avLst>
+          </a:prstGeom>
+          <a:solidFill>
+            <a:srgbClr val="F2F7F9"/>
+          </a:solidFill>
+          <a:ln/>
+        </p:spPr>
+      </p:sp>
+      <p:sp>
+        <p:nvSpPr>
+          <p:cNvPr id="24" name="Text 22"/>
+          <p:cNvSpPr/>
+          <p:nvPr/>
+        </p:nvSpPr>
+        <p:spPr>
+          <a:xfrm>
+            <a:off x="548640" y="4261104"/>
+            <a:ext cx="3291840" cy="347472"/>
+          </a:xfrm>
+          <a:prstGeom prst="rect">
+            <a:avLst/>
+          </a:prstGeom>
+          <a:noFill/>
+          <a:ln/>
+        </p:spPr>
+        <p:txBody>
+          <a:bodyPr wrap="square" rtlCol="0" anchor="b"/>
+          <a:lstStyle/>
+          <a:p>
+            <a:pPr marL="0" indent="0">
+              <a:buNone/>
+            </a:pPr>
+            <a:r>
+              <a:rPr lang="en-US" sz="1200" dirty="0">
+                <a:solidFill>
+                  <a:srgbClr val="4A5568"/>
+                </a:solidFill>
+                <a:latin typeface="Calibri" pitchFamily="34" charset="0"/>
+                <a:ea typeface="Calibri" pitchFamily="34" charset="-122"/>
+                <a:cs typeface="Calibri" pitchFamily="34" charset="-120"/>
+              </a:rPr>
+              <a:t>P1 中位距离</a:t>
+            </a:r>
+            <a:endParaRPr lang="en-US" sz="1200" dirty="0"/>
+          </a:p>
+        </p:txBody>
+      </p:sp>
+      <p:sp>
+        <p:nvSpPr>
+          <p:cNvPr id="25" name="Text 23"/>
+          <p:cNvSpPr/>
+          <p:nvPr/>
+        </p:nvSpPr>
+        <p:spPr>
+          <a:xfrm>
+            <a:off x="4023360" y="4261104"/>
+            <a:ext cx="1097280" cy="347472"/>
+          </a:xfrm>
+          <a:prstGeom prst="rect">
+            <a:avLst/>
+          </a:prstGeom>
+          <a:noFill/>
+          <a:ln/>
+        </p:spPr>
+        <p:txBody>
+          <a:bodyPr wrap="square" rtlCol="0" anchor="b"/>
+          <a:lstStyle/>
+          <a:p>
+            <a:pPr marL="0" indent="0" algn="r">
+              <a:buNone/>
+            </a:pPr>
+            <a:r>
+              <a:rPr lang="en-US" sz="1600" b="1" dirty="0">
+                <a:solidFill>
+                  <a:srgbClr val="F96167"/>
+                </a:solidFill>
+                <a:latin typeface="Georgia" pitchFamily="34" charset="0"/>
+                <a:ea typeface="Georgia" pitchFamily="34" charset="-122"/>
+                <a:cs typeface="Georgia" pitchFamily="34" charset="-120"/>
+              </a:rPr>
+              <a:t>1,974 m</a:t>
+            </a:r>
+            <a:endParaRPr lang="en-US" sz="1600" dirty="0"/>
+          </a:p>
+        </p:txBody>
+      </p:sp>
+      <p:sp>
+        <p:nvSpPr>
+          <p:cNvPr id="26" name="Text 24"/>
+          <p:cNvSpPr/>
+          <p:nvPr/>
+        </p:nvSpPr>
+        <p:spPr>
+          <a:xfrm>
+            <a:off x="548640" y="4608576"/>
+            <a:ext cx="4572000" cy="201168"/>
+          </a:xfrm>
+          <a:prstGeom prst="rect">
+            <a:avLst/>
+          </a:prstGeom>
+          <a:noFill/>
+          <a:ln/>
+        </p:spPr>
+        <p:txBody>
+          <a:bodyPr wrap="square" rtlCol="0" anchor="t"/>
+          <a:lstStyle/>
+          <a:p>
+            <a:pPr marL="0" indent="0">
+              <a:buNone/>
+            </a:pPr>
+            <a:r>
+              <a:rPr lang="en-US" sz="1000" dirty="0">
+                <a:solidFill>
+                  <a:srgbClr val="8899A6"/>
+                </a:solidFill>
+                <a:latin typeface="Calibri" pitchFamily="34" charset="0"/>
+                <a:ea typeface="Calibri" pitchFamily="34" charset="-122"/>
+                <a:cs typeface="Calibri" pitchFamily="34" charset="-120"/>
+              </a:rPr>
+              <a:t>无法缩小差距</a:t>
+            </a:r>
+            <a:endParaRPr lang="en-US" sz="1000" dirty="0"/>
+          </a:p>
+        </p:txBody>
+      </p:sp>
+      <p:pic>
+        <p:nvPicPr>
+          <p:cNvPr id="27" name="Image 0" descr="results/viz/paper_charts/chart4_termination_reasons.png"/>
+          <p:cNvPicPr>
+            <a:picLocks noChangeAspect="1"/>
+          </p:cNvPicPr>
+          <p:nvPr/>
+        </p:nvPicPr>
+        <p:blipFill>
+          <a:blip r:embed="rId3"/>
+          <a:srcRect/>
+          <a:stretch/>
+        </p:blipFill>
+        <p:spPr>
+          <a:xfrm>
+            <a:off x="5882640" y="1516950"/>
+            <a:ext cx="5943600" cy="3657600"/>
+          </a:xfrm>
+          <a:prstGeom prst="rect">
+            <a:avLst/>
+          </a:prstGeom>
+        </p:spPr>
+      </p:pic>
+      <p:sp>
+        <p:nvSpPr>
+          <p:cNvPr id="28" name="Text 25"/>
+          <p:cNvSpPr/>
+          <p:nvPr/>
+        </p:nvSpPr>
+        <p:spPr>
+          <a:xfrm>
+            <a:off x="381000" y="5577840"/>
+            <a:ext cx="11430000" cy="457200"/>
+          </a:xfrm>
+          <a:prstGeom prst="rect">
+            <a:avLst/>
+          </a:prstGeom>
+          <a:noFill/>
+          <a:ln/>
+        </p:spPr>
+        <p:txBody>
+          <a:bodyPr wrap="square" rtlCol="0" anchor="ctr"/>
+          <a:lstStyle/>
+          <a:p>
+            <a:pPr marL="0" indent="0">
+              <a:buNone/>
+            </a:pPr>
+            <a:r>
+              <a:rPr lang="en-US" sz="1200" i="1" dirty="0">
+                <a:solidFill>
+                  <a:srgbClr val="4A5568"/>
+                </a:solidFill>
+                <a:latin typeface="Calibri" pitchFamily="34" charset="0"/>
+                <a:ea typeface="Calibri" pitchFamily="34" charset="-122"/>
+                <a:cs typeface="Calibri" pitchFamily="34" charset="-120"/>
+              </a:rPr>
+              <a:t>三大理论天花板: (1) CTDE 信息不对称 — 33-dim 局部观测无法编码全局协调状态. (2) 离散探索边界 — 15 基元在严格 800m 下接近饱和. (3) 缺乏显式预期到达时间差 ΔTGO 信号.</a:t>
+            </a:r>
+            <a:endParaRPr lang="en-US" sz="1200" dirty="0"/>
+          </a:p>
+        </p:txBody>
+      </p:sp>
+    </p:spTree>
+  </p:cSld>
+  <p:clrMapOvr>
+    <a:masterClrMapping/>
+  </p:clrMapOvr>
+</p:sld>
+</file>
+
+<file path=ppt/slides/slide16.xml><?xml version="1.0" encoding="utf-8"?>
+<p:sld xmlns:a="http://schemas.openxmlformats.org/drawingml/2006/main" xmlns:r="http://schemas.openxmlformats.org/officeDocument/2006/relationships" xmlns:p="http://schemas.openxmlformats.org/presentationml/2006/main">
+  <p:cSld name="Slide 12">
+    <p:bg>
+      <p:bgPr>
+        <a:solidFill>
+          <a:srgbClr val="FFFFFF"/>
+        </a:solidFill>
+        <a:effectLst/>
+      </p:bgPr>
+    </p:bg>
+    <p:spTree>
+      <p:nvGrpSpPr>
+        <p:cNvPr id="1" name=""/>
+        <p:cNvGrpSpPr/>
+        <p:nvPr/>
+      </p:nvGrpSpPr>
+      <p:grpSpPr>
+        <a:xfrm>
+          <a:off x="0" y="0"/>
+          <a:ext cx="0" cy="0"/>
+          <a:chOff x="0" y="0"/>
+          <a:chExt cx="0" cy="0"/>
+        </a:xfrm>
+      </p:grpSpPr>
+      <p:sp>
+        <p:nvSpPr>
+          <p:cNvPr id="2" name="Shape 0"/>
+          <p:cNvSpPr/>
+          <p:nvPr/>
+        </p:nvSpPr>
+        <p:spPr>
+          <a:xfrm>
+            <a:off x="365760" y="228600"/>
+            <a:ext cx="54864" cy="457200"/>
+          </a:xfrm>
+          <a:prstGeom prst="rect">
+            <a:avLst/>
+          </a:prstGeom>
+          <a:solidFill>
+            <a:srgbClr val="F96167"/>
+          </a:solidFill>
+          <a:ln/>
+        </p:spPr>
+      </p:sp>
+      <p:sp>
+        <p:nvSpPr>
+          <p:cNvPr id="3" name="Text 1"/>
+          <p:cNvSpPr/>
+          <p:nvPr/>
+        </p:nvSpPr>
+        <p:spPr>
+          <a:xfrm>
+            <a:off x="365760" y="182880"/>
+            <a:ext cx="731520" cy="502920"/>
+          </a:xfrm>
+          <a:prstGeom prst="rect">
+            <a:avLst/>
+          </a:prstGeom>
+          <a:noFill/>
+          <a:ln/>
+        </p:spPr>
+        <p:txBody>
+          <a:bodyPr wrap="square" lIns="0" tIns="0" rIns="0" bIns="0" rtlCol="0" anchor="ctr"/>
+          <a:lstStyle/>
+          <a:p>
+            <a:pPr marL="0" indent="0">
+              <a:buNone/>
+            </a:pPr>
+            <a:r>
+              <a:rPr lang="en-US" sz="2600" b="1" dirty="0">
+                <a:solidFill>
+                  <a:srgbClr val="F96167"/>
+                </a:solidFill>
+                <a:latin typeface="Georgia" pitchFamily="34" charset="0"/>
+                <a:ea typeface="Georgia" pitchFamily="34" charset="-122"/>
+                <a:cs typeface="Georgia" pitchFamily="34" charset="-120"/>
+              </a:rPr>
+              <a:t>11</a:t>
+            </a:r>
+            <a:endParaRPr lang="en-US" sz="2600" dirty="0"/>
+          </a:p>
+        </p:txBody>
+      </p:sp>
+      <p:sp>
+        <p:nvSpPr>
+          <p:cNvPr id="4" name="Text 2"/>
+          <p:cNvSpPr/>
+          <p:nvPr/>
+        </p:nvSpPr>
+        <p:spPr>
+          <a:xfrm>
+            <a:off x="1051560" y="182880"/>
+            <a:ext cx="10515600" cy="502920"/>
+          </a:xfrm>
+          <a:prstGeom prst="rect">
+            <a:avLst/>
+          </a:prstGeom>
+          <a:noFill/>
+          <a:ln/>
+        </p:spPr>
+        <p:txBody>
+          <a:bodyPr wrap="square" rtlCol="0" anchor="ctr"/>
+          <a:lstStyle/>
+          <a:p>
+            <a:pPr marL="0" indent="0">
               <a:buNone/>
             </a:pPr>
             <a:r>
@@ -3526,7 +4202,7 @@
           </a:solidFill>
           <a:ln/>
           <a:effectLst>
-            <a:outerShdw sx="100000" sy="100000" kx="0" ky="0" algn="bl" rotWithShape="0" blurRad="38100" dist="12700" dir="16200000">
+            <a:outerShdw blurRad="38100" dist="12700" dir="16200000" algn="bl" rotWithShape="0">
               <a:srgbClr val="C0D0D8">
                 <a:alpha val="18000"/>
               </a:srgbClr>
@@ -3575,7 +4251,7 @@
           <a:bodyPr wrap="square" rtlCol="0" anchor="ctr"/>
           <a:lstStyle/>
           <a:p>
-            <a:pPr algn="ctr" indent="0" marL="0">
+            <a:pPr marL="0" indent="0" algn="ctr">
               <a:buNone/>
             </a:pPr>
             <a:r>
@@ -3614,7 +4290,7 @@
           <a:bodyPr wrap="square" rtlCol="0" anchor="ctr"/>
           <a:lstStyle/>
           <a:p>
-            <a:pPr indent="0" marL="0">
+            <a:pPr marL="0" indent="0">
               <a:buNone/>
             </a:pPr>
             <a:r>
@@ -3653,7 +4329,7 @@
           <a:bodyPr wrap="square" rtlCol="0" anchor="ctr"/>
           <a:lstStyle/>
           <a:p>
-            <a:pPr indent="0" marL="0">
+            <a:pPr marL="0" indent="0">
               <a:lnSpc>
                 <a:spcPct val="120000"/>
               </a:lnSpc>
@@ -3695,7 +4371,7 @@
           </a:solidFill>
           <a:ln/>
           <a:effectLst>
-            <a:outerShdw sx="100000" sy="100000" kx="0" ky="0" algn="bl" rotWithShape="0" blurRad="38100" dist="12700" dir="16200000">
+            <a:outerShdw blurRad="38100" dist="12700" dir="16200000" algn="bl" rotWithShape="0">
               <a:srgbClr val="C0D0D8">
                 <a:alpha val="18000"/>
               </a:srgbClr>
@@ -3744,7 +4420,7 @@
           <a:bodyPr wrap="square" rtlCol="0" anchor="ctr"/>
           <a:lstStyle/>
           <a:p>
-            <a:pPr algn="ctr" indent="0" marL="0">
+            <a:pPr marL="0" indent="0" algn="ctr">
               <a:buNone/>
             </a:pPr>
             <a:r>
@@ -3783,7 +4459,7 @@
           <a:bodyPr wrap="square" rtlCol="0" anchor="ctr"/>
           <a:lstStyle/>
           <a:p>
-            <a:pPr indent="0" marL="0">
+            <a:pPr marL="0" indent="0">
               <a:buNone/>
             </a:pPr>
             <a:r>
@@ -3822,7 +4498,7 @@
           <a:bodyPr wrap="square" rtlCol="0" anchor="ctr"/>
           <a:lstStyle/>
           <a:p>
-            <a:pPr indent="0" marL="0">
+            <a:pPr marL="0" indent="0">
               <a:lnSpc>
                 <a:spcPct val="120000"/>
               </a:lnSpc>
@@ -3864,7 +4540,7 @@
           </a:solidFill>
           <a:ln/>
           <a:effectLst>
-            <a:outerShdw sx="100000" sy="100000" kx="0" ky="0" algn="bl" rotWithShape="0" blurRad="38100" dist="12700" dir="16200000">
+            <a:outerShdw blurRad="38100" dist="12700" dir="16200000" algn="bl" rotWithShape="0">
               <a:srgbClr val="C0D0D8">
                 <a:alpha val="18000"/>
               </a:srgbClr>
@@ -3913,7 +4589,7 @@
           <a:bodyPr wrap="square" rtlCol="0" anchor="ctr"/>
           <a:lstStyle/>
           <a:p>
-            <a:pPr algn="ctr" indent="0" marL="0">
+            <a:pPr marL="0" indent="0" algn="ctr">
               <a:buNone/>
             </a:pPr>
             <a:r>
@@ -3952,7 +4628,7 @@
           <a:bodyPr wrap="square" rtlCol="0" anchor="ctr"/>
           <a:lstStyle/>
           <a:p>
-            <a:pPr indent="0" marL="0">
+            <a:pPr marL="0" indent="0">
               <a:buNone/>
             </a:pPr>
             <a:r>
@@ -3991,7 +4667,7 @@
           <a:bodyPr wrap="square" rtlCol="0" anchor="ctr"/>
           <a:lstStyle/>
           <a:p>
-            <a:pPr indent="0" marL="0">
+            <a:pPr marL="0" indent="0">
               <a:lnSpc>
                 <a:spcPct val="120000"/>
               </a:lnSpc>
@@ -4033,7 +4709,7 @@
           </a:solidFill>
           <a:ln/>
           <a:effectLst>
-            <a:outerShdw sx="100000" sy="100000" kx="0" ky="0" algn="bl" rotWithShape="0" blurRad="38100" dist="12700" dir="16200000">
+            <a:outerShdw blurRad="38100" dist="12700" dir="16200000" algn="bl" rotWithShape="0">
               <a:srgbClr val="C0D0D8">
                 <a:alpha val="18000"/>
               </a:srgbClr>
@@ -4082,7 +4758,7 @@
           <a:bodyPr wrap="square" rtlCol="0" anchor="ctr"/>
           <a:lstStyle/>
           <a:p>
-            <a:pPr algn="ctr" indent="0" marL="0">
+            <a:pPr marL="0" indent="0" algn="ctr">
               <a:buNone/>
             </a:pPr>
             <a:r>
@@ -4121,7 +4797,7 @@
           <a:bodyPr wrap="square" rtlCol="0" anchor="ctr"/>
           <a:lstStyle/>
           <a:p>
-            <a:pPr indent="0" marL="0">
+            <a:pPr marL="0" indent="0">
               <a:buNone/>
             </a:pPr>
             <a:r>
@@ -4160,7 +4836,7 @@
           <a:bodyPr wrap="square" rtlCol="0" anchor="ctr"/>
           <a:lstStyle/>
           <a:p>
-            <a:pPr indent="0" marL="0">
+            <a:pPr marL="0" indent="0">
               <a:lnSpc>
                 <a:spcPct val="120000"/>
               </a:lnSpc>
@@ -4200,84 +4876,6 @@
           </a:solidFill>
           <a:ln/>
         </p:spPr>
-      </p:sp>
-      <p:sp>
-        <p:nvSpPr>
-          <p:cNvPr id="27" name="Text 25"/>
-          <p:cNvSpPr/>
-          <p:nvPr/>
-        </p:nvSpPr>
-        <p:spPr>
-          <a:xfrm>
-            <a:off x="365760" y="6126480"/>
-            <a:ext cx="11430000" cy="457200"/>
-          </a:xfrm>
-          <a:prstGeom prst="rect">
-            <a:avLst/>
-          </a:prstGeom>
-          <a:noFill/>
-          <a:ln/>
-        </p:spPr>
-        <p:txBody>
-          <a:bodyPr wrap="square" rtlCol="0" anchor="ctr"/>
-          <a:lstStyle/>
-          <a:p>
-            <a:pPr algn="ctr" indent="0" marL="0">
-              <a:buNone/>
-            </a:pPr>
-            <a:r>
-              <a:rPr lang="en-US" sz="2400" b="1" dirty="0">
-                <a:solidFill>
-                  <a:srgbClr val="065A82"/>
-                </a:solidFill>
-                <a:latin typeface="Georgia" pitchFamily="34" charset="0"/>
-                <a:ea typeface="Georgia" pitchFamily="34" charset="-122"/>
-                <a:cs typeface="Georgia" pitchFamily="34" charset="-120"/>
-              </a:rPr>
-              <a:t>感谢聆听 · 欢迎提问与讨论</a:t>
-            </a:r>
-            <a:endParaRPr lang="en-US" sz="2400" dirty="0"/>
-          </a:p>
-        </p:txBody>
-      </p:sp>
-      <p:sp>
-        <p:nvSpPr>
-          <p:cNvPr id="28" name="Text 26"/>
-          <p:cNvSpPr/>
-          <p:nvPr/>
-        </p:nvSpPr>
-        <p:spPr>
-          <a:xfrm>
-            <a:off x="365760" y="6583680"/>
-            <a:ext cx="11430000" cy="274320"/>
-          </a:xfrm>
-          <a:prstGeom prst="rect">
-            <a:avLst/>
-          </a:prstGeom>
-          <a:noFill/>
-          <a:ln/>
-        </p:spPr>
-        <p:txBody>
-          <a:bodyPr wrap="square" rtlCol="0" anchor="ctr"/>
-          <a:lstStyle/>
-          <a:p>
-            <a:pPr algn="ctr" indent="0" marL="0">
-              <a:buNone/>
-            </a:pPr>
-            <a:r>
-              <a:rPr lang="en-US" sz="1200" dirty="0">
-                <a:solidFill>
-                  <a:srgbClr val="8899A6"/>
-                </a:solidFill>
-                <a:latin typeface="Calibri" pitchFamily="34" charset="0"/>
-                <a:ea typeface="Calibri" pitchFamily="34" charset="-122"/>
-                <a:cs typeface="Calibri" pitchFamily="34" charset="-120"/>
-              </a:rPr>
-              <a:t>sean@zju.edu.cn  ·  github.com/NishimiyaXSean/jsbsim-marl-formation</a:t>
-            </a:r>
-            <a:endParaRPr lang="en-US" sz="1200" dirty="0"/>
-          </a:p>
-        </p:txBody>
       </p:sp>
     </p:spTree>
   </p:cSld>
@@ -4295,6 +4893,7 @@
         <a:solidFill>
           <a:srgbClr val="FFFFFF"/>
         </a:solidFill>
+        <a:effectLst/>
       </p:bgPr>
     </p:bg>
     <p:spTree>
@@ -4352,7 +4951,7 @@
           <a:bodyPr wrap="square" lIns="0" tIns="0" rIns="0" bIns="0" rtlCol="0" anchor="ctr"/>
           <a:lstStyle/>
           <a:p>
-            <a:pPr indent="0" marL="0">
+            <a:pPr marL="0" indent="0">
               <a:buNone/>
             </a:pPr>
             <a:r>
@@ -4391,7 +4990,7 @@
           <a:bodyPr wrap="square" rtlCol="0" anchor="ctr"/>
           <a:lstStyle/>
           <a:p>
-            <a:pPr indent="0" marL="0">
+            <a:pPr marL="0" indent="0">
               <a:buNone/>
             </a:pPr>
             <a:r>
@@ -4403,7 +5002,18 @@
                 <a:ea typeface="Georgia" pitchFamily="34" charset="-122"/>
                 <a:cs typeface="Georgia" pitchFamily="34" charset="-120"/>
               </a:rPr>
-              <a:t>核心挑战 — 协同的三大死锁困境</a:t>
+              <a:t>核心挑战 — </a:t>
+            </a:r>
+            <a:r>
+              <a:rPr lang="en-US" sz="3000" b="1" dirty="0" err="1">
+                <a:solidFill>
+                  <a:srgbClr val="065A82"/>
+                </a:solidFill>
+                <a:latin typeface="Georgia" pitchFamily="34" charset="0"/>
+                <a:ea typeface="Georgia" pitchFamily="34" charset="-122"/>
+                <a:cs typeface="Georgia" pitchFamily="34" charset="-120"/>
+              </a:rPr>
+              <a:t>协同的三大困境</a:t>
             </a:r>
             <a:endParaRPr lang="en-US" sz="3000" dirty="0"/>
           </a:p>
@@ -4472,7 +5082,7 @@
           <a:bodyPr wrap="square" rtlCol="0" anchor="ctr"/>
           <a:lstStyle/>
           <a:p>
-            <a:pPr indent="0" marL="0">
+            <a:pPr marL="0" indent="0">
               <a:buNone/>
             </a:pPr>
             <a:r>
@@ -4511,7 +5121,7 @@
           <a:bodyPr wrap="square" rtlCol="0" anchor="ctr"/>
           <a:lstStyle/>
           <a:p>
-            <a:pPr indent="0" marL="0">
+            <a:pPr marL="0" indent="0">
               <a:lnSpc>
                 <a:spcPct val="145000"/>
               </a:lnSpc>
@@ -4531,7 +5141,7 @@
             <a:endParaRPr lang="en-US" sz="1400" dirty="0"/>
           </a:p>
           <a:p>
-            <a:pPr indent="0" marL="0">
+            <a:pPr marL="0" indent="0">
               <a:lnSpc>
                 <a:spcPct val="145000"/>
               </a:lnSpc>
@@ -4551,7 +5161,7 @@
             <a:endParaRPr lang="en-US" sz="1400" dirty="0"/>
           </a:p>
           <a:p>
-            <a:pPr indent="0" marL="0">
+            <a:pPr marL="0" indent="0">
               <a:lnSpc>
                 <a:spcPct val="145000"/>
               </a:lnSpc>
@@ -4615,7 +5225,7 @@
           <a:bodyPr wrap="square" rtlCol="0" anchor="ctr"/>
           <a:lstStyle/>
           <a:p>
-            <a:pPr algn="ctr" indent="0" marL="0">
+            <a:pPr marL="0" indent="0" algn="ctr">
               <a:buNone/>
             </a:pPr>
             <a:r>
@@ -4676,7 +5286,7 @@
           <a:bodyPr wrap="square" rtlCol="0" anchor="ctr"/>
           <a:lstStyle/>
           <a:p>
-            <a:pPr indent="0" marL="0">
+            <a:pPr marL="0" indent="0">
               <a:buNone/>
             </a:pPr>
             <a:r>
@@ -4715,7 +5325,7 @@
           <a:bodyPr wrap="square" rtlCol="0" anchor="ctr"/>
           <a:lstStyle/>
           <a:p>
-            <a:pPr indent="0" marL="0">
+            <a:pPr marL="0" indent="0">
               <a:lnSpc>
                 <a:spcPct val="145000"/>
               </a:lnSpc>
@@ -4735,7 +5345,7 @@
             <a:endParaRPr lang="en-US" sz="1400" dirty="0"/>
           </a:p>
           <a:p>
-            <a:pPr indent="0" marL="0">
+            <a:pPr marL="0" indent="0">
               <a:lnSpc>
                 <a:spcPct val="145000"/>
               </a:lnSpc>
@@ -4755,7 +5365,7 @@
             <a:endParaRPr lang="en-US" sz="1400" dirty="0"/>
           </a:p>
           <a:p>
-            <a:pPr indent="0" marL="0">
+            <a:pPr marL="0" indent="0">
               <a:lnSpc>
                 <a:spcPct val="145000"/>
               </a:lnSpc>
@@ -4775,7 +5385,7 @@
             <a:endParaRPr lang="en-US" sz="1400" dirty="0"/>
           </a:p>
           <a:p>
-            <a:pPr indent="0" marL="0">
+            <a:pPr marL="0" indent="0">
               <a:lnSpc>
                 <a:spcPct val="145000"/>
               </a:lnSpc>
@@ -4839,7 +5449,7 @@
           <a:bodyPr wrap="square" rtlCol="0" anchor="ctr"/>
           <a:lstStyle/>
           <a:p>
-            <a:pPr algn="ctr" indent="0" marL="0">
+            <a:pPr marL="0" indent="0" algn="ctr">
               <a:buNone/>
             </a:pPr>
             <a:r>
@@ -4900,7 +5510,7 @@
           <a:bodyPr wrap="square" rtlCol="0" anchor="ctr"/>
           <a:lstStyle/>
           <a:p>
-            <a:pPr indent="0" marL="0">
+            <a:pPr marL="0" indent="0">
               <a:buNone/>
             </a:pPr>
             <a:r>
@@ -4939,7 +5549,7 @@
           <a:bodyPr wrap="square" rtlCol="0" anchor="ctr"/>
           <a:lstStyle/>
           <a:p>
-            <a:pPr indent="0" marL="0">
+            <a:pPr marL="0" indent="0">
               <a:lnSpc>
                 <a:spcPct val="145000"/>
               </a:lnSpc>
@@ -4959,7 +5569,7 @@
             <a:endParaRPr lang="en-US" sz="1400" dirty="0"/>
           </a:p>
           <a:p>
-            <a:pPr indent="0" marL="0">
+            <a:pPr marL="0" indent="0">
               <a:lnSpc>
                 <a:spcPct val="145000"/>
               </a:lnSpc>
@@ -4979,7 +5589,7 @@
             <a:endParaRPr lang="en-US" sz="1400" dirty="0"/>
           </a:p>
           <a:p>
-            <a:pPr indent="0" marL="0">
+            <a:pPr marL="0" indent="0">
               <a:lnSpc>
                 <a:spcPct val="145000"/>
               </a:lnSpc>
@@ -4999,7 +5609,7 @@
             <a:endParaRPr lang="en-US" sz="1400" dirty="0"/>
           </a:p>
           <a:p>
-            <a:pPr indent="0" marL="0">
+            <a:pPr marL="0" indent="0">
               <a:lnSpc>
                 <a:spcPct val="145000"/>
               </a:lnSpc>
@@ -5063,7 +5673,7 @@
           <a:bodyPr wrap="square" rtlCol="0" anchor="ctr"/>
           <a:lstStyle/>
           <a:p>
-            <a:pPr algn="ctr" indent="0" marL="0">
+            <a:pPr marL="0" indent="0" algn="ctr">
               <a:buNone/>
             </a:pPr>
             <a:r>
@@ -5091,12 +5701,163 @@
 
 <file path=ppt/slides/slide3.xml><?xml version="1.0" encoding="utf-8"?>
 <p:sld xmlns:a="http://schemas.openxmlformats.org/drawingml/2006/main" xmlns:r="http://schemas.openxmlformats.org/officeDocument/2006/relationships" xmlns:p="http://schemas.openxmlformats.org/presentationml/2006/main">
+  <p:cSld>
+    <p:spTree>
+      <p:nvGrpSpPr>
+        <p:cNvPr id="1" name=""/>
+        <p:cNvGrpSpPr/>
+        <p:nvPr/>
+      </p:nvGrpSpPr>
+      <p:grpSpPr>
+        <a:xfrm>
+          <a:off x="0" y="0"/>
+          <a:ext cx="0" cy="0"/>
+          <a:chOff x="0" y="0"/>
+          <a:chExt cx="0" cy="0"/>
+        </a:xfrm>
+      </p:grpSpPr>
+      <p:pic>
+        <p:nvPicPr>
+          <p:cNvPr id="2" name="图片 1">
+            <a:extLst>
+              <a:ext uri="{FF2B5EF4-FFF2-40B4-BE49-F238E27FC236}">
+                <a16:creationId xmlns:a16="http://schemas.microsoft.com/office/drawing/2014/main" id="{342CCAFD-9878-46C8-BCD7-0A743E96CA79}"/>
+              </a:ext>
+            </a:extLst>
+          </p:cNvPr>
+          <p:cNvPicPr>
+            <a:picLocks noChangeAspect="1"/>
+          </p:cNvPicPr>
+          <p:nvPr/>
+        </p:nvPicPr>
+        <p:blipFill>
+          <a:blip r:embed="rId2"/>
+          <a:stretch>
+            <a:fillRect/>
+          </a:stretch>
+        </p:blipFill>
+        <p:spPr>
+          <a:xfrm>
+            <a:off x="6196336" y="-72092"/>
+            <a:ext cx="5995664" cy="3384894"/>
+          </a:xfrm>
+          <a:prstGeom prst="rect">
+            <a:avLst/>
+          </a:prstGeom>
+        </p:spPr>
+      </p:pic>
+      <p:pic>
+        <p:nvPicPr>
+          <p:cNvPr id="3" name="图片 2">
+            <a:extLst>
+              <a:ext uri="{FF2B5EF4-FFF2-40B4-BE49-F238E27FC236}">
+                <a16:creationId xmlns:a16="http://schemas.microsoft.com/office/drawing/2014/main" id="{60DEF825-EC44-4238-9E8D-1655A4B46421}"/>
+              </a:ext>
+            </a:extLst>
+          </p:cNvPr>
+          <p:cNvPicPr>
+            <a:picLocks noChangeAspect="1"/>
+          </p:cNvPicPr>
+          <p:nvPr/>
+        </p:nvPicPr>
+        <p:blipFill>
+          <a:blip r:embed="rId3"/>
+          <a:stretch>
+            <a:fillRect/>
+          </a:stretch>
+        </p:blipFill>
+        <p:spPr>
+          <a:xfrm>
+            <a:off x="-16426" y="3312802"/>
+            <a:ext cx="6091319" cy="3532337"/>
+          </a:xfrm>
+          <a:prstGeom prst="rect">
+            <a:avLst/>
+          </a:prstGeom>
+        </p:spPr>
+      </p:pic>
+      <p:pic>
+        <p:nvPicPr>
+          <p:cNvPr id="4" name="图片 3">
+            <a:extLst>
+              <a:ext uri="{FF2B5EF4-FFF2-40B4-BE49-F238E27FC236}">
+                <a16:creationId xmlns:a16="http://schemas.microsoft.com/office/drawing/2014/main" id="{EDD060EA-EA7E-434B-9DCE-E999DAAFDEC6}"/>
+              </a:ext>
+            </a:extLst>
+          </p:cNvPr>
+          <p:cNvPicPr>
+            <a:picLocks noChangeAspect="1"/>
+          </p:cNvPicPr>
+          <p:nvPr/>
+        </p:nvPicPr>
+        <p:blipFill>
+          <a:blip r:embed="rId4"/>
+          <a:stretch>
+            <a:fillRect/>
+          </a:stretch>
+        </p:blipFill>
+        <p:spPr>
+          <a:xfrm>
+            <a:off x="6117108" y="3429000"/>
+            <a:ext cx="6074894" cy="3299942"/>
+          </a:xfrm>
+          <a:prstGeom prst="rect">
+            <a:avLst/>
+          </a:prstGeom>
+        </p:spPr>
+      </p:pic>
+      <p:pic>
+        <p:nvPicPr>
+          <p:cNvPr id="5" name="图片 4">
+            <a:extLst>
+              <a:ext uri="{FF2B5EF4-FFF2-40B4-BE49-F238E27FC236}">
+                <a16:creationId xmlns:a16="http://schemas.microsoft.com/office/drawing/2014/main" id="{66D0AD21-7292-459F-AFAE-18002381F2BF}"/>
+              </a:ext>
+            </a:extLst>
+          </p:cNvPr>
+          <p:cNvPicPr>
+            <a:picLocks noChangeAspect="1"/>
+          </p:cNvPicPr>
+          <p:nvPr/>
+        </p:nvPicPr>
+        <p:blipFill>
+          <a:blip r:embed="rId5"/>
+          <a:stretch>
+            <a:fillRect/>
+          </a:stretch>
+        </p:blipFill>
+        <p:spPr>
+          <a:xfrm>
+            <a:off x="0" y="0"/>
+            <a:ext cx="6074893" cy="3392072"/>
+          </a:xfrm>
+          <a:prstGeom prst="rect">
+            <a:avLst/>
+          </a:prstGeom>
+        </p:spPr>
+      </p:pic>
+    </p:spTree>
+    <p:extLst>
+      <p:ext uri="{BB962C8B-B14F-4D97-AF65-F5344CB8AC3E}">
+        <p14:creationId xmlns:p14="http://schemas.microsoft.com/office/powerpoint/2010/main" val="2915364348"/>
+      </p:ext>
+    </p:extLst>
+  </p:cSld>
+  <p:clrMapOvr>
+    <a:masterClrMapping/>
+  </p:clrMapOvr>
+</p:sld>
+</file>
+
+<file path=ppt/slides/slide4.xml><?xml version="1.0" encoding="utf-8"?>
+<p:sld xmlns:a="http://schemas.openxmlformats.org/drawingml/2006/main" xmlns:r="http://schemas.openxmlformats.org/officeDocument/2006/relationships" xmlns:p="http://schemas.openxmlformats.org/presentationml/2006/main">
   <p:cSld name="Slide 3">
     <p:bg>
       <p:bgPr>
         <a:solidFill>
           <a:srgbClr val="FFFFFF"/>
         </a:solidFill>
+        <a:effectLst/>
       </p:bgPr>
     </p:bg>
     <p:spTree>
@@ -5154,7 +5915,7 @@
           <a:bodyPr wrap="square" lIns="0" tIns="0" rIns="0" bIns="0" rtlCol="0" anchor="ctr"/>
           <a:lstStyle/>
           <a:p>
-            <a:pPr indent="0" marL="0">
+            <a:pPr marL="0" indent="0">
               <a:buNone/>
             </a:pPr>
             <a:r>
@@ -5193,7 +5954,7 @@
           <a:bodyPr wrap="square" rtlCol="0" anchor="ctr"/>
           <a:lstStyle/>
           <a:p>
-            <a:pPr indent="0" marL="0">
+            <a:pPr marL="0" indent="0">
               <a:buNone/>
             </a:pPr>
             <a:r>
@@ -5252,7 +6013,7 @@
           <a:bodyPr wrap="square" rtlCol="0" anchor="ctr"/>
           <a:lstStyle/>
           <a:p>
-            <a:pPr indent="0" marL="0">
+            <a:pPr marL="0" indent="0">
               <a:buNone/>
             </a:pPr>
             <a:r>
@@ -5278,20 +6039,20 @@
         </p:nvSpPr>
         <p:spPr>
           <a:xfrm>
-            <a:off x="365760" y="1463040"/>
-            <a:ext cx="5486400" cy="3200400"/>
-          </a:xfrm>
-          <a:prstGeom prst="rect">
-            <a:avLst/>
-          </a:prstGeom>
-          <a:noFill/>
-          <a:ln/>
-        </p:spPr>
-        <p:txBody>
-          <a:bodyPr wrap="square" rtlCol="0" anchor="ctr"/>
-          <a:lstStyle/>
-          <a:p>
-            <a:pPr indent="0" marL="0">
+            <a:off x="614239" y="1450271"/>
+            <a:ext cx="7575604" cy="1510556"/>
+          </a:xfrm>
+          <a:prstGeom prst="rect">
+            <a:avLst/>
+          </a:prstGeom>
+          <a:noFill/>
+          <a:ln/>
+        </p:spPr>
+        <p:txBody>
+          <a:bodyPr wrap="square" rtlCol="0" anchor="ctr"/>
+          <a:lstStyle/>
+          <a:p>
+            <a:pPr marL="0" indent="0">
               <a:lnSpc>
                 <a:spcPct val="130000"/>
               </a:lnSpc>
@@ -5311,7 +6072,7 @@
             <a:endParaRPr lang="en-US" sz="1400" dirty="0"/>
           </a:p>
           <a:p>
-            <a:pPr indent="0" marL="0">
+            <a:pPr marL="0" indent="0">
               <a:lnSpc>
                 <a:spcPct val="130000"/>
               </a:lnSpc>
@@ -5331,7 +6092,7 @@
             <a:endParaRPr lang="en-US" sz="1400" dirty="0"/>
           </a:p>
           <a:p>
-            <a:pPr indent="0" marL="0">
+            <a:pPr marL="0" indent="0">
               <a:lnSpc>
                 <a:spcPct val="130000"/>
               </a:lnSpc>
@@ -5351,7 +6112,7 @@
             <a:endParaRPr lang="en-US" sz="1400" dirty="0"/>
           </a:p>
           <a:p>
-            <a:pPr indent="0" marL="0">
+            <a:pPr marL="0" indent="0">
               <a:lnSpc>
                 <a:spcPct val="130000"/>
               </a:lnSpc>
@@ -5366,711 +6127,281 @@
                 <a:ea typeface="Calibri" pitchFamily="34" charset="-122"/>
                 <a:cs typeface="Calibri" pitchFamily="34" charset="-120"/>
               </a:rPr>
-              <a:t>  Mate (6):     友机相对位置/速度</a:t>
+              <a:t>  Mate (6):     友机相对位置/</a:t>
+            </a:r>
+            <a:r>
+              <a:rPr lang="en-US" sz="1400" dirty="0" err="1">
+                <a:solidFill>
+                  <a:srgbClr val="4A5568"/>
+                </a:solidFill>
+                <a:latin typeface="Calibri" pitchFamily="34" charset="0"/>
+                <a:ea typeface="Calibri" pitchFamily="34" charset="-122"/>
+                <a:cs typeface="Calibri" pitchFamily="34" charset="-120"/>
+              </a:rPr>
+              <a:t>速度</a:t>
             </a:r>
             <a:endParaRPr lang="en-US" sz="1400" dirty="0"/>
           </a:p>
-          <a:p>
-            <a:pPr indent="0" marL="0">
+        </p:txBody>
+      </p:sp>
+      <p:pic>
+        <p:nvPicPr>
+          <p:cNvPr id="12" name="图片 11">
+            <a:extLst>
+              <a:ext uri="{FF2B5EF4-FFF2-40B4-BE49-F238E27FC236}">
+                <a16:creationId xmlns:a16="http://schemas.microsoft.com/office/drawing/2014/main" id="{AA5D0352-29C6-4E28-837F-2FAB5906864E}"/>
+              </a:ext>
+            </a:extLst>
+          </p:cNvPr>
+          <p:cNvPicPr>
+            <a:picLocks noChangeAspect="1"/>
+          </p:cNvPicPr>
+          <p:nvPr/>
+        </p:nvPicPr>
+        <p:blipFill>
+          <a:blip r:embed="rId3"/>
+          <a:stretch>
+            <a:fillRect/>
+          </a:stretch>
+        </p:blipFill>
+        <p:spPr>
+          <a:xfrm>
+            <a:off x="274561" y="3189562"/>
+            <a:ext cx="11905512" cy="3579883"/>
+          </a:xfrm>
+          <a:prstGeom prst="rect">
+            <a:avLst/>
+          </a:prstGeom>
+        </p:spPr>
+      </p:pic>
+      <p:sp>
+        <p:nvSpPr>
+          <p:cNvPr id="13" name="矩形 12">
+            <a:extLst>
+              <a:ext uri="{FF2B5EF4-FFF2-40B4-BE49-F238E27FC236}">
+                <a16:creationId xmlns:a16="http://schemas.microsoft.com/office/drawing/2014/main" id="{062FBFA6-3C0B-4B1B-85E2-849F126FDCEF}"/>
+              </a:ext>
+            </a:extLst>
+          </p:cNvPr>
+          <p:cNvSpPr/>
+          <p:nvPr/>
+        </p:nvSpPr>
+        <p:spPr>
+          <a:xfrm>
+            <a:off x="5807103" y="1052483"/>
+            <a:ext cx="5988657" cy="1830629"/>
+          </a:xfrm>
+          <a:prstGeom prst="rect">
+            <a:avLst/>
+          </a:prstGeom>
+        </p:spPr>
+        <p:txBody>
+          <a:bodyPr wrap="square">
+            <a:spAutoFit/>
+          </a:bodyPr>
+          <a:lstStyle/>
+          <a:p>
+            <a:pPr>
               <a:lnSpc>
                 <a:spcPct val="130000"/>
               </a:lnSpc>
-              <a:buNone/>
-            </a:pPr>
-            <a:endParaRPr lang="en-US" sz="1400" dirty="0"/>
-          </a:p>
-          <a:p>
-            <a:pPr indent="0" marL="0">
+            </a:pPr>
+            <a:endParaRPr lang="en-US" altLang="zh-CN" dirty="0"/>
+          </a:p>
+          <a:p>
+            <a:pPr>
               <a:lnSpc>
                 <a:spcPct val="130000"/>
               </a:lnSpc>
-              <a:buNone/>
-            </a:pPr>
-            <a:r>
-              <a:rPr lang="en-US" sz="1400" dirty="0">
-                <a:solidFill>
-                  <a:srgbClr val="4A5568"/>
-                </a:solidFill>
-                <a:latin typeface="Calibri" pitchFamily="34" charset="0"/>
-                <a:ea typeface="Calibri" pitchFamily="34" charset="-122"/>
-                <a:cs typeface="Calibri" pitchFamily="34" charset="-120"/>
-              </a:rPr>
-              <a:t>Token-Type 嵌入 → MultiHeadAttention (4 heads, d=128)</a:t>
-            </a:r>
-            <a:endParaRPr lang="en-US" sz="1400" dirty="0"/>
-          </a:p>
-          <a:p>
-            <a:pPr indent="0" marL="0">
+            </a:pPr>
+            <a:r>
+              <a:rPr lang="en-US" altLang="zh-CN" sz="1400" dirty="0">
+                <a:solidFill>
+                  <a:srgbClr val="4A5568"/>
+                </a:solidFill>
+                <a:latin typeface="Calibri" pitchFamily="34" charset="0"/>
+                <a:cs typeface="Calibri" pitchFamily="34" charset="-120"/>
+              </a:rPr>
+              <a:t>Token-Type </a:t>
+            </a:r>
+            <a:r>
+              <a:rPr lang="en-US" altLang="zh-CN" sz="1400" dirty="0" err="1">
+                <a:solidFill>
+                  <a:srgbClr val="4A5568"/>
+                </a:solidFill>
+                <a:latin typeface="Calibri" pitchFamily="34" charset="0"/>
+                <a:cs typeface="Calibri" pitchFamily="34" charset="-120"/>
+              </a:rPr>
+              <a:t>嵌入</a:t>
+            </a:r>
+            <a:r>
+              <a:rPr lang="en-US" altLang="zh-CN" sz="1400" dirty="0">
+                <a:solidFill>
+                  <a:srgbClr val="4A5568"/>
+                </a:solidFill>
+                <a:latin typeface="Calibri" pitchFamily="34" charset="0"/>
+                <a:cs typeface="Calibri" pitchFamily="34" charset="-120"/>
+              </a:rPr>
+              <a:t> → </a:t>
+            </a:r>
+            <a:r>
+              <a:rPr lang="en-US" altLang="zh-CN" sz="1400" dirty="0" err="1">
+                <a:solidFill>
+                  <a:srgbClr val="4A5568"/>
+                </a:solidFill>
+                <a:latin typeface="Calibri" pitchFamily="34" charset="0"/>
+                <a:cs typeface="Calibri" pitchFamily="34" charset="-120"/>
+              </a:rPr>
+              <a:t>MultiHeadAttention</a:t>
+            </a:r>
+            <a:r>
+              <a:rPr lang="en-US" altLang="zh-CN" sz="1400" dirty="0">
+                <a:solidFill>
+                  <a:srgbClr val="4A5568"/>
+                </a:solidFill>
+                <a:latin typeface="Calibri" pitchFamily="34" charset="0"/>
+                <a:cs typeface="Calibri" pitchFamily="34" charset="-120"/>
+              </a:rPr>
+              <a:t> (4 heads, d=128)</a:t>
+            </a:r>
+          </a:p>
+          <a:p>
+            <a:pPr>
               <a:lnSpc>
                 <a:spcPct val="130000"/>
               </a:lnSpc>
-              <a:buNone/>
-            </a:pPr>
-            <a:r>
-              <a:rPr lang="en-US" sz="1400" dirty="0">
-                <a:solidFill>
-                  <a:srgbClr val="4A5568"/>
-                </a:solidFill>
-                <a:latin typeface="Calibri" pitchFamily="34" charset="0"/>
-                <a:ea typeface="Calibri" pitchFamily="34" charset="-122"/>
-                <a:cs typeface="Calibri" pitchFamily="34" charset="-120"/>
-              </a:rPr>
-              <a:t>→ Learned Attention Pooling → MLP [256,256] → 动作输出</a:t>
-            </a:r>
-            <a:endParaRPr lang="en-US" sz="1400" dirty="0"/>
-          </a:p>
-          <a:p>
-            <a:pPr indent="0" marL="0">
+            </a:pPr>
+            <a:r>
+              <a:rPr lang="en-US" altLang="zh-CN" sz="1400" dirty="0">
+                <a:solidFill>
+                  <a:srgbClr val="4A5568"/>
+                </a:solidFill>
+                <a:latin typeface="Calibri" pitchFamily="34" charset="0"/>
+                <a:cs typeface="Calibri" pitchFamily="34" charset="-120"/>
+              </a:rPr>
+              <a:t>→ Learned Attention Pooling → MLP [256,256] → </a:t>
+            </a:r>
+            <a:r>
+              <a:rPr lang="en-US" altLang="zh-CN" sz="1400" dirty="0" err="1">
+                <a:solidFill>
+                  <a:srgbClr val="4A5568"/>
+                </a:solidFill>
+                <a:latin typeface="Calibri" pitchFamily="34" charset="0"/>
+                <a:cs typeface="Calibri" pitchFamily="34" charset="-120"/>
+              </a:rPr>
+              <a:t>动作输出</a:t>
+            </a:r>
+            <a:endParaRPr lang="en-US" altLang="zh-CN" sz="1400" dirty="0">
+              <a:solidFill>
+                <a:srgbClr val="4A5568"/>
+              </a:solidFill>
+              <a:latin typeface="Calibri" pitchFamily="34" charset="0"/>
+              <a:cs typeface="Calibri" pitchFamily="34" charset="-120"/>
+            </a:endParaRPr>
+          </a:p>
+          <a:p>
+            <a:pPr>
               <a:lnSpc>
                 <a:spcPct val="130000"/>
               </a:lnSpc>
-              <a:buNone/>
-            </a:pPr>
-            <a:endParaRPr lang="en-US" sz="1400" dirty="0"/>
-          </a:p>
-          <a:p>
-            <a:pPr indent="0" marL="0">
+            </a:pPr>
+            <a:endParaRPr lang="en-US" altLang="zh-CN" sz="1400" dirty="0">
+              <a:solidFill>
+                <a:srgbClr val="4A5568"/>
+              </a:solidFill>
+              <a:latin typeface="Calibri" pitchFamily="34" charset="0"/>
+              <a:cs typeface="Calibri" pitchFamily="34" charset="-120"/>
+            </a:endParaRPr>
+          </a:p>
+          <a:p>
+            <a:pPr>
               <a:lnSpc>
                 <a:spcPct val="130000"/>
               </a:lnSpc>
-              <a:buNone/>
-            </a:pPr>
-            <a:r>
-              <a:rPr lang="en-US" sz="1400" dirty="0">
-                <a:solidFill>
-                  <a:srgbClr val="4A5568"/>
-                </a:solidFill>
-                <a:latin typeface="Calibri" pitchFamily="34" charset="0"/>
-                <a:ea typeface="Calibri" pitchFamily="34" charset="-122"/>
-                <a:cs typeface="Calibri" pitchFamily="34" charset="-120"/>
-              </a:rPr>
-              <a:t>共享策略 (shared_policy) → 置换不变性。同一网络，不同观测 → 注意力自发分化角色。</a:t>
-            </a:r>
-            <a:endParaRPr lang="en-US" sz="1400" dirty="0"/>
-          </a:p>
-        </p:txBody>
-      </p:sp>
-      <p:sp>
-        <p:nvSpPr>
-          <p:cNvPr id="8" name="Text 6"/>
-          <p:cNvSpPr/>
-          <p:nvPr/>
-        </p:nvSpPr>
-        <p:spPr>
-          <a:xfrm>
-            <a:off x="6217920" y="1051560"/>
-            <a:ext cx="5486400" cy="320040"/>
-          </a:xfrm>
-          <a:prstGeom prst="rect">
-            <a:avLst/>
-          </a:prstGeom>
-          <a:noFill/>
-          <a:ln/>
-        </p:spPr>
-        <p:txBody>
-          <a:bodyPr wrap="square" rtlCol="0" anchor="ctr"/>
-          <a:lstStyle/>
-          <a:p>
-            <a:pPr indent="0" marL="0">
-              <a:buNone/>
-            </a:pPr>
-            <a:r>
-              <a:rPr lang="en-US" sz="1800" b="1" dirty="0">
-                <a:solidFill>
-                  <a:srgbClr val="065A82"/>
-                </a:solidFill>
-                <a:latin typeface="Georgia" pitchFamily="34" charset="0"/>
-                <a:ea typeface="Georgia" pitchFamily="34" charset="-122"/>
-                <a:cs typeface="Georgia" pitchFamily="34" charset="-120"/>
-              </a:rPr>
-              <a:t>角色分组注意力矩阵 (Fig 3, 7,858 步/角色)</a:t>
-            </a:r>
-            <a:endParaRPr lang="en-US" sz="1800" dirty="0"/>
-          </a:p>
-        </p:txBody>
-      </p:sp>
-      <p:sp>
-        <p:nvSpPr>
-          <p:cNvPr id="9" name="Shape 7"/>
-          <p:cNvSpPr/>
-          <p:nvPr/>
-        </p:nvSpPr>
-        <p:spPr>
-          <a:xfrm>
-            <a:off x="6217920" y="1600200"/>
-            <a:ext cx="2468880" cy="1188720"/>
-          </a:xfrm>
-          <a:prstGeom prst="roundRect">
-            <a:avLst>
-              <a:gd name="adj" fmla="val 4615"/>
-            </a:avLst>
-          </a:prstGeom>
-          <a:solidFill>
-            <a:srgbClr val="FFFFFF"/>
-          </a:solidFill>
-          <a:ln/>
-          <a:effectLst>
-            <a:outerShdw sx="100000" sy="100000" kx="0" ky="0" algn="bl" rotWithShape="0" blurRad="38100" dist="12700" dir="16200000">
-              <a:srgbClr val="C0D0D8">
-                <a:alpha val="18000"/>
-              </a:srgbClr>
-            </a:outerShdw>
-          </a:effectLst>
-        </p:spPr>
-      </p:sp>
-      <p:sp>
-        <p:nvSpPr>
-          <p:cNvPr id="10" name="Text 8"/>
-          <p:cNvSpPr/>
-          <p:nvPr/>
-        </p:nvSpPr>
-        <p:spPr>
-          <a:xfrm>
-            <a:off x="6217920" y="1673352"/>
-            <a:ext cx="2468880" cy="548640"/>
-          </a:xfrm>
-          <a:prstGeom prst="rect">
-            <a:avLst/>
-          </a:prstGeom>
-          <a:noFill/>
-          <a:ln/>
-        </p:spPr>
-        <p:txBody>
-          <a:bodyPr wrap="square" rtlCol="0" anchor="ctr"/>
-          <a:lstStyle/>
-          <a:p>
-            <a:pPr algn="ctr" indent="0" marL="0">
-              <a:buNone/>
-            </a:pPr>
-            <a:r>
-              <a:rPr lang="en-US" sz="3000" b="1" dirty="0">
-                <a:solidFill>
-                  <a:srgbClr val="F96167"/>
-                </a:solidFill>
-                <a:latin typeface="Georgia" pitchFamily="34" charset="0"/>
-                <a:ea typeface="Georgia" pitchFamily="34" charset="-122"/>
-                <a:cs typeface="Georgia" pitchFamily="34" charset="-120"/>
-              </a:rPr>
-              <a:t>0.450</a:t>
-            </a:r>
-            <a:endParaRPr lang="en-US" sz="3000" dirty="0"/>
-          </a:p>
-        </p:txBody>
-      </p:sp>
-      <p:sp>
-        <p:nvSpPr>
-          <p:cNvPr id="11" name="Text 9"/>
-          <p:cNvSpPr/>
-          <p:nvPr/>
-        </p:nvSpPr>
-        <p:spPr>
-          <a:xfrm>
-            <a:off x="6217920" y="2240280"/>
-            <a:ext cx="2468880" cy="320040"/>
-          </a:xfrm>
-          <a:prstGeom prst="rect">
-            <a:avLst/>
-          </a:prstGeom>
-          <a:noFill/>
-          <a:ln/>
-        </p:spPr>
-        <p:txBody>
-          <a:bodyPr wrap="square" rtlCol="0" anchor="ctr"/>
-          <a:lstStyle/>
-          <a:p>
-            <a:pPr algn="ctr" indent="0" marL="0">
-              <a:lnSpc>
-                <a:spcPct val="110000"/>
-              </a:lnSpc>
-              <a:buNone/>
-            </a:pPr>
-            <a:r>
-              <a:rPr lang="en-US" sz="1300" b="1" dirty="0">
-                <a:solidFill>
-                  <a:srgbClr val="4A5568"/>
-                </a:solidFill>
-                <a:latin typeface="Calibri" pitchFamily="34" charset="0"/>
-                <a:ea typeface="Calibri" pitchFamily="34" charset="-122"/>
-                <a:cs typeface="Calibri" pitchFamily="34" charset="-120"/>
-              </a:rPr>
-              <a:t>Striker MHA</a:t>
-            </a:r>
-            <a:endParaRPr lang="en-US" sz="1300" dirty="0"/>
-          </a:p>
-          <a:p>
-            <a:pPr algn="ctr" indent="0" marL="0">
-              <a:lnSpc>
-                <a:spcPct val="110000"/>
-              </a:lnSpc>
-              <a:buNone/>
-            </a:pPr>
-            <a:r>
-              <a:rPr lang="en-US" sz="1300" b="1" dirty="0">
-                <a:solidFill>
-                  <a:srgbClr val="4A5568"/>
-                </a:solidFill>
-                <a:latin typeface="Calibri" pitchFamily="34" charset="0"/>
-                <a:ea typeface="Calibri" pitchFamily="34" charset="-122"/>
-                <a:cs typeface="Calibri" pitchFamily="34" charset="-120"/>
-              </a:rPr>
-              <a:t>Self-&gt;Mate</a:t>
-            </a:r>
-            <a:endParaRPr lang="en-US" sz="1300" dirty="0"/>
-          </a:p>
-        </p:txBody>
-      </p:sp>
-      <p:sp>
-        <p:nvSpPr>
-          <p:cNvPr id="12" name="Shape 10"/>
-          <p:cNvSpPr/>
-          <p:nvPr/>
-        </p:nvSpPr>
-        <p:spPr>
-          <a:xfrm>
-            <a:off x="8823960" y="1600200"/>
-            <a:ext cx="2468880" cy="1188720"/>
-          </a:xfrm>
-          <a:prstGeom prst="roundRect">
-            <a:avLst>
-              <a:gd name="adj" fmla="val 4615"/>
-            </a:avLst>
-          </a:prstGeom>
-          <a:solidFill>
-            <a:srgbClr val="FFFFFF"/>
-          </a:solidFill>
-          <a:ln/>
-          <a:effectLst>
-            <a:outerShdw sx="100000" sy="100000" kx="0" ky="0" algn="bl" rotWithShape="0" blurRad="38100" dist="12700" dir="16200000">
-              <a:srgbClr val="C0D0D8">
-                <a:alpha val="18000"/>
-              </a:srgbClr>
-            </a:outerShdw>
-          </a:effectLst>
-        </p:spPr>
-      </p:sp>
-      <p:sp>
-        <p:nvSpPr>
-          <p:cNvPr id="13" name="Text 11"/>
-          <p:cNvSpPr/>
-          <p:nvPr/>
-        </p:nvSpPr>
-        <p:spPr>
-          <a:xfrm>
-            <a:off x="8823960" y="1673352"/>
-            <a:ext cx="2468880" cy="548640"/>
-          </a:xfrm>
-          <a:prstGeom prst="rect">
-            <a:avLst/>
-          </a:prstGeom>
-          <a:noFill/>
-          <a:ln/>
-        </p:spPr>
-        <p:txBody>
-          <a:bodyPr wrap="square" rtlCol="0" anchor="ctr"/>
-          <a:lstStyle/>
-          <a:p>
-            <a:pPr algn="ctr" indent="0" marL="0">
-              <a:buNone/>
-            </a:pPr>
-            <a:r>
-              <a:rPr lang="en-US" sz="3000" b="1" dirty="0">
-                <a:solidFill>
-                  <a:srgbClr val="F96167"/>
-                </a:solidFill>
-                <a:latin typeface="Georgia" pitchFamily="34" charset="0"/>
-                <a:ea typeface="Georgia" pitchFamily="34" charset="-122"/>
-                <a:cs typeface="Georgia" pitchFamily="34" charset="-120"/>
-              </a:rPr>
-              <a:t>0.389</a:t>
-            </a:r>
-            <a:endParaRPr lang="en-US" sz="3000" dirty="0"/>
-          </a:p>
-        </p:txBody>
-      </p:sp>
-      <p:sp>
-        <p:nvSpPr>
-          <p:cNvPr id="14" name="Text 12"/>
-          <p:cNvSpPr/>
-          <p:nvPr/>
-        </p:nvSpPr>
-        <p:spPr>
-          <a:xfrm>
-            <a:off x="8823960" y="2240280"/>
-            <a:ext cx="2468880" cy="320040"/>
-          </a:xfrm>
-          <a:prstGeom prst="rect">
-            <a:avLst/>
-          </a:prstGeom>
-          <a:noFill/>
-          <a:ln/>
-        </p:spPr>
-        <p:txBody>
-          <a:bodyPr wrap="square" rtlCol="0" anchor="ctr"/>
-          <a:lstStyle/>
-          <a:p>
-            <a:pPr algn="ctr" indent="0" marL="0">
-              <a:lnSpc>
-                <a:spcPct val="110000"/>
-              </a:lnSpc>
-              <a:buNone/>
-            </a:pPr>
-            <a:r>
-              <a:rPr lang="en-US" sz="1300" b="1" dirty="0">
-                <a:solidFill>
-                  <a:srgbClr val="4A5568"/>
-                </a:solidFill>
-                <a:latin typeface="Calibri" pitchFamily="34" charset="0"/>
-                <a:ea typeface="Calibri" pitchFamily="34" charset="-122"/>
-                <a:cs typeface="Calibri" pitchFamily="34" charset="-120"/>
-              </a:rPr>
-              <a:t>Interceptor MHA</a:t>
-            </a:r>
-            <a:endParaRPr lang="en-US" sz="1300" dirty="0"/>
-          </a:p>
-          <a:p>
-            <a:pPr algn="ctr" indent="0" marL="0">
-              <a:lnSpc>
-                <a:spcPct val="110000"/>
-              </a:lnSpc>
-              <a:buNone/>
-            </a:pPr>
-            <a:r>
-              <a:rPr lang="en-US" sz="1300" b="1" dirty="0">
-                <a:solidFill>
-                  <a:srgbClr val="4A5568"/>
-                </a:solidFill>
-                <a:latin typeface="Calibri" pitchFamily="34" charset="0"/>
-                <a:ea typeface="Calibri" pitchFamily="34" charset="-122"/>
-                <a:cs typeface="Calibri" pitchFamily="34" charset="-120"/>
-              </a:rPr>
-              <a:t>Self-&gt;Target</a:t>
-            </a:r>
-            <a:endParaRPr lang="en-US" sz="1300" dirty="0"/>
-          </a:p>
-        </p:txBody>
-      </p:sp>
-      <p:sp>
-        <p:nvSpPr>
-          <p:cNvPr id="15" name="Shape 13"/>
-          <p:cNvSpPr/>
-          <p:nvPr/>
-        </p:nvSpPr>
-        <p:spPr>
-          <a:xfrm>
-            <a:off x="11430000" y="1600200"/>
-            <a:ext cx="2468880" cy="1188720"/>
-          </a:xfrm>
-          <a:prstGeom prst="roundRect">
-            <a:avLst>
-              <a:gd name="adj" fmla="val 4615"/>
-            </a:avLst>
-          </a:prstGeom>
-          <a:solidFill>
-            <a:srgbClr val="FFFFFF"/>
-          </a:solidFill>
-          <a:ln/>
-          <a:effectLst>
-            <a:outerShdw sx="100000" sy="100000" kx="0" ky="0" algn="bl" rotWithShape="0" blurRad="38100" dist="12700" dir="16200000">
-              <a:srgbClr val="C0D0D8">
-                <a:alpha val="18000"/>
-              </a:srgbClr>
-            </a:outerShdw>
-          </a:effectLst>
-        </p:spPr>
-      </p:sp>
-      <p:sp>
-        <p:nvSpPr>
-          <p:cNvPr id="16" name="Text 14"/>
-          <p:cNvSpPr/>
-          <p:nvPr/>
-        </p:nvSpPr>
-        <p:spPr>
-          <a:xfrm>
-            <a:off x="11430000" y="1673352"/>
-            <a:ext cx="2468880" cy="548640"/>
-          </a:xfrm>
-          <a:prstGeom prst="rect">
-            <a:avLst/>
-          </a:prstGeom>
-          <a:noFill/>
-          <a:ln/>
-        </p:spPr>
-        <p:txBody>
-          <a:bodyPr wrap="square" rtlCol="0" anchor="ctr"/>
-          <a:lstStyle/>
-          <a:p>
-            <a:pPr algn="ctr" indent="0" marL="0">
-              <a:buNone/>
-            </a:pPr>
-            <a:r>
-              <a:rPr lang="en-US" sz="3000" b="1" dirty="0">
-                <a:solidFill>
-                  <a:srgbClr val="F96167"/>
-                </a:solidFill>
-                <a:latin typeface="Georgia" pitchFamily="34" charset="0"/>
-                <a:ea typeface="Georgia" pitchFamily="34" charset="-122"/>
-                <a:cs typeface="Georgia" pitchFamily="34" charset="-120"/>
-              </a:rPr>
-              <a:t>-0.53</a:t>
-            </a:r>
-            <a:endParaRPr lang="en-US" sz="3000" dirty="0"/>
-          </a:p>
-        </p:txBody>
-      </p:sp>
-      <p:sp>
-        <p:nvSpPr>
-          <p:cNvPr id="17" name="Text 15"/>
-          <p:cNvSpPr/>
-          <p:nvPr/>
-        </p:nvSpPr>
-        <p:spPr>
-          <a:xfrm>
-            <a:off x="11430000" y="2240280"/>
-            <a:ext cx="2468880" cy="320040"/>
-          </a:xfrm>
-          <a:prstGeom prst="rect">
-            <a:avLst/>
-          </a:prstGeom>
-          <a:noFill/>
-          <a:ln/>
-        </p:spPr>
-        <p:txBody>
-          <a:bodyPr wrap="square" rtlCol="0" anchor="ctr"/>
-          <a:lstStyle/>
-          <a:p>
-            <a:pPr algn="ctr" indent="0" marL="0">
-              <a:lnSpc>
-                <a:spcPct val="110000"/>
-              </a:lnSpc>
-              <a:buNone/>
-            </a:pPr>
-            <a:r>
-              <a:rPr lang="en-US" sz="1300" b="1" dirty="0">
-                <a:solidFill>
-                  <a:srgbClr val="4A5568"/>
-                </a:solidFill>
-                <a:latin typeface="Calibri" pitchFamily="34" charset="0"/>
-                <a:ea typeface="Calibri" pitchFamily="34" charset="-122"/>
-                <a:cs typeface="Calibri" pitchFamily="34" charset="-120"/>
-              </a:rPr>
-              <a:t>Cohen's d</a:t>
-            </a:r>
-            <a:endParaRPr lang="en-US" sz="1300" dirty="0"/>
-          </a:p>
-          <a:p>
-            <a:pPr algn="ctr" indent="0" marL="0">
-              <a:lnSpc>
-                <a:spcPct val="110000"/>
-              </a:lnSpc>
-              <a:buNone/>
-            </a:pPr>
-            <a:r>
-              <a:rPr lang="en-US" sz="1300" b="1" dirty="0">
-                <a:solidFill>
-                  <a:srgbClr val="4A5568"/>
-                </a:solidFill>
-                <a:latin typeface="Calibri" pitchFamily="34" charset="0"/>
-                <a:ea typeface="Calibri" pitchFamily="34" charset="-122"/>
-                <a:cs typeface="Calibri" pitchFamily="34" charset="-120"/>
-              </a:rPr>
-              <a:t>(大效应量)</a:t>
-            </a:r>
-            <a:endParaRPr lang="en-US" sz="1300" dirty="0"/>
-          </a:p>
-        </p:txBody>
-      </p:sp>
-      <p:sp>
-        <p:nvSpPr>
-          <p:cNvPr id="18" name="Shape 16"/>
-          <p:cNvSpPr/>
-          <p:nvPr/>
-        </p:nvSpPr>
-        <p:spPr>
-          <a:xfrm>
-            <a:off x="14036040" y="1600200"/>
-            <a:ext cx="2468880" cy="1188720"/>
-          </a:xfrm>
-          <a:prstGeom prst="roundRect">
-            <a:avLst>
-              <a:gd name="adj" fmla="val 4615"/>
-            </a:avLst>
-          </a:prstGeom>
-          <a:solidFill>
-            <a:srgbClr val="FFFFFF"/>
-          </a:solidFill>
-          <a:ln/>
-          <a:effectLst>
-            <a:outerShdw sx="100000" sy="100000" kx="0" ky="0" algn="bl" rotWithShape="0" blurRad="38100" dist="12700" dir="16200000">
-              <a:srgbClr val="C0D0D8">
-                <a:alpha val="18000"/>
-              </a:srgbClr>
-            </a:outerShdw>
-          </a:effectLst>
-        </p:spPr>
-      </p:sp>
-      <p:sp>
-        <p:nvSpPr>
-          <p:cNvPr id="19" name="Text 17"/>
-          <p:cNvSpPr/>
-          <p:nvPr/>
-        </p:nvSpPr>
-        <p:spPr>
-          <a:xfrm>
-            <a:off x="14036040" y="1673352"/>
-            <a:ext cx="2468880" cy="548640"/>
-          </a:xfrm>
-          <a:prstGeom prst="rect">
-            <a:avLst/>
-          </a:prstGeom>
-          <a:noFill/>
-          <a:ln/>
-        </p:spPr>
-        <p:txBody>
-          <a:bodyPr wrap="square" rtlCol="0" anchor="ctr"/>
-          <a:lstStyle/>
-          <a:p>
-            <a:pPr algn="ctr" indent="0" marL="0">
-              <a:buNone/>
-            </a:pPr>
-            <a:r>
-              <a:rPr lang="en-US" sz="3000" b="1" dirty="0">
-                <a:solidFill>
-                  <a:srgbClr val="F96167"/>
-                </a:solidFill>
-                <a:latin typeface="Georgia" pitchFamily="34" charset="0"/>
-                <a:ea typeface="Georgia" pitchFamily="34" charset="-122"/>
-                <a:cs typeface="Georgia" pitchFamily="34" charset="-120"/>
-              </a:rPr>
-              <a:t>0.44</a:t>
-            </a:r>
-            <a:endParaRPr lang="en-US" sz="3000" dirty="0"/>
-          </a:p>
-        </p:txBody>
-      </p:sp>
-      <p:sp>
-        <p:nvSpPr>
-          <p:cNvPr id="20" name="Text 18"/>
-          <p:cNvSpPr/>
-          <p:nvPr/>
-        </p:nvSpPr>
-        <p:spPr>
-          <a:xfrm>
-            <a:off x="14036040" y="2240280"/>
-            <a:ext cx="2468880" cy="320040"/>
-          </a:xfrm>
-          <a:prstGeom prst="rect">
-            <a:avLst/>
-          </a:prstGeom>
-          <a:noFill/>
-          <a:ln/>
-        </p:spPr>
-        <p:txBody>
-          <a:bodyPr wrap="square" rtlCol="0" anchor="ctr"/>
-          <a:lstStyle/>
-          <a:p>
-            <a:pPr algn="ctr" indent="0" marL="0">
-              <a:lnSpc>
-                <a:spcPct val="110000"/>
-              </a:lnSpc>
-              <a:buNone/>
-            </a:pPr>
-            <a:r>
-              <a:rPr lang="en-US" sz="1300" b="1" dirty="0">
-                <a:solidFill>
-                  <a:srgbClr val="4A5568"/>
-                </a:solidFill>
-                <a:latin typeface="Calibri" pitchFamily="34" charset="0"/>
-                <a:ea typeface="Calibri" pitchFamily="34" charset="-122"/>
-                <a:cs typeface="Calibri" pitchFamily="34" charset="-120"/>
-              </a:rPr>
-              <a:t>双向 Mate</a:t>
-            </a:r>
-            <a:endParaRPr lang="en-US" sz="1300" dirty="0"/>
-          </a:p>
-          <a:p>
-            <a:pPr algn="ctr" indent="0" marL="0">
-              <a:lnSpc>
-                <a:spcPct val="110000"/>
-              </a:lnSpc>
-              <a:buNone/>
-            </a:pPr>
-            <a:r>
-              <a:rPr lang="en-US" sz="1300" b="1" dirty="0">
-                <a:solidFill>
-                  <a:srgbClr val="4A5568"/>
-                </a:solidFill>
-                <a:latin typeface="Calibri" pitchFamily="34" charset="0"/>
-                <a:ea typeface="Calibri" pitchFamily="34" charset="-122"/>
-                <a:cs typeface="Calibri" pitchFamily="34" charset="-120"/>
-              </a:rPr>
-              <a:t>持续关注</a:t>
-            </a:r>
-            <a:endParaRPr lang="en-US" sz="1300" dirty="0"/>
-          </a:p>
-        </p:txBody>
-      </p:sp>
-      <p:sp>
-        <p:nvSpPr>
-          <p:cNvPr id="21" name="Text 19"/>
-          <p:cNvSpPr/>
-          <p:nvPr/>
-        </p:nvSpPr>
-        <p:spPr>
-          <a:xfrm>
-            <a:off x="6217920" y="3017520"/>
-            <a:ext cx="5486400" cy="457200"/>
-          </a:xfrm>
-          <a:prstGeom prst="rect">
-            <a:avLst/>
-          </a:prstGeom>
-          <a:noFill/>
-          <a:ln/>
-        </p:spPr>
-        <p:txBody>
-          <a:bodyPr wrap="square" rtlCol="0" anchor="ctr"/>
-          <a:lstStyle/>
-          <a:p>
-            <a:pPr indent="0" marL="0">
-              <a:buNone/>
-            </a:pPr>
-            <a:r>
-              <a:rPr lang="en-US" sz="1200" i="1" dirty="0">
-                <a:solidFill>
-                  <a:srgbClr val="4A5568"/>
-                </a:solidFill>
-                <a:latin typeface="Calibri" pitchFamily="34" charset="0"/>
-                <a:ea typeface="Calibri" pitchFamily="34" charset="-122"/>
-                <a:cs typeface="Calibri" pitchFamily="34" charset="-120"/>
-              </a:rPr>
-              <a:t>双机 MHA Self-&gt;Mate 均 ~0.44 — 持续性隐式协调, 非二元切换 — 参数共享网络自发打破对称性的数学铁证。</a:t>
-            </a:r>
-            <a:endParaRPr lang="en-US" sz="1200" dirty="0"/>
-          </a:p>
-        </p:txBody>
-      </p:sp>
-      <p:pic>
-        <p:nvPicPr>
-          <p:cNvPr id="22" name="Image 0" descr="results/viz/fig3_role_attention_matrix.png">    </p:cNvPr>
-          <p:cNvPicPr>
-            <a:picLocks noChangeAspect="1"/>
-          </p:cNvPicPr>
-          <p:nvPr/>
-        </p:nvPicPr>
-        <p:blipFill>
-          <a:blip r:embed="rId1"/>
-          <a:srcRect l="0" r="0" t="0" b="0"/>
-          <a:stretch/>
-        </p:blipFill>
-        <p:spPr>
-          <a:xfrm>
-            <a:off x="6217920" y="3566160"/>
-            <a:ext cx="5486400" cy="2926080"/>
-          </a:xfrm>
-          <a:prstGeom prst="rect">
-            <a:avLst/>
-          </a:prstGeom>
-        </p:spPr>
-      </p:pic>
+            </a:pPr>
+            <a:r>
+              <a:rPr lang="en-US" altLang="zh-CN" sz="1400" dirty="0" err="1">
+                <a:solidFill>
+                  <a:srgbClr val="4A5568"/>
+                </a:solidFill>
+                <a:latin typeface="Calibri" pitchFamily="34" charset="0"/>
+                <a:cs typeface="Calibri" pitchFamily="34" charset="-120"/>
+              </a:rPr>
+              <a:t>共享策略</a:t>
+            </a:r>
+            <a:r>
+              <a:rPr lang="en-US" altLang="zh-CN" sz="1400" dirty="0">
+                <a:solidFill>
+                  <a:srgbClr val="4A5568"/>
+                </a:solidFill>
+                <a:latin typeface="Calibri" pitchFamily="34" charset="0"/>
+                <a:cs typeface="Calibri" pitchFamily="34" charset="-120"/>
+              </a:rPr>
+              <a:t> (</a:t>
+            </a:r>
+            <a:r>
+              <a:rPr lang="en-US" altLang="zh-CN" sz="1400" dirty="0" err="1">
+                <a:solidFill>
+                  <a:srgbClr val="4A5568"/>
+                </a:solidFill>
+                <a:latin typeface="Calibri" pitchFamily="34" charset="0"/>
+                <a:cs typeface="Calibri" pitchFamily="34" charset="-120"/>
+              </a:rPr>
+              <a:t>shared_policy</a:t>
+            </a:r>
+            <a:r>
+              <a:rPr lang="en-US" altLang="zh-CN" sz="1400" dirty="0">
+                <a:solidFill>
+                  <a:srgbClr val="4A5568"/>
+                </a:solidFill>
+                <a:latin typeface="Calibri" pitchFamily="34" charset="0"/>
+                <a:cs typeface="Calibri" pitchFamily="34" charset="-120"/>
+              </a:rPr>
+              <a:t>) → </a:t>
+            </a:r>
+            <a:r>
+              <a:rPr lang="en-US" altLang="zh-CN" sz="1400" dirty="0" err="1">
+                <a:solidFill>
+                  <a:srgbClr val="4A5568"/>
+                </a:solidFill>
+                <a:latin typeface="Calibri" pitchFamily="34" charset="0"/>
+                <a:cs typeface="Calibri" pitchFamily="34" charset="-120"/>
+              </a:rPr>
+              <a:t>置换不变性。同一网络，不同观测</a:t>
+            </a:r>
+            <a:r>
+              <a:rPr lang="en-US" altLang="zh-CN" sz="1400" dirty="0">
+                <a:solidFill>
+                  <a:srgbClr val="4A5568"/>
+                </a:solidFill>
+                <a:latin typeface="Calibri" pitchFamily="34" charset="0"/>
+                <a:cs typeface="Calibri" pitchFamily="34" charset="-120"/>
+              </a:rPr>
+              <a:t> → </a:t>
+            </a:r>
+            <a:r>
+              <a:rPr lang="en-US" altLang="zh-CN" sz="1400" dirty="0" err="1">
+                <a:solidFill>
+                  <a:srgbClr val="4A5568"/>
+                </a:solidFill>
+                <a:latin typeface="Calibri" pitchFamily="34" charset="0"/>
+                <a:cs typeface="Calibri" pitchFamily="34" charset="-120"/>
+              </a:rPr>
+              <a:t>注意力自发分化角色</a:t>
+            </a:r>
+            <a:r>
+              <a:rPr lang="en-US" altLang="zh-CN" sz="1400" dirty="0">
+                <a:solidFill>
+                  <a:srgbClr val="4A5568"/>
+                </a:solidFill>
+                <a:latin typeface="Calibri" pitchFamily="34" charset="0"/>
+                <a:cs typeface="Calibri" pitchFamily="34" charset="-120"/>
+              </a:rPr>
+              <a:t>。</a:t>
+            </a:r>
+          </a:p>
+        </p:txBody>
+      </p:sp>
     </p:spTree>
   </p:cSld>
   <p:clrMapOvr>
@@ -6079,7 +6410,7 @@
 </p:sld>
 </file>
 
-<file path=ppt/slides/slide4.xml><?xml version="1.0" encoding="utf-8"?>
+<file path=ppt/slides/slide5.xml><?xml version="1.0" encoding="utf-8"?>
 <p:sld xmlns:a="http://schemas.openxmlformats.org/drawingml/2006/main" xmlns:r="http://schemas.openxmlformats.org/officeDocument/2006/relationships" xmlns:p="http://schemas.openxmlformats.org/presentationml/2006/main">
   <p:cSld name="Slide 4">
     <p:bg>
@@ -6087,6 +6418,7 @@
         <a:solidFill>
           <a:srgbClr val="FFFFFF"/>
         </a:solidFill>
+        <a:effectLst/>
       </p:bgPr>
     </p:bg>
     <p:spTree>
@@ -6144,7 +6476,7 @@
           <a:bodyPr wrap="square" lIns="0" tIns="0" rIns="0" bIns="0" rtlCol="0" anchor="ctr"/>
           <a:lstStyle/>
           <a:p>
-            <a:pPr indent="0" marL="0">
+            <a:pPr marL="0" indent="0">
               <a:buNone/>
             </a:pPr>
             <a:r>
@@ -6183,7 +6515,7 @@
           <a:bodyPr wrap="square" rtlCol="0" anchor="ctr"/>
           <a:lstStyle/>
           <a:p>
-            <a:pPr indent="0" marL="0">
+            <a:pPr marL="0" indent="0">
               <a:buNone/>
             </a:pPr>
             <a:r>
@@ -6195,7 +6527,29 @@
                 <a:ea typeface="Georgia" pitchFamily="34" charset="-122"/>
                 <a:cs typeface="Georgia" pitchFamily="34" charset="-120"/>
               </a:rPr>
-              <a:t>架构重构 B: 离散战术基元 + Action Masking</a:t>
+              <a:t>架构重构 B: </a:t>
+            </a:r>
+            <a:r>
+              <a:rPr lang="zh-CN" altLang="en-US" sz="3000" b="1" dirty="0">
+                <a:solidFill>
+                  <a:srgbClr val="065A82"/>
+                </a:solidFill>
+                <a:latin typeface="Georgia" pitchFamily="34" charset="0"/>
+                <a:ea typeface="Georgia" pitchFamily="34" charset="-122"/>
+                <a:cs typeface="Georgia" pitchFamily="34" charset="-120"/>
+              </a:rPr>
+              <a:t>离散动作空间</a:t>
+            </a:r>
+            <a:r>
+              <a:rPr lang="en-US" sz="3000" b="1" dirty="0">
+                <a:solidFill>
+                  <a:srgbClr val="065A82"/>
+                </a:solidFill>
+                <a:latin typeface="Georgia" pitchFamily="34" charset="0"/>
+                <a:ea typeface="Georgia" pitchFamily="34" charset="-122"/>
+                <a:cs typeface="Georgia" pitchFamily="34" charset="-120"/>
+              </a:rPr>
+              <a:t> + Action Masking</a:t>
             </a:r>
             <a:endParaRPr lang="en-US" sz="3000" dirty="0"/>
           </a:p>
@@ -6242,7 +6596,7 @@
           <a:bodyPr wrap="square" rtlCol="0" anchor="ctr"/>
           <a:lstStyle/>
           <a:p>
-            <a:pPr indent="0" marL="0">
+            <a:pPr marL="0" indent="0">
               <a:buNone/>
             </a:pPr>
             <a:r>
@@ -6268,7 +6622,7 @@
         </p:nvSpPr>
         <p:spPr>
           <a:xfrm>
-            <a:off x="365760" y="1463040"/>
+            <a:off x="420624" y="1563624"/>
             <a:ext cx="5303520" cy="2926080"/>
           </a:xfrm>
           <a:prstGeom prst="rect">
@@ -6281,7 +6635,7 @@
           <a:bodyPr wrap="square" rtlCol="0" anchor="ctr"/>
           <a:lstStyle/>
           <a:p>
-            <a:pPr indent="0" marL="0">
+            <a:pPr marL="0" indent="0">
               <a:lnSpc>
                 <a:spcPct val="135000"/>
               </a:lnSpc>
@@ -6301,7 +6655,7 @@
             <a:endParaRPr lang="en-US" sz="1400" dirty="0"/>
           </a:p>
           <a:p>
-            <a:pPr indent="0" marL="0">
+            <a:pPr marL="0" indent="0">
               <a:lnSpc>
                 <a:spcPct val="135000"/>
               </a:lnSpc>
@@ -6321,7 +6675,7 @@
             <a:endParaRPr lang="en-US" sz="1400" dirty="0"/>
           </a:p>
           <a:p>
-            <a:pPr indent="0" marL="0">
+            <a:pPr marL="0" indent="0">
               <a:lnSpc>
                 <a:spcPct val="135000"/>
               </a:lnSpc>
@@ -6341,7 +6695,7 @@
             <a:endParaRPr lang="en-US" sz="1400" dirty="0"/>
           </a:p>
           <a:p>
-            <a:pPr indent="0" marL="0">
+            <a:pPr marL="0" indent="0">
               <a:lnSpc>
                 <a:spcPct val="135000"/>
               </a:lnSpc>
@@ -6350,7 +6704,7 @@
             <a:endParaRPr lang="en-US" sz="1400" dirty="0"/>
           </a:p>
           <a:p>
-            <a:pPr indent="0" marL="0">
+            <a:pPr marL="0" indent="0">
               <a:lnSpc>
                 <a:spcPct val="135000"/>
               </a:lnSpc>
@@ -6365,12 +6719,34 @@
                 <a:ea typeface="Calibri" pitchFamily="34" charset="-122"/>
                 <a:cs typeface="Calibri" pitchFamily="34" charset="-120"/>
               </a:rPr>
-              <a:t>MultiDiscrete([5,3]) = 15 个有界战术基元</a:t>
+              <a:t>MultiDiscrete([5,3]) = 15 </a:t>
+            </a:r>
+            <a:r>
+              <a:rPr lang="en-US" sz="1400" dirty="0" err="1">
+                <a:solidFill>
+                  <a:srgbClr val="4A5568"/>
+                </a:solidFill>
+                <a:latin typeface="Calibri" pitchFamily="34" charset="0"/>
+                <a:ea typeface="Calibri" pitchFamily="34" charset="-122"/>
+                <a:cs typeface="Calibri" pitchFamily="34" charset="-120"/>
+              </a:rPr>
+              <a:t>个有界战术</a:t>
+            </a:r>
+            <a:r>
+              <a:rPr lang="zh-CN" altLang="en-US" sz="1400" dirty="0">
+                <a:solidFill>
+                  <a:srgbClr val="4A5568"/>
+                </a:solidFill>
+                <a:latin typeface="Calibri" pitchFamily="34" charset="0"/>
+                <a:ea typeface="Calibri" pitchFamily="34" charset="-122"/>
+                <a:cs typeface="Calibri" pitchFamily="34" charset="-120"/>
+              </a:rPr>
+              <a:t>动作</a:t>
             </a:r>
             <a:endParaRPr lang="en-US" sz="1400" dirty="0"/>
           </a:p>
           <a:p>
-            <a:pPr indent="0" marL="0">
+            <a:pPr marL="0" indent="0">
               <a:lnSpc>
                 <a:spcPct val="135000"/>
               </a:lnSpc>
@@ -6385,26 +6761,6 @@
                 <a:ea typeface="Calibri" pitchFamily="34" charset="-122"/>
                 <a:cs typeface="Calibri" pitchFamily="34" charset="-120"/>
               </a:rPr>
-              <a:t>熵理论上限 ln(5)+ln(3) = 2.71 — 硬性约束探索</a:t>
-            </a:r>
-            <a:endParaRPr lang="en-US" sz="1400" dirty="0"/>
-          </a:p>
-          <a:p>
-            <a:pPr indent="0" marL="0">
-              <a:lnSpc>
-                <a:spcPct val="135000"/>
-              </a:lnSpc>
-              <a:buNone/>
-            </a:pPr>
-            <a:r>
-              <a:rPr lang="en-US" sz="1400" dirty="0">
-                <a:solidFill>
-                  <a:srgbClr val="4A5568"/>
-                </a:solidFill>
-                <a:latin typeface="Calibri" pitchFamily="34" charset="0"/>
-                <a:ea typeface="Calibri" pitchFamily="34" charset="-122"/>
-                <a:cs typeface="Calibri" pitchFamily="34" charset="-120"/>
-              </a:rPr>
               <a:t>Action Masking: 失速禁慢速, 近地禁转向, 超速禁加力</a:t>
             </a:r>
             <a:endParaRPr lang="en-US" sz="1400" dirty="0"/>
@@ -6432,7 +6788,7 @@
           <a:bodyPr wrap="square" rtlCol="0" anchor="ctr"/>
           <a:lstStyle/>
           <a:p>
-            <a:pPr indent="0" marL="0">
+            <a:pPr marL="0" indent="0">
               <a:buNone/>
             </a:pPr>
             <a:r>
@@ -6444,7 +6800,18 @@
                 <a:ea typeface="Georgia" pitchFamily="34" charset="-122"/>
                 <a:cs typeface="Georgia" pitchFamily="34" charset="-120"/>
               </a:rPr>
-              <a:t>MultiDiscrete([5, 3]) = 15 战术基元</a:t>
+              <a:t>MultiDiscrete([5, 3]) = 15 </a:t>
+            </a:r>
+            <a:r>
+              <a:rPr lang="zh-CN" altLang="en-US" b="1" dirty="0">
+                <a:solidFill>
+                  <a:srgbClr val="065A82"/>
+                </a:solidFill>
+                <a:latin typeface="Georgia" pitchFamily="34" charset="0"/>
+                <a:ea typeface="Georgia" pitchFamily="34" charset="-122"/>
+                <a:cs typeface="Georgia" pitchFamily="34" charset="-120"/>
+              </a:rPr>
+              <a:t>动作空间</a:t>
             </a:r>
             <a:endParaRPr lang="en-US" sz="1800" dirty="0"/>
           </a:p>
@@ -6471,7 +6838,7 @@
           <a:bodyPr wrap="square" rtlCol="0" anchor="ctr"/>
           <a:lstStyle/>
           <a:p>
-            <a:pPr indent="0" marL="0">
+            <a:pPr marL="0" indent="0">
               <a:buNone/>
             </a:pPr>
             <a:r>
@@ -6532,7 +6899,7 @@
           <a:bodyPr wrap="square" rtlCol="0" anchor="ctr"/>
           <a:lstStyle/>
           <a:p>
-            <a:pPr indent="0" marL="0">
+            <a:pPr marL="0" indent="0">
               <a:buNone/>
             </a:pPr>
             <a:r>
@@ -6571,7 +6938,7 @@
           <a:bodyPr wrap="square" rtlCol="0" anchor="ctr"/>
           <a:lstStyle/>
           <a:p>
-            <a:pPr indent="0" marL="0">
+            <a:pPr marL="0" indent="0">
               <a:buNone/>
             </a:pPr>
             <a:r>
@@ -6632,7 +6999,7 @@
           <a:bodyPr wrap="square" rtlCol="0" anchor="ctr"/>
           <a:lstStyle/>
           <a:p>
-            <a:pPr indent="0" marL="0">
+            <a:pPr marL="0" indent="0">
               <a:buNone/>
             </a:pPr>
             <a:r>
@@ -6671,7 +7038,7 @@
           <a:bodyPr wrap="square" rtlCol="0" anchor="ctr"/>
           <a:lstStyle/>
           <a:p>
-            <a:pPr indent="0" marL="0">
+            <a:pPr marL="0" indent="0">
               <a:buNone/>
             </a:pPr>
             <a:r>
@@ -6732,7 +7099,7 @@
           <a:bodyPr wrap="square" rtlCol="0" anchor="ctr"/>
           <a:lstStyle/>
           <a:p>
-            <a:pPr indent="0" marL="0">
+            <a:pPr marL="0" indent="0">
               <a:buNone/>
             </a:pPr>
             <a:r>
@@ -6771,7 +7138,7 @@
           <a:bodyPr wrap="square" rtlCol="0" anchor="ctr"/>
           <a:lstStyle/>
           <a:p>
-            <a:pPr indent="0" marL="0">
+            <a:pPr marL="0" indent="0">
               <a:buNone/>
             </a:pPr>
             <a:r>
@@ -6832,7 +7199,7 @@
           <a:bodyPr wrap="square" rtlCol="0" anchor="ctr"/>
           <a:lstStyle/>
           <a:p>
-            <a:pPr indent="0" marL="0">
+            <a:pPr marL="0" indent="0">
               <a:buNone/>
             </a:pPr>
             <a:r>
@@ -6871,7 +7238,7 @@
           <a:bodyPr wrap="square" rtlCol="0" anchor="ctr"/>
           <a:lstStyle/>
           <a:p>
-            <a:pPr indent="0" marL="0">
+            <a:pPr marL="0" indent="0">
               <a:buNone/>
             </a:pPr>
             <a:r>
@@ -6932,7 +7299,7 @@
           <a:bodyPr wrap="square" rtlCol="0" anchor="ctr"/>
           <a:lstStyle/>
           <a:p>
-            <a:pPr indent="0" marL="0">
+            <a:pPr marL="0" indent="0">
               <a:buNone/>
             </a:pPr>
             <a:r>
@@ -6971,7 +7338,7 @@
           <a:bodyPr wrap="square" rtlCol="0" anchor="ctr"/>
           <a:lstStyle/>
           <a:p>
-            <a:pPr indent="0" marL="0">
+            <a:pPr marL="0" indent="0">
               <a:buNone/>
             </a:pPr>
             <a:r>
@@ -7010,7 +7377,7 @@
           <a:bodyPr wrap="square" rtlCol="0" anchor="ctr"/>
           <a:lstStyle/>
           <a:p>
-            <a:pPr indent="0" marL="0">
+            <a:pPr marL="0" indent="0">
               <a:buNone/>
             </a:pPr>
             <a:r>
@@ -7071,7 +7438,7 @@
           <a:bodyPr wrap="square" rtlCol="0" anchor="ctr"/>
           <a:lstStyle/>
           <a:p>
-            <a:pPr indent="0" marL="0">
+            <a:pPr marL="0" indent="0">
               <a:buNone/>
             </a:pPr>
             <a:r>
@@ -7110,7 +7477,7 @@
           <a:bodyPr wrap="square" rtlCol="0" anchor="ctr"/>
           <a:lstStyle/>
           <a:p>
-            <a:pPr indent="0" marL="0">
+            <a:pPr marL="0" indent="0">
               <a:buNone/>
             </a:pPr>
             <a:r>
@@ -7171,7 +7538,7 @@
           <a:bodyPr wrap="square" rtlCol="0" anchor="ctr"/>
           <a:lstStyle/>
           <a:p>
-            <a:pPr indent="0" marL="0">
+            <a:pPr marL="0" indent="0">
               <a:buNone/>
             </a:pPr>
             <a:r>
@@ -7210,7 +7577,7 @@
           <a:bodyPr wrap="square" rtlCol="0" anchor="ctr"/>
           <a:lstStyle/>
           <a:p>
-            <a:pPr indent="0" marL="0">
+            <a:pPr marL="0" indent="0">
               <a:buNone/>
             </a:pPr>
             <a:r>
@@ -7271,7 +7638,7 @@
           <a:bodyPr wrap="square" rtlCol="0" anchor="ctr"/>
           <a:lstStyle/>
           <a:p>
-            <a:pPr indent="0" marL="0">
+            <a:pPr marL="0" indent="0">
               <a:buNone/>
             </a:pPr>
             <a:r>
@@ -7310,7 +7677,7 @@
           <a:bodyPr wrap="square" rtlCol="0" anchor="ctr"/>
           <a:lstStyle/>
           <a:p>
-            <a:pPr indent="0" marL="0">
+            <a:pPr marL="0" indent="0">
               <a:buNone/>
             </a:pPr>
             <a:r>
@@ -7336,7 +7703,7 @@
 </p:sld>
 </file>
 
-<file path=ppt/slides/slide5.xml><?xml version="1.0" encoding="utf-8"?>
+<file path=ppt/slides/slide6.xml><?xml version="1.0" encoding="utf-8"?>
 <p:sld xmlns:a="http://schemas.openxmlformats.org/drawingml/2006/main" xmlns:r="http://schemas.openxmlformats.org/officeDocument/2006/relationships" xmlns:p="http://schemas.openxmlformats.org/presentationml/2006/main">
   <p:cSld name="Slide 5">
     <p:bg>
@@ -7344,6 +7711,7 @@
         <a:solidFill>
           <a:srgbClr val="FFFFFF"/>
         </a:solidFill>
+        <a:effectLst/>
       </p:bgPr>
     </p:bg>
     <p:spTree>
@@ -7401,7 +7769,7 @@
           <a:bodyPr wrap="square" lIns="0" tIns="0" rIns="0" bIns="0" rtlCol="0" anchor="ctr"/>
           <a:lstStyle/>
           <a:p>
-            <a:pPr indent="0" marL="0">
+            <a:pPr marL="0" indent="0">
               <a:buNone/>
             </a:pPr>
             <a:r>
@@ -7440,7 +7808,7 @@
           <a:bodyPr wrap="square" rtlCol="0" anchor="ctr"/>
           <a:lstStyle/>
           <a:p>
-            <a:pPr indent="0" marL="0">
+            <a:pPr marL="0" indent="0">
               <a:buNone/>
             </a:pPr>
             <a:r>
@@ -7480,20 +7848,20 @@
       </p:sp>
       <p:pic>
         <p:nvPicPr>
-          <p:cNvPr id="6" name="Image 0" descr="results/viz/paper_charts/chart1_action_distribution.png">    </p:cNvPr>
+          <p:cNvPr id="6" name="Image 0" descr="results/viz/paper_charts/chart1_action_distribution.png"/>
           <p:cNvPicPr>
             <a:picLocks noChangeAspect="1"/>
           </p:cNvPicPr>
           <p:nvPr/>
         </p:nvPicPr>
         <p:blipFill>
-          <a:blip r:embed="rId1"/>
-          <a:srcRect l="0" r="0" t="0" b="0"/>
+          <a:blip r:embed="rId3"/>
+          <a:srcRect/>
           <a:stretch/>
         </p:blipFill>
         <p:spPr>
           <a:xfrm>
-            <a:off x="228600" y="1051560"/>
+            <a:off x="228600" y="833933"/>
             <a:ext cx="11704320" cy="5486400"/>
           </a:xfrm>
           <a:prstGeom prst="rect">
@@ -7522,7 +7890,7 @@
           <a:bodyPr wrap="square" rtlCol="0" anchor="ctr"/>
           <a:lstStyle/>
           <a:p>
-            <a:pPr indent="0" marL="0">
+            <a:pPr marL="0" indent="0">
               <a:buNone/>
             </a:pPr>
             <a:r>
@@ -7548,7 +7916,7 @@
 </p:sld>
 </file>
 
-<file path=ppt/slides/slide6.xml><?xml version="1.0" encoding="utf-8"?>
+<file path=ppt/slides/slide7.xml><?xml version="1.0" encoding="utf-8"?>
 <p:sld xmlns:a="http://schemas.openxmlformats.org/drawingml/2006/main" xmlns:r="http://schemas.openxmlformats.org/officeDocument/2006/relationships" xmlns:p="http://schemas.openxmlformats.org/presentationml/2006/main">
   <p:cSld name="Slide 6">
     <p:bg>
@@ -7556,6 +7924,7 @@
         <a:solidFill>
           <a:srgbClr val="FFFFFF"/>
         </a:solidFill>
+        <a:effectLst/>
       </p:bgPr>
     </p:bg>
     <p:spTree>
@@ -7613,7 +7982,7 @@
           <a:bodyPr wrap="square" lIns="0" tIns="0" rIns="0" bIns="0" rtlCol="0" anchor="ctr"/>
           <a:lstStyle/>
           <a:p>
-            <a:pPr indent="0" marL="0">
+            <a:pPr marL="0" indent="0">
               <a:buNone/>
             </a:pPr>
             <a:r>
@@ -7652,7 +8021,7 @@
           <a:bodyPr wrap="square" rtlCol="0" anchor="ctr"/>
           <a:lstStyle/>
           <a:p>
-            <a:pPr indent="0" marL="0">
+            <a:pPr marL="0" indent="0">
               <a:buNone/>
             </a:pPr>
             <a:r>
@@ -7711,7 +8080,7 @@
           <a:bodyPr wrap="square" rtlCol="0" anchor="ctr"/>
           <a:lstStyle/>
           <a:p>
-            <a:pPr indent="0" marL="0">
+            <a:pPr marL="0" indent="0">
               <a:buNone/>
             </a:pPr>
             <a:r>
@@ -7737,7 +8106,7 @@
         </p:nvSpPr>
         <p:spPr>
           <a:xfrm>
-            <a:off x="365760" y="1508760"/>
+            <a:off x="487680" y="2171700"/>
             <a:ext cx="5486400" cy="2743200"/>
           </a:xfrm>
           <a:prstGeom prst="rect">
@@ -7750,7 +8119,7 @@
           <a:bodyPr wrap="square" rtlCol="0" anchor="ctr"/>
           <a:lstStyle/>
           <a:p>
-            <a:pPr indent="0" marL="0">
+            <a:pPr marL="0" indent="0">
               <a:lnSpc>
                 <a:spcPct val="135000"/>
               </a:lnSpc>
@@ -7770,7 +8139,7 @@
             <a:endParaRPr lang="en-US" sz="1400" dirty="0"/>
           </a:p>
           <a:p>
-            <a:pPr indent="0" marL="0">
+            <a:pPr marL="0" indent="0">
               <a:lnSpc>
                 <a:spcPct val="135000"/>
               </a:lnSpc>
@@ -7787,68 +8156,62 @@
               </a:rPr>
               <a:t>P1 中位距离 1,974m → 同步入线率 = 0%</a:t>
             </a:r>
-            <a:endParaRPr lang="en-US" sz="1400" dirty="0"/>
-          </a:p>
-          <a:p>
-            <a:pPr indent="0" marL="0">
+          </a:p>
+          <a:p>
+            <a:pPr marL="0" indent="0">
               <a:lnSpc>
                 <a:spcPct val="135000"/>
               </a:lnSpc>
               <a:buNone/>
             </a:pPr>
-            <a:endParaRPr lang="en-US" sz="1400" dirty="0"/>
-          </a:p>
-          <a:p>
-            <a:pPr indent="0" marL="0">
+            <a:endParaRPr lang="en-US" sz="1400" dirty="0">
+              <a:solidFill>
+                <a:srgbClr val="4A5568"/>
+              </a:solidFill>
+              <a:latin typeface="Calibri" pitchFamily="34" charset="0"/>
+              <a:cs typeface="Calibri" pitchFamily="34" charset="-120"/>
+            </a:endParaRPr>
+          </a:p>
+          <a:p>
+            <a:pPr marL="0" indent="0">
               <a:lnSpc>
                 <a:spcPct val="135000"/>
               </a:lnSpc>
               <a:buNone/>
             </a:pPr>
-            <a:r>
-              <a:rPr lang="en-US" sz="1400" dirty="0">
-                <a:solidFill>
-                  <a:srgbClr val="4A5568"/>
-                </a:solidFill>
-                <a:latin typeface="Calibri" pitchFamily="34" charset="0"/>
-                <a:ea typeface="Calibri" pitchFamily="34" charset="-122"/>
-                <a:cs typeface="Calibri" pitchFamily="34" charset="-120"/>
-              </a:rPr>
-              <a:t>方案: AND_DIST 从 2000m 线性退火至 800m:</a:t>
-            </a:r>
             <a:endParaRPr lang="en-US" sz="1400" dirty="0"/>
           </a:p>
           <a:p>
-            <a:pPr indent="0" marL="0">
+            <a:pPr marL="0" indent="0">
               <a:lnSpc>
                 <a:spcPct val="135000"/>
               </a:lnSpc>
               <a:buNone/>
             </a:pPr>
-            <a:r>
-              <a:rPr lang="en-US" sz="1400" dirty="0">
-                <a:solidFill>
-                  <a:srgbClr val="4A5568"/>
-                </a:solidFill>
-                <a:latin typeface="Calibri" pitchFamily="34" charset="0"/>
-                <a:ea typeface="Calibri" pitchFamily="34" charset="-122"/>
-                <a:cs typeface="Calibri" pitchFamily="34" charset="-120"/>
-              </a:rPr>
-              <a:t>  Thresh = max(800, 2000 - decay_rate x iter)</a:t>
-            </a:r>
             <a:endParaRPr lang="en-US" sz="1400" dirty="0"/>
           </a:p>
           <a:p>
-            <a:pPr indent="0" marL="0">
+            <a:pPr marL="0" indent="0">
               <a:lnSpc>
                 <a:spcPct val="135000"/>
               </a:lnSpc>
               <a:buNone/>
             </a:pPr>
+            <a:r>
+              <a:rPr lang="en-US" sz="1400" dirty="0">
+                <a:solidFill>
+                  <a:srgbClr val="4A5568"/>
+                </a:solidFill>
+                <a:latin typeface="Calibri" pitchFamily="34" charset="0"/>
+                <a:ea typeface="Calibri" pitchFamily="34" charset="-122"/>
+                <a:cs typeface="Calibri" pitchFamily="34" charset="-120"/>
+              </a:rPr>
+              <a:t>方案: AND_DIST 从 2000m 线性退火至 800m:</a:t>
+            </a:r>
             <a:endParaRPr lang="en-US" sz="1400" dirty="0"/>
           </a:p>
           <a:p>
-            <a:pPr indent="0" marL="0">
+            <a:pPr marL="0" indent="0">
               <a:lnSpc>
                 <a:spcPct val="135000"/>
               </a:lnSpc>
@@ -7863,17 +8226,91 @@
                 <a:ea typeface="Calibri" pitchFamily="34" charset="-122"/>
                 <a:cs typeface="Calibri" pitchFamily="34" charset="-120"/>
               </a:rPr>
-              <a:t>结果: Eval 从 -8,800 改善至 -1,171 (+4,700 分)</a:t>
-            </a:r>
-            <a:endParaRPr lang="en-US" sz="1400" dirty="0"/>
-          </a:p>
-          <a:p>
-            <a:pPr indent="0" marL="0">
+              <a:t>  Thresh = max(800, 2000 - decay_rate x </a:t>
+            </a:r>
+            <a:r>
+              <a:rPr lang="en-US" sz="1400" dirty="0" err="1">
+                <a:solidFill>
+                  <a:srgbClr val="4A5568"/>
+                </a:solidFill>
+                <a:latin typeface="Calibri" pitchFamily="34" charset="0"/>
+                <a:ea typeface="Calibri" pitchFamily="34" charset="-122"/>
+                <a:cs typeface="Calibri" pitchFamily="34" charset="-120"/>
+              </a:rPr>
+              <a:t>iter</a:t>
+            </a:r>
+            <a:r>
+              <a:rPr lang="en-US" sz="1400" dirty="0">
+                <a:solidFill>
+                  <a:srgbClr val="4A5568"/>
+                </a:solidFill>
+                <a:latin typeface="Calibri" pitchFamily="34" charset="0"/>
+                <a:ea typeface="Calibri" pitchFamily="34" charset="-122"/>
+                <a:cs typeface="Calibri" pitchFamily="34" charset="-120"/>
+              </a:rPr>
+              <a:t>)</a:t>
+            </a:r>
+          </a:p>
+          <a:p>
+            <a:pPr marL="0" indent="0">
               <a:lnSpc>
                 <a:spcPct val="135000"/>
               </a:lnSpc>
               <a:buNone/>
             </a:pPr>
+            <a:endParaRPr lang="en-US" sz="1400" dirty="0">
+              <a:solidFill>
+                <a:srgbClr val="4A5568"/>
+              </a:solidFill>
+              <a:latin typeface="Calibri" pitchFamily="34" charset="0"/>
+              <a:cs typeface="Calibri" pitchFamily="34" charset="-120"/>
+            </a:endParaRPr>
+          </a:p>
+          <a:p>
+            <a:pPr marL="0" indent="0">
+              <a:lnSpc>
+                <a:spcPct val="135000"/>
+              </a:lnSpc>
+              <a:buNone/>
+            </a:pPr>
+            <a:endParaRPr lang="en-US" sz="1400" dirty="0"/>
+          </a:p>
+          <a:p>
+            <a:pPr marL="0" indent="0">
+              <a:lnSpc>
+                <a:spcPct val="135000"/>
+              </a:lnSpc>
+              <a:buNone/>
+            </a:pPr>
+            <a:endParaRPr lang="en-US" sz="1400" dirty="0"/>
+          </a:p>
+          <a:p>
+            <a:pPr marL="0" indent="0">
+              <a:lnSpc>
+                <a:spcPct val="135000"/>
+              </a:lnSpc>
+              <a:buNone/>
+            </a:pPr>
+            <a:r>
+              <a:rPr lang="en-US" sz="1400" dirty="0">
+                <a:solidFill>
+                  <a:srgbClr val="4A5568"/>
+                </a:solidFill>
+                <a:latin typeface="Calibri" pitchFamily="34" charset="0"/>
+                <a:ea typeface="Calibri" pitchFamily="34" charset="-122"/>
+                <a:cs typeface="Calibri" pitchFamily="34" charset="-120"/>
+              </a:rPr>
+              <a:t>结果: Eval 从 -8,800 改善至 -1,171 (+4,700 分)</a:t>
+            </a:r>
+            <a:endParaRPr lang="en-US" sz="1400" dirty="0"/>
+          </a:p>
+          <a:p>
+            <a:pPr marL="0" indent="0">
+              <a:lnSpc>
+                <a:spcPct val="135000"/>
+              </a:lnSpc>
+              <a:buNone/>
+            </a:pPr>
             <a:r>
               <a:rPr lang="en-US" sz="1400" dirty="0">
                 <a:solidFill>
@@ -7910,7 +8347,7 @@
           <a:bodyPr wrap="square" rtlCol="0" anchor="ctr"/>
           <a:lstStyle/>
           <a:p>
-            <a:pPr indent="0" marL="0">
+            <a:pPr marL="0" indent="0">
               <a:buNone/>
             </a:pPr>
             <a:r>
@@ -7949,7 +8386,7 @@
           </a:solidFill>
           <a:ln/>
           <a:effectLst>
-            <a:outerShdw sx="100000" sy="100000" kx="0" ky="0" algn="bl" rotWithShape="0" blurRad="38100" dist="12700" dir="16200000">
+            <a:outerShdw blurRad="38100" dist="12700" dir="16200000" algn="bl" rotWithShape="0">
               <a:srgbClr val="C0D0D8">
                 <a:alpha val="18000"/>
               </a:srgbClr>
@@ -7978,7 +8415,7 @@
           <a:bodyPr wrap="square" rtlCol="0" anchor="ctr"/>
           <a:lstStyle/>
           <a:p>
-            <a:pPr indent="0" marL="0">
+            <a:pPr marL="0" indent="0">
               <a:buNone/>
             </a:pPr>
             <a:r>
@@ -8017,7 +8454,7 @@
           <a:bodyPr wrap="square" rtlCol="0" anchor="ctr"/>
           <a:lstStyle/>
           <a:p>
-            <a:pPr indent="0" marL="0">
+            <a:pPr marL="0" indent="0">
               <a:lnSpc>
                 <a:spcPct val="130000"/>
               </a:lnSpc>
@@ -8037,7 +8474,7 @@
             <a:endParaRPr lang="en-US" sz="1300" dirty="0"/>
           </a:p>
           <a:p>
-            <a:pPr indent="0" marL="0">
+            <a:pPr marL="0" indent="0">
               <a:lnSpc>
                 <a:spcPct val="130000"/>
               </a:lnSpc>
@@ -8079,7 +8516,7 @@
           </a:solidFill>
           <a:ln/>
           <a:effectLst>
-            <a:outerShdw sx="100000" sy="100000" kx="0" ky="0" algn="bl" rotWithShape="0" blurRad="38100" dist="12700" dir="16200000">
+            <a:outerShdw blurRad="38100" dist="12700" dir="16200000" algn="bl" rotWithShape="0">
               <a:srgbClr val="C0D0D8">
                 <a:alpha val="18000"/>
               </a:srgbClr>
@@ -8108,7 +8545,7 @@
           <a:bodyPr wrap="square" rtlCol="0" anchor="ctr"/>
           <a:lstStyle/>
           <a:p>
-            <a:pPr indent="0" marL="0">
+            <a:pPr marL="0" indent="0">
               <a:buNone/>
             </a:pPr>
             <a:r>
@@ -8147,7 +8584,7 @@
           <a:bodyPr wrap="square" rtlCol="0" anchor="ctr"/>
           <a:lstStyle/>
           <a:p>
-            <a:pPr indent="0" marL="0">
+            <a:pPr marL="0" indent="0">
               <a:lnSpc>
                 <a:spcPct val="130000"/>
               </a:lnSpc>
@@ -8167,7 +8604,7 @@
             <a:endParaRPr lang="en-US" sz="1300" dirty="0"/>
           </a:p>
           <a:p>
-            <a:pPr indent="0" marL="0">
+            <a:pPr marL="0" indent="0">
               <a:lnSpc>
                 <a:spcPct val="130000"/>
               </a:lnSpc>
@@ -8182,12 +8619,34 @@
                 <a:ea typeface="Calibri" pitchFamily="34" charset="-122"/>
                 <a:cs typeface="Calibri" pitchFamily="34" charset="-120"/>
               </a:rPr>
-              <a:t>-&gt; penalty = (d_int-d_str)/1000 x dt</a:t>
+              <a:t>-&gt; penalty = (</a:t>
+            </a:r>
+            <a:r>
+              <a:rPr lang="en-US" sz="1300" dirty="0" err="1">
+                <a:solidFill>
+                  <a:srgbClr val="4A5568"/>
+                </a:solidFill>
+                <a:latin typeface="Calibri" pitchFamily="34" charset="0"/>
+                <a:ea typeface="Calibri" pitchFamily="34" charset="-122"/>
+                <a:cs typeface="Calibri" pitchFamily="34" charset="-120"/>
+              </a:rPr>
+              <a:t>d_int-d_str</a:t>
+            </a:r>
+            <a:r>
+              <a:rPr lang="en-US" sz="1300" dirty="0">
+                <a:solidFill>
+                  <a:srgbClr val="4A5568"/>
+                </a:solidFill>
+                <a:latin typeface="Calibri" pitchFamily="34" charset="0"/>
+                <a:ea typeface="Calibri" pitchFamily="34" charset="-122"/>
+                <a:cs typeface="Calibri" pitchFamily="34" charset="-120"/>
+              </a:rPr>
+              <a:t>)/1000 x dt</a:t>
             </a:r>
             <a:endParaRPr lang="en-US" sz="1300" dirty="0"/>
           </a:p>
           <a:p>
-            <a:pPr indent="0" marL="0">
+            <a:pPr marL="0" indent="0">
               <a:lnSpc>
                 <a:spcPct val="130000"/>
               </a:lnSpc>
@@ -8202,7 +8661,29 @@
                 <a:ea typeface="Calibri" pitchFamily="34" charset="-122"/>
                 <a:cs typeface="Calibri" pitchFamily="34" charset="-120"/>
               </a:rPr>
-              <a:t>强制长机等僚机, 防止独狼冲锋</a:t>
+              <a:t>强制长机等僚机, </a:t>
+            </a:r>
+            <a:r>
+              <a:rPr lang="en-US" sz="1300" dirty="0" err="1">
+                <a:solidFill>
+                  <a:srgbClr val="4A5568"/>
+                </a:solidFill>
+                <a:latin typeface="Calibri" pitchFamily="34" charset="0"/>
+                <a:ea typeface="Calibri" pitchFamily="34" charset="-122"/>
+                <a:cs typeface="Calibri" pitchFamily="34" charset="-120"/>
+              </a:rPr>
+              <a:t>防止</a:t>
+            </a:r>
+            <a:r>
+              <a:rPr lang="zh-CN" altLang="en-US" sz="1300" dirty="0">
+                <a:solidFill>
+                  <a:srgbClr val="4A5568"/>
+                </a:solidFill>
+                <a:latin typeface="Calibri" pitchFamily="34" charset="0"/>
+                <a:ea typeface="Calibri" pitchFamily="34" charset="-122"/>
+                <a:cs typeface="Calibri" pitchFamily="34" charset="-120"/>
+              </a:rPr>
+              <a:t>单独行动</a:t>
             </a:r>
             <a:endParaRPr lang="en-US" sz="1300" dirty="0"/>
           </a:p>
@@ -8229,7 +8710,7 @@
           </a:solidFill>
           <a:ln/>
           <a:effectLst>
-            <a:outerShdw sx="100000" sy="100000" kx="0" ky="0" algn="bl" rotWithShape="0" blurRad="38100" dist="12700" dir="16200000">
+            <a:outerShdw blurRad="38100" dist="12700" dir="16200000" algn="bl" rotWithShape="0">
               <a:srgbClr val="C0D0D8">
                 <a:alpha val="18000"/>
               </a:srgbClr>
@@ -8258,7 +8739,7 @@
           <a:bodyPr wrap="square" rtlCol="0" anchor="ctr"/>
           <a:lstStyle/>
           <a:p>
-            <a:pPr indent="0" marL="0">
+            <a:pPr marL="0" indent="0">
               <a:buNone/>
             </a:pPr>
             <a:r>
@@ -8297,7 +8778,7 @@
           <a:bodyPr wrap="square" rtlCol="0" anchor="ctr"/>
           <a:lstStyle/>
           <a:p>
-            <a:pPr indent="0" marL="0">
+            <a:pPr marL="0" indent="0">
               <a:lnSpc>
                 <a:spcPct val="130000"/>
               </a:lnSpc>
@@ -8317,7 +8798,7 @@
             <a:endParaRPr lang="en-US" sz="1300" dirty="0"/>
           </a:p>
           <a:p>
-            <a:pPr indent="0" marL="0">
+            <a:pPr marL="0" indent="0">
               <a:lnSpc>
                 <a:spcPct val="130000"/>
               </a:lnSpc>
@@ -8337,7 +8818,7 @@
             <a:endParaRPr lang="en-US" sz="1300" dirty="0"/>
           </a:p>
           <a:p>
-            <a:pPr indent="0" marL="0">
+            <a:pPr marL="0" indent="0">
               <a:lnSpc>
                 <a:spcPct val="130000"/>
               </a:lnSpc>
@@ -8366,7 +8847,7 @@
 </p:sld>
 </file>
 
-<file path=ppt/slides/slide7.xml><?xml version="1.0" encoding="utf-8"?>
+<file path=ppt/slides/slide8.xml><?xml version="1.0" encoding="utf-8"?>
 <p:sld xmlns:a="http://schemas.openxmlformats.org/drawingml/2006/main" xmlns:r="http://schemas.openxmlformats.org/officeDocument/2006/relationships" xmlns:p="http://schemas.openxmlformats.org/presentationml/2006/main">
   <p:cSld name="Slide 7">
     <p:bg>
@@ -8374,6 +8855,7 @@
         <a:solidFill>
           <a:srgbClr val="FFFFFF"/>
         </a:solidFill>
+        <a:effectLst/>
       </p:bgPr>
     </p:bg>
     <p:spTree>
@@ -8431,7 +8913,7 @@
           <a:bodyPr wrap="square" lIns="0" tIns="0" rIns="0" bIns="0" rtlCol="0" anchor="ctr"/>
           <a:lstStyle/>
           <a:p>
-            <a:pPr indent="0" marL="0">
+            <a:pPr marL="0" indent="0">
               <a:buNone/>
             </a:pPr>
             <a:r>
@@ -8470,7 +8952,7 @@
           <a:bodyPr wrap="square" rtlCol="0" anchor="ctr"/>
           <a:lstStyle/>
           <a:p>
-            <a:pPr indent="0" marL="0">
+            <a:pPr marL="0" indent="0">
               <a:buNone/>
             </a:pPr>
             <a:r>
@@ -8510,15 +8992,15 @@
       </p:sp>
       <p:pic>
         <p:nvPicPr>
-          <p:cNvPr id="6" name="Image 0" descr="results/viz/paper_charts/chart3_reward_breakdown.png">    </p:cNvPr>
+          <p:cNvPr id="6" name="Image 0" descr="results/viz/paper_charts/chart3_reward_breakdown.png"/>
           <p:cNvPicPr>
             <a:picLocks noChangeAspect="1"/>
           </p:cNvPicPr>
           <p:nvPr/>
         </p:nvPicPr>
         <p:blipFill>
-          <a:blip r:embed="rId1"/>
-          <a:srcRect l="0" r="0" t="0" b="0"/>
+          <a:blip r:embed="rId3"/>
+          <a:srcRect/>
           <a:stretch/>
         </p:blipFill>
         <p:spPr>
@@ -8539,7 +9021,7 @@
         </p:nvSpPr>
         <p:spPr>
           <a:xfrm>
-            <a:off x="365760" y="6217920"/>
+            <a:off x="321310" y="6384747"/>
             <a:ext cx="11430000" cy="365760"/>
           </a:xfrm>
           <a:prstGeom prst="rect">
@@ -8552,7 +9034,7 @@
           <a:bodyPr wrap="square" rtlCol="0" anchor="ctr"/>
           <a:lstStyle/>
           <a:p>
-            <a:pPr indent="0" marL="0">
+            <a:pPr marL="0" indent="0">
               <a:buNone/>
             </a:pPr>
             <a:r>
@@ -8578,7 +9060,7 @@
 </p:sld>
 </file>
 
-<file path=ppt/slides/slide8.xml><?xml version="1.0" encoding="utf-8"?>
+<file path=ppt/slides/slide9.xml><?xml version="1.0" encoding="utf-8"?>
 <p:sld xmlns:a="http://schemas.openxmlformats.org/drawingml/2006/main" xmlns:r="http://schemas.openxmlformats.org/officeDocument/2006/relationships" xmlns:p="http://schemas.openxmlformats.org/presentationml/2006/main">
   <p:cSld name="Slide 8">
     <p:bg>
@@ -8586,6 +9068,7 @@
         <a:solidFill>
           <a:srgbClr val="FFFFFF"/>
         </a:solidFill>
+        <a:effectLst/>
       </p:bgPr>
     </p:bg>
     <p:spTree>
@@ -8643,7 +9126,7 @@
           <a:bodyPr wrap="square" lIns="0" tIns="0" rIns="0" bIns="0" rtlCol="0" anchor="ctr"/>
           <a:lstStyle/>
           <a:p>
-            <a:pPr indent="0" marL="0">
+            <a:pPr marL="0" indent="0">
               <a:buNone/>
             </a:pPr>
             <a:r>
@@ -8682,11 +9165,11 @@
           <a:bodyPr wrap="square" rtlCol="0" anchor="ctr"/>
           <a:lstStyle/>
           <a:p>
-            <a:pPr indent="0" marL="0">
-              <a:buNone/>
-            </a:pPr>
-            <a:r>
-              <a:rPr lang="en-US" sz="3000" b="1" dirty="0">
+            <a:pPr marL="0" indent="0">
+              <a:buNone/>
+            </a:pPr>
+            <a:r>
+              <a:rPr lang="en-US" sz="3000" b="1" dirty="0" err="1">
                 <a:solidFill>
                   <a:srgbClr val="065A82"/>
                 </a:solidFill>
@@ -8694,7 +9177,18 @@
                 <a:ea typeface="Georgia" pitchFamily="34" charset="-122"/>
                 <a:cs typeface="Georgia" pitchFamily="34" charset="-120"/>
               </a:rPr>
-              <a:t>消融实验大盘点 — 六代模型全矩阵</a:t>
+              <a:t>消融实验</a:t>
+            </a:r>
+            <a:r>
+              <a:rPr lang="zh-CN" altLang="en-US" sz="3000" b="1" dirty="0">
+                <a:solidFill>
+                  <a:srgbClr val="065A82"/>
+                </a:solidFill>
+                <a:latin typeface="Georgia" pitchFamily="34" charset="0"/>
+                <a:ea typeface="Georgia" pitchFamily="34" charset="-122"/>
+                <a:cs typeface="Georgia" pitchFamily="34" charset="-120"/>
+              </a:rPr>
+              <a:t>对比</a:t>
             </a:r>
             <a:endParaRPr lang="en-US" sz="3000" dirty="0"/>
           </a:p>
@@ -8761,7 +9255,7 @@
           <a:bodyPr wrap="square" rtlCol="0" anchor="ctr"/>
           <a:lstStyle/>
           <a:p>
-            <a:pPr algn="ctr" indent="0" marL="0">
+            <a:pPr marL="0" indent="0" algn="ctr">
               <a:buNone/>
             </a:pPr>
             <a:r>
@@ -8800,7 +9294,7 @@
           <a:bodyPr wrap="square" rtlCol="0" anchor="ctr"/>
           <a:lstStyle/>
           <a:p>
-            <a:pPr algn="ctr" indent="0" marL="0">
+            <a:pPr marL="0" indent="0" algn="ctr">
               <a:buNone/>
             </a:pPr>
             <a:r>
@@ -8839,7 +9333,7 @@
           <a:bodyPr wrap="square" rtlCol="0" anchor="ctr"/>
           <a:lstStyle/>
           <a:p>
-            <a:pPr algn="ctr" indent="0" marL="0">
+            <a:pPr marL="0" indent="0" algn="ctr">
               <a:buNone/>
             </a:pPr>
             <a:r>
@@ -8878,7 +9372,7 @@
           <a:bodyPr wrap="square" rtlCol="0" anchor="ctr"/>
           <a:lstStyle/>
           <a:p>
-            <a:pPr algn="ctr" indent="0" marL="0">
+            <a:pPr marL="0" indent="0" algn="ctr">
               <a:buNone/>
             </a:pPr>
             <a:r>
@@ -8917,7 +9411,7 @@
           <a:bodyPr wrap="square" rtlCol="0" anchor="ctr"/>
           <a:lstStyle/>
           <a:p>
-            <a:pPr algn="ctr" indent="0" marL="0">
+            <a:pPr marL="0" indent="0" algn="ctr">
               <a:buNone/>
             </a:pPr>
             <a:r>
@@ -8956,7 +9450,7 @@
           <a:bodyPr wrap="square" rtlCol="0" anchor="ctr"/>
           <a:lstStyle/>
           <a:p>
-            <a:pPr algn="ctr" indent="0" marL="0">
+            <a:pPr marL="0" indent="0" algn="ctr">
               <a:buNone/>
             </a:pPr>
             <a:r>
@@ -8995,7 +9489,7 @@
           <a:bodyPr wrap="square" rtlCol="0" anchor="ctr"/>
           <a:lstStyle/>
           <a:p>
-            <a:pPr algn="ctr" indent="0" marL="0">
+            <a:pPr marL="0" indent="0" algn="ctr">
               <a:buNone/>
             </a:pPr>
             <a:r>
@@ -9059,7 +9553,7 @@
           <a:bodyPr wrap="square" rtlCol="0" anchor="ctr"/>
           <a:lstStyle/>
           <a:p>
-            <a:pPr algn="ctr" indent="0" marL="0">
+            <a:pPr marL="0" indent="0" algn="ctr">
               <a:buNone/>
             </a:pPr>
             <a:r>
@@ -9098,7 +9592,7 @@
           <a:bodyPr wrap="square" rtlCol="0" anchor="ctr"/>
           <a:lstStyle/>
           <a:p>
-            <a:pPr algn="ctr" indent="0" marL="0">
+            <a:pPr marL="0" indent="0" algn="ctr">
               <a:buNone/>
             </a:pPr>
             <a:r>
@@ -9137,7 +9631,7 @@
           <a:bodyPr wrap="square" rtlCol="0" anchor="ctr"/>
           <a:lstStyle/>
           <a:p>
-            <a:pPr algn="ctr" indent="0" marL="0">
+            <a:pPr marL="0" indent="0" algn="ctr">
               <a:buNone/>
             </a:pPr>
             <a:r>
@@ -9176,7 +9670,7 @@
           <a:bodyPr wrap="square" rtlCol="0" anchor="ctr"/>
           <a:lstStyle/>
           <a:p>
-            <a:pPr algn="ctr" indent="0" marL="0">
+            <a:pPr marL="0" indent="0" algn="ctr">
               <a:buNone/>
             </a:pPr>
             <a:r>
@@ -9215,7 +9709,7 @@
           <a:bodyPr wrap="square" rtlCol="0" anchor="ctr"/>
           <a:lstStyle/>
           <a:p>
-            <a:pPr algn="ctr" indent="0" marL="0">
+            <a:pPr marL="0" indent="0" algn="ctr">
               <a:buNone/>
             </a:pPr>
             <a:r>
@@ -9254,7 +9748,7 @@
           <a:bodyPr wrap="square" rtlCol="0" anchor="ctr"/>
           <a:lstStyle/>
           <a:p>
-            <a:pPr algn="ctr" indent="0" marL="0">
+            <a:pPr marL="0" indent="0" algn="ctr">
               <a:buNone/>
             </a:pPr>
             <a:r>
@@ -9293,7 +9787,7 @@
           <a:bodyPr wrap="square" rtlCol="0" anchor="ctr"/>
           <a:lstStyle/>
           <a:p>
-            <a:pPr algn="ctr" indent="0" marL="0">
+            <a:pPr marL="0" indent="0" algn="ctr">
               <a:buNone/>
             </a:pPr>
             <a:r>
@@ -9357,7 +9851,7 @@
           <a:bodyPr wrap="square" rtlCol="0" anchor="ctr"/>
           <a:lstStyle/>
           <a:p>
-            <a:pPr algn="ctr" indent="0" marL="0">
+            <a:pPr marL="0" indent="0" algn="ctr">
               <a:buNone/>
             </a:pPr>
             <a:r>
@@ -9396,7 +9890,7 @@
           <a:bodyPr wrap="square" rtlCol="0" anchor="ctr"/>
           <a:lstStyle/>
           <a:p>
-            <a:pPr algn="ctr" indent="0" marL="0">
+            <a:pPr marL="0" indent="0" algn="ctr">
               <a:buNone/>
             </a:pPr>
             <a:r>
@@ -9435,7 +9929,7 @@
           <a:bodyPr wrap="square" rtlCol="0" anchor="ctr"/>
           <a:lstStyle/>
           <a:p>
-            <a:pPr algn="ctr" indent="0" marL="0">
+            <a:pPr marL="0" indent="0" algn="ctr">
               <a:buNone/>
             </a:pPr>
             <a:r>
@@ -9474,7 +9968,7 @@
           <a:bodyPr wrap="square" rtlCol="0" anchor="ctr"/>
           <a:lstStyle/>
           <a:p>
-            <a:pPr algn="ctr" indent="0" marL="0">
+            <a:pPr marL="0" indent="0" algn="ctr">
               <a:buNone/>
             </a:pPr>
             <a:r>
@@ -9513,7 +10007,7 @@
           <a:bodyPr wrap="square" rtlCol="0" anchor="ctr"/>
           <a:lstStyle/>
           <a:p>
-            <a:pPr algn="ctr" indent="0" marL="0">
+            <a:pPr marL="0" indent="0" algn="ctr">
               <a:buNone/>
             </a:pPr>
             <a:r>
@@ -9552,7 +10046,7 @@
           <a:bodyPr wrap="square" rtlCol="0" anchor="ctr"/>
           <a:lstStyle/>
           <a:p>
-            <a:pPr algn="ctr" indent="0" marL="0">
+            <a:pPr marL="0" indent="0" algn="ctr">
               <a:buNone/>
             </a:pPr>
             <a:r>
@@ -9591,7 +10085,7 @@
           <a:bodyPr wrap="square" rtlCol="0" anchor="ctr"/>
           <a:lstStyle/>
           <a:p>
-            <a:pPr algn="ctr" indent="0" marL="0">
+            <a:pPr marL="0" indent="0" algn="ctr">
               <a:buNone/>
             </a:pPr>
             <a:r>
@@ -9655,7 +10149,7 @@
           <a:bodyPr wrap="square" rtlCol="0" anchor="ctr"/>
           <a:lstStyle/>
           <a:p>
-            <a:pPr algn="ctr" indent="0" marL="0">
+            <a:pPr marL="0" indent="0" algn="ctr">
               <a:buNone/>
             </a:pPr>
             <a:r>
@@ -9694,7 +10188,7 @@
           <a:bodyPr wrap="square" rtlCol="0" anchor="ctr"/>
           <a:lstStyle/>
           <a:p>
-            <a:pPr algn="ctr" indent="0" marL="0">
+            <a:pPr marL="0" indent="0" algn="ctr">
               <a:buNone/>
             </a:pPr>
             <a:r>
@@ -9733,7 +10227,7 @@
           <a:bodyPr wrap="square" rtlCol="0" anchor="ctr"/>
           <a:lstStyle/>
           <a:p>
-            <a:pPr algn="ctr" indent="0" marL="0">
+            <a:pPr marL="0" indent="0" algn="ctr">
               <a:buNone/>
             </a:pPr>
             <a:r>
@@ -9772,7 +10266,7 @@
           <a:bodyPr wrap="square" rtlCol="0" anchor="ctr"/>
           <a:lstStyle/>
           <a:p>
-            <a:pPr algn="ctr" indent="0" marL="0">
+            <a:pPr marL="0" indent="0" algn="ctr">
               <a:buNone/>
             </a:pPr>
             <a:r>
@@ -9811,7 +10305,7 @@
           <a:bodyPr wrap="square" rtlCol="0" anchor="ctr"/>
           <a:lstStyle/>
           <a:p>
-            <a:pPr algn="ctr" indent="0" marL="0">
+            <a:pPr marL="0" indent="0" algn="ctr">
               <a:buNone/>
             </a:pPr>
             <a:r>
@@ -9850,7 +10344,7 @@
           <a:bodyPr wrap="square" rtlCol="0" anchor="ctr"/>
           <a:lstStyle/>
           <a:p>
-            <a:pPr algn="ctr" indent="0" marL="0">
+            <a:pPr marL="0" indent="0" algn="ctr">
               <a:buNone/>
             </a:pPr>
             <a:r>
@@ -9889,7 +10383,7 @@
           <a:bodyPr wrap="square" rtlCol="0" anchor="ctr"/>
           <a:lstStyle/>
           <a:p>
-            <a:pPr algn="ctr" indent="0" marL="0">
+            <a:pPr marL="0" indent="0" algn="ctr">
               <a:buNone/>
             </a:pPr>
             <a:r>
@@ -9953,7 +10447,7 @@
           <a:bodyPr wrap="square" rtlCol="0" anchor="ctr"/>
           <a:lstStyle/>
           <a:p>
-            <a:pPr algn="ctr" indent="0" marL="0">
+            <a:pPr marL="0" indent="0" algn="ctr">
               <a:buNone/>
             </a:pPr>
             <a:r>
@@ -9992,7 +10486,7 @@
           <a:bodyPr wrap="square" rtlCol="0" anchor="ctr"/>
           <a:lstStyle/>
           <a:p>
-            <a:pPr algn="ctr" indent="0" marL="0">
+            <a:pPr marL="0" indent="0" algn="ctr">
               <a:buNone/>
             </a:pPr>
             <a:r>
@@ -10031,7 +10525,7 @@
           <a:bodyPr wrap="square" rtlCol="0" anchor="ctr"/>
           <a:lstStyle/>
           <a:p>
-            <a:pPr algn="ctr" indent="0" marL="0">
+            <a:pPr marL="0" indent="0" algn="ctr">
               <a:buNone/>
             </a:pPr>
             <a:r>
@@ -10070,7 +10564,7 @@
           <a:bodyPr wrap="square" rtlCol="0" anchor="ctr"/>
           <a:lstStyle/>
           <a:p>
-            <a:pPr algn="ctr" indent="0" marL="0">
+            <a:pPr marL="0" indent="0" algn="ctr">
               <a:buNone/>
             </a:pPr>
             <a:r>
@@ -10109,7 +10603,7 @@
           <a:bodyPr wrap="square" rtlCol="0" anchor="ctr"/>
           <a:lstStyle/>
           <a:p>
-            <a:pPr algn="ctr" indent="0" marL="0">
+            <a:pPr marL="0" indent="0" algn="ctr">
               <a:buNone/>
             </a:pPr>
             <a:r>
@@ -10148,7 +10642,7 @@
           <a:bodyPr wrap="square" rtlCol="0" anchor="ctr"/>
           <a:lstStyle/>
           <a:p>
-            <a:pPr algn="ctr" indent="0" marL="0">
+            <a:pPr marL="0" indent="0" algn="ctr">
               <a:buNone/>
             </a:pPr>
             <a:r>
@@ -10187,7 +10681,7 @@
           <a:bodyPr wrap="square" rtlCol="0" anchor="ctr"/>
           <a:lstStyle/>
           <a:p>
-            <a:pPr algn="ctr" indent="0" marL="0">
+            <a:pPr marL="0" indent="0" algn="ctr">
               <a:buNone/>
             </a:pPr>
             <a:r>
@@ -10251,7 +10745,7 @@
           <a:bodyPr wrap="square" rtlCol="0" anchor="ctr"/>
           <a:lstStyle/>
           <a:p>
-            <a:pPr algn="ctr" indent="0" marL="0">
+            <a:pPr marL="0" indent="0" algn="ctr">
               <a:buNone/>
             </a:pPr>
             <a:r>
@@ -10290,7 +10784,7 @@
           <a:bodyPr wrap="square" rtlCol="0" anchor="ctr"/>
           <a:lstStyle/>
           <a:p>
-            <a:pPr algn="ctr" indent="0" marL="0">
+            <a:pPr marL="0" indent="0" algn="ctr">
               <a:buNone/>
             </a:pPr>
             <a:r>
@@ -10329,7 +10823,7 @@
           <a:bodyPr wrap="square" rtlCol="0" anchor="ctr"/>
           <a:lstStyle/>
           <a:p>
-            <a:pPr algn="ctr" indent="0" marL="0">
+            <a:pPr marL="0" indent="0" algn="ctr">
               <a:buNone/>
             </a:pPr>
             <a:r>
@@ -10368,7 +10862,7 @@
           <a:bodyPr wrap="square" rtlCol="0" anchor="ctr"/>
           <a:lstStyle/>
           <a:p>
-            <a:pPr algn="ctr" indent="0" marL="0">
+            <a:pPr marL="0" indent="0" algn="ctr">
               <a:buNone/>
             </a:pPr>
             <a:r>
@@ -10407,7 +10901,7 @@
           <a:bodyPr wrap="square" rtlCol="0" anchor="ctr"/>
           <a:lstStyle/>
           <a:p>
-            <a:pPr algn="ctr" indent="0" marL="0">
+            <a:pPr marL="0" indent="0" algn="ctr">
               <a:buNone/>
             </a:pPr>
             <a:r>
@@ -10446,7 +10940,7 @@
           <a:bodyPr wrap="square" rtlCol="0" anchor="ctr"/>
           <a:lstStyle/>
           <a:p>
-            <a:pPr algn="ctr" indent="0" marL="0">
+            <a:pPr marL="0" indent="0" algn="ctr">
               <a:buNone/>
             </a:pPr>
             <a:r>
@@ -10485,7 +10979,7 @@
           <a:bodyPr wrap="square" rtlCol="0" anchor="ctr"/>
           <a:lstStyle/>
           <a:p>
-            <a:pPr algn="ctr" indent="0" marL="0">
+            <a:pPr marL="0" indent="0" algn="ctr">
               <a:buNone/>
             </a:pPr>
             <a:r>
@@ -10549,7 +11043,7 @@
           <a:bodyPr wrap="square" rtlCol="0" anchor="ctr"/>
           <a:lstStyle/>
           <a:p>
-            <a:pPr algn="ctr" indent="0" marL="0">
+            <a:pPr marL="0" indent="0" algn="ctr">
               <a:buNone/>
             </a:pPr>
             <a:r>
@@ -10588,7 +11082,7 @@
           <a:bodyPr wrap="square" rtlCol="0" anchor="ctr"/>
           <a:lstStyle/>
           <a:p>
-            <a:pPr algn="ctr" indent="0" marL="0">
+            <a:pPr marL="0" indent="0" algn="ctr">
               <a:buNone/>
             </a:pPr>
             <a:r>
@@ -10627,7 +11121,7 @@
           <a:bodyPr wrap="square" rtlCol="0" anchor="ctr"/>
           <a:lstStyle/>
           <a:p>
-            <a:pPr algn="ctr" indent="0" marL="0">
+            <a:pPr marL="0" indent="0" algn="ctr">
               <a:buNone/>
             </a:pPr>
             <a:r>
@@ -10666,7 +11160,7 @@
           <a:bodyPr wrap="square" rtlCol="0" anchor="ctr"/>
           <a:lstStyle/>
           <a:p>
-            <a:pPr algn="ctr" indent="0" marL="0">
+            <a:pPr marL="0" indent="0" algn="ctr">
               <a:buNone/>
             </a:pPr>
             <a:r>
@@ -10705,7 +11199,7 @@
           <a:bodyPr wrap="square" rtlCol="0" anchor="ctr"/>
           <a:lstStyle/>
           <a:p>
-            <a:pPr algn="ctr" indent="0" marL="0">
+            <a:pPr marL="0" indent="0" algn="ctr">
               <a:buNone/>
             </a:pPr>
             <a:r>
@@ -10744,7 +11238,7 @@
           <a:bodyPr wrap="square" rtlCol="0" anchor="ctr"/>
           <a:lstStyle/>
           <a:p>
-            <a:pPr algn="ctr" indent="0" marL="0">
+            <a:pPr marL="0" indent="0" algn="ctr">
               <a:buNone/>
             </a:pPr>
             <a:r>
@@ -10783,7 +11277,7 @@
           <a:bodyPr wrap="square" rtlCol="0" anchor="ctr"/>
           <a:lstStyle/>
           <a:p>
-            <a:pPr algn="ctr" indent="0" marL="0">
+            <a:pPr marL="0" indent="0" algn="ctr">
               <a:buNone/>
             </a:pPr>
             <a:r>
@@ -10847,7 +11341,7 @@
           <a:bodyPr wrap="square" rtlCol="0" anchor="ctr"/>
           <a:lstStyle/>
           <a:p>
-            <a:pPr algn="ctr" indent="0" marL="0">
+            <a:pPr marL="0" indent="0" algn="ctr">
               <a:buNone/>
             </a:pPr>
             <a:r>
@@ -10886,7 +11380,7 @@
           <a:bodyPr wrap="square" rtlCol="0" anchor="ctr"/>
           <a:lstStyle/>
           <a:p>
-            <a:pPr algn="ctr" indent="0" marL="0">
+            <a:pPr marL="0" indent="0" algn="ctr">
               <a:buNone/>
             </a:pPr>
             <a:r>
@@ -10925,7 +11419,7 @@
           <a:bodyPr wrap="square" rtlCol="0" anchor="ctr"/>
           <a:lstStyle/>
           <a:p>
-            <a:pPr algn="ctr" indent="0" marL="0">
+            <a:pPr marL="0" indent="0" algn="ctr">
               <a:buNone/>
             </a:pPr>
             <a:r>
@@ -10964,7 +11458,7 @@
           <a:bodyPr wrap="square" rtlCol="0" anchor="ctr"/>
           <a:lstStyle/>
           <a:p>
-            <a:pPr algn="ctr" indent="0" marL="0">
+            <a:pPr marL="0" indent="0" algn="ctr">
               <a:buNone/>
             </a:pPr>
             <a:r>
@@ -11003,7 +11497,7 @@
           <a:bodyPr wrap="square" rtlCol="0" anchor="ctr"/>
           <a:lstStyle/>
           <a:p>
-            <a:pPr algn="ctr" indent="0" marL="0">
+            <a:pPr marL="0" indent="0" algn="ctr">
               <a:buNone/>
             </a:pPr>
             <a:r>
@@ -11042,7 +11536,7 @@
           <a:bodyPr wrap="square" rtlCol="0" anchor="ctr"/>
           <a:lstStyle/>
           <a:p>
-            <a:pPr algn="ctr" indent="0" marL="0">
+            <a:pPr marL="0" indent="0" algn="ctr">
               <a:buNone/>
             </a:pPr>
             <a:r>
@@ -11081,7 +11575,7 @@
           <a:bodyPr wrap="square" rtlCol="0" anchor="ctr"/>
           <a:lstStyle/>
           <a:p>
-            <a:pPr algn="ctr" indent="0" marL="0">
+            <a:pPr marL="0" indent="0" algn="ctr">
               <a:buNone/>
             </a:pPr>
             <a:r>
@@ -11120,7 +11614,7 @@
           <a:bodyPr wrap="square" rtlCol="0" anchor="ctr"/>
           <a:lstStyle/>
           <a:p>
-            <a:pPr indent="0" marL="0">
+            <a:pPr marL="0" indent="0">
               <a:buNone/>
             </a:pPr>
             <a:r>
@@ -11138,831 +11632,6 @@
           </a:p>
         </p:txBody>
       </p:sp>
-    </p:spTree>
-  </p:cSld>
-  <p:clrMapOvr>
-    <a:masterClrMapping/>
-  </p:clrMapOvr>
-</p:sld>
-</file>
-
-<file path=ppt/slides/slide9.xml><?xml version="1.0" encoding="utf-8"?>
-<p:sld xmlns:a="http://schemas.openxmlformats.org/drawingml/2006/main" xmlns:r="http://schemas.openxmlformats.org/officeDocument/2006/relationships" xmlns:p="http://schemas.openxmlformats.org/presentationml/2006/main">
-  <p:cSld name="Slide 9">
-    <p:bg>
-      <p:bgPr>
-        <a:solidFill>
-          <a:srgbClr val="FFFFFF"/>
-        </a:solidFill>
-      </p:bgPr>
-    </p:bg>
-    <p:spTree>
-      <p:nvGrpSpPr>
-        <p:cNvPr id="1" name=""/>
-        <p:cNvGrpSpPr/>
-        <p:nvPr/>
-      </p:nvGrpSpPr>
-      <p:grpSpPr>
-        <a:xfrm>
-          <a:off x="0" y="0"/>
-          <a:ext cx="0" cy="0"/>
-          <a:chOff x="0" y="0"/>
-          <a:chExt cx="0" cy="0"/>
-        </a:xfrm>
-      </p:grpSpPr>
-      <p:sp>
-        <p:nvSpPr>
-          <p:cNvPr id="2" name="Shape 0"/>
-          <p:cNvSpPr/>
-          <p:nvPr/>
-        </p:nvSpPr>
-        <p:spPr>
-          <a:xfrm>
-            <a:off x="365760" y="228600"/>
-            <a:ext cx="54864" cy="457200"/>
-          </a:xfrm>
-          <a:prstGeom prst="rect">
-            <a:avLst/>
-          </a:prstGeom>
-          <a:solidFill>
-            <a:srgbClr val="F96167"/>
-          </a:solidFill>
-          <a:ln/>
-        </p:spPr>
-      </p:sp>
-      <p:sp>
-        <p:nvSpPr>
-          <p:cNvPr id="3" name="Text 1"/>
-          <p:cNvSpPr/>
-          <p:nvPr/>
-        </p:nvSpPr>
-        <p:spPr>
-          <a:xfrm>
-            <a:off x="365760" y="182880"/>
-            <a:ext cx="731520" cy="502920"/>
-          </a:xfrm>
-          <a:prstGeom prst="rect">
-            <a:avLst/>
-          </a:prstGeom>
-          <a:noFill/>
-          <a:ln/>
-        </p:spPr>
-        <p:txBody>
-          <a:bodyPr wrap="square" lIns="0" tIns="0" rIns="0" bIns="0" rtlCol="0" anchor="ctr"/>
-          <a:lstStyle/>
-          <a:p>
-            <a:pPr indent="0" marL="0">
-              <a:buNone/>
-            </a:pPr>
-            <a:r>
-              <a:rPr lang="en-US" sz="2600" b="1" dirty="0">
-                <a:solidFill>
-                  <a:srgbClr val="F96167"/>
-                </a:solidFill>
-                <a:latin typeface="Georgia" pitchFamily="34" charset="0"/>
-                <a:ea typeface="Georgia" pitchFamily="34" charset="-122"/>
-                <a:cs typeface="Georgia" pitchFamily="34" charset="-120"/>
-              </a:rPr>
-              <a:t>8</a:t>
-            </a:r>
-            <a:endParaRPr lang="en-US" sz="2600" dirty="0"/>
-          </a:p>
-        </p:txBody>
-      </p:sp>
-      <p:sp>
-        <p:nvSpPr>
-          <p:cNvPr id="4" name="Text 2"/>
-          <p:cNvSpPr/>
-          <p:nvPr/>
-        </p:nvSpPr>
-        <p:spPr>
-          <a:xfrm>
-            <a:off x="1051560" y="182880"/>
-            <a:ext cx="10515600" cy="502920"/>
-          </a:xfrm>
-          <a:prstGeom prst="rect">
-            <a:avLst/>
-          </a:prstGeom>
-          <a:noFill/>
-          <a:ln/>
-        </p:spPr>
-        <p:txBody>
-          <a:bodyPr wrap="square" rtlCol="0" anchor="ctr"/>
-          <a:lstStyle/>
-          <a:p>
-            <a:pPr indent="0" marL="0">
-              <a:buNone/>
-            </a:pPr>
-            <a:r>
-              <a:rPr lang="en-US" sz="3000" b="1" dirty="0">
-                <a:solidFill>
-                  <a:srgbClr val="065A82"/>
-                </a:solidFill>
-                <a:latin typeface="Georgia" pitchFamily="34" charset="0"/>
-                <a:ea typeface="Georgia" pitchFamily="34" charset="-122"/>
-                <a:cs typeface="Georgia" pitchFamily="34" charset="-120"/>
-              </a:rPr>
-              <a:t>黄金成果: 从零涌现的协同战术 (Zero-Knowledge Emergence)</a:t>
-            </a:r>
-            <a:endParaRPr lang="en-US" sz="3000" dirty="0"/>
-          </a:p>
-        </p:txBody>
-      </p:sp>
-      <p:sp>
-        <p:nvSpPr>
-          <p:cNvPr id="5" name="Shape 3"/>
-          <p:cNvSpPr/>
-          <p:nvPr/>
-        </p:nvSpPr>
-        <p:spPr>
-          <a:xfrm>
-            <a:off x="365760" y="822960"/>
-            <a:ext cx="11430000" cy="10973"/>
-          </a:xfrm>
-          <a:prstGeom prst="rect">
-            <a:avLst/>
-          </a:prstGeom>
-          <a:solidFill>
-            <a:srgbClr val="E8F0F4"/>
-          </a:solidFill>
-          <a:ln/>
-        </p:spPr>
-      </p:sp>
-      <p:sp>
-        <p:nvSpPr>
-          <p:cNvPr id="6" name="Text 4"/>
-          <p:cNvSpPr/>
-          <p:nvPr/>
-        </p:nvSpPr>
-        <p:spPr>
-          <a:xfrm>
-            <a:off x="365760" y="1051560"/>
-            <a:ext cx="6400800" cy="320040"/>
-          </a:xfrm>
-          <a:prstGeom prst="rect">
-            <a:avLst/>
-          </a:prstGeom>
-          <a:noFill/>
-          <a:ln/>
-        </p:spPr>
-        <p:txBody>
-          <a:bodyPr wrap="square" rtlCol="0" anchor="ctr"/>
-          <a:lstStyle/>
-          <a:p>
-            <a:pPr indent="0" marL="0">
-              <a:buNone/>
-            </a:pPr>
-            <a:r>
-              <a:rPr lang="en-US" sz="1800" b="1" dirty="0">
-                <a:solidFill>
-                  <a:srgbClr val="065A82"/>
-                </a:solidFill>
-                <a:latin typeface="Georgia" pitchFamily="34" charset="0"/>
-                <a:ea typeface="Georgia" pitchFamily="34" charset="-122"/>
-                <a:cs typeface="Georgia" pitchFamily="34" charset="-120"/>
-              </a:rPr>
-              <a:t>冷启动 Self-Attention — 320 轮, 零专家数据, 零 BC</a:t>
-            </a:r>
-            <a:endParaRPr lang="en-US" sz="1800" dirty="0"/>
-          </a:p>
-        </p:txBody>
-      </p:sp>
-      <p:sp>
-        <p:nvSpPr>
-          <p:cNvPr id="7" name="Text 5"/>
-          <p:cNvSpPr/>
-          <p:nvPr/>
-        </p:nvSpPr>
-        <p:spPr>
-          <a:xfrm>
-            <a:off x="365760" y="1508760"/>
-            <a:ext cx="6400800" cy="2286000"/>
-          </a:xfrm>
-          <a:prstGeom prst="rect">
-            <a:avLst/>
-          </a:prstGeom>
-          <a:noFill/>
-          <a:ln/>
-        </p:spPr>
-        <p:txBody>
-          <a:bodyPr wrap="square" rtlCol="0" anchor="ctr"/>
-          <a:lstStyle/>
-          <a:p>
-            <a:pPr indent="0" marL="0">
-              <a:lnSpc>
-                <a:spcPct val="130000"/>
-              </a:lnSpc>
-              <a:buNone/>
-            </a:pPr>
-            <a:r>
-              <a:rPr lang="en-US" sz="1400" dirty="0">
-                <a:solidFill>
-                  <a:srgbClr val="4A5568"/>
-                </a:solidFill>
-                <a:latin typeface="Calibri" pitchFamily="34" charset="0"/>
-                <a:ea typeface="Calibri" pitchFamily="34" charset="-122"/>
-                <a:cs typeface="Calibri" pitchFamily="34" charset="-120"/>
-              </a:rPr>
-              <a:t>训练峰值: +5,401 (第 300 轮)    |    策略熵: 2.49 -&gt; 1.87 (健康收敛)</a:t>
-            </a:r>
-            <a:endParaRPr lang="en-US" sz="1400" dirty="0"/>
-          </a:p>
-          <a:p>
-            <a:pPr indent="0" marL="0">
-              <a:lnSpc>
-                <a:spcPct val="130000"/>
-              </a:lnSpc>
-              <a:buNone/>
-            </a:pPr>
-            <a:r>
-              <a:rPr lang="en-US" sz="1400" dirty="0">
-                <a:solidFill>
-                  <a:srgbClr val="4A5568"/>
-                </a:solidFill>
-                <a:latin typeface="Calibri" pitchFamily="34" charset="0"/>
-                <a:ea typeface="Calibri" pitchFamily="34" charset="-122"/>
-                <a:cs typeface="Calibri" pitchFamily="34" charset="-120"/>
-              </a:rPr>
-              <a:t>+1,345,  +2,376,  +4.0 — 三次 Eval 正向突破!    |    KL: 0.004-0.013 (平稳可控)</a:t>
-            </a:r>
-            <a:endParaRPr lang="en-US" sz="1400" dirty="0"/>
-          </a:p>
-          <a:p>
-            <a:pPr indent="0" marL="0">
-              <a:lnSpc>
-                <a:spcPct val="130000"/>
-              </a:lnSpc>
-              <a:buNone/>
-            </a:pPr>
-            <a:r>
-              <a:rPr lang="en-US" sz="1400" dirty="0">
-                <a:solidFill>
-                  <a:srgbClr val="4A5568"/>
-                </a:solidFill>
-                <a:latin typeface="Calibri" pitchFamily="34" charset="0"/>
-                <a:ea typeface="Calibri" pitchFamily="34" charset="-122"/>
-                <a:cs typeface="Calibri" pitchFamily="34" charset="-120"/>
-              </a:rPr>
-              <a:t>纯 MLP 基线: 0 次正向突破, 最佳 -4,542.    Self-Attn: 3 次突破, 差距 5,887 分.</a:t>
-            </a:r>
-            <a:endParaRPr lang="en-US" sz="1400" dirty="0"/>
-          </a:p>
-          <a:p>
-            <a:pPr indent="0" marL="0">
-              <a:lnSpc>
-                <a:spcPct val="130000"/>
-              </a:lnSpc>
-              <a:buNone/>
-            </a:pPr>
-            <a:endParaRPr lang="en-US" sz="1400" dirty="0"/>
-          </a:p>
-          <a:p>
-            <a:pPr indent="0" marL="0">
-              <a:lnSpc>
-                <a:spcPct val="130000"/>
-              </a:lnSpc>
-              <a:buNone/>
-            </a:pPr>
-            <a:r>
-              <a:rPr lang="en-US" sz="1400" dirty="0">
-                <a:solidFill>
-                  <a:srgbClr val="4A5568"/>
-                </a:solidFill>
-                <a:latin typeface="Calibri" pitchFamily="34" charset="0"/>
-                <a:ea typeface="Calibri" pitchFamily="34" charset="-122"/>
-                <a:cs typeface="Calibri" pitchFamily="34" charset="-120"/>
-              </a:rPr>
-              <a:t>结构决定上限. Token 架构仅凭物理交互, 零专家知识, 自发涌现协同追猎行为.</a:t>
-            </a:r>
-            <a:endParaRPr lang="en-US" sz="1400" dirty="0"/>
-          </a:p>
-        </p:txBody>
-      </p:sp>
-      <p:sp>
-        <p:nvSpPr>
-          <p:cNvPr id="8" name="Shape 6"/>
-          <p:cNvSpPr/>
-          <p:nvPr/>
-        </p:nvSpPr>
-        <p:spPr>
-          <a:xfrm>
-            <a:off x="365760" y="3840480"/>
-            <a:ext cx="2423160" cy="1234440"/>
-          </a:xfrm>
-          <a:prstGeom prst="roundRect">
-            <a:avLst>
-              <a:gd name="adj" fmla="val 4444"/>
-            </a:avLst>
-          </a:prstGeom>
-          <a:solidFill>
-            <a:srgbClr val="FFFFFF"/>
-          </a:solidFill>
-          <a:ln/>
-          <a:effectLst>
-            <a:outerShdw sx="100000" sy="100000" kx="0" ky="0" algn="bl" rotWithShape="0" blurRad="38100" dist="12700" dir="16200000">
-              <a:srgbClr val="C0D0D8">
-                <a:alpha val="18000"/>
-              </a:srgbClr>
-            </a:outerShdw>
-          </a:effectLst>
-        </p:spPr>
-      </p:sp>
-      <p:sp>
-        <p:nvSpPr>
-          <p:cNvPr id="9" name="Text 7"/>
-          <p:cNvSpPr/>
-          <p:nvPr/>
-        </p:nvSpPr>
-        <p:spPr>
-          <a:xfrm>
-            <a:off x="365760" y="3913632"/>
-            <a:ext cx="2423160" cy="548640"/>
-          </a:xfrm>
-          <a:prstGeom prst="rect">
-            <a:avLst/>
-          </a:prstGeom>
-          <a:noFill/>
-          <a:ln/>
-        </p:spPr>
-        <p:txBody>
-          <a:bodyPr wrap="square" rtlCol="0" anchor="ctr"/>
-          <a:lstStyle/>
-          <a:p>
-            <a:pPr algn="ctr" indent="0" marL="0">
-              <a:buNone/>
-            </a:pPr>
-            <a:r>
-              <a:rPr lang="en-US" sz="3000" b="1" dirty="0">
-                <a:solidFill>
-                  <a:srgbClr val="F96167"/>
-                </a:solidFill>
-                <a:latin typeface="Georgia" pitchFamily="34" charset="0"/>
-                <a:ea typeface="Georgia" pitchFamily="34" charset="-122"/>
-                <a:cs typeface="Georgia" pitchFamily="34" charset="-120"/>
-              </a:rPr>
-              <a:t>+2,376</a:t>
-            </a:r>
-            <a:endParaRPr lang="en-US" sz="3000" dirty="0"/>
-          </a:p>
-        </p:txBody>
-      </p:sp>
-      <p:sp>
-        <p:nvSpPr>
-          <p:cNvPr id="10" name="Text 8"/>
-          <p:cNvSpPr/>
-          <p:nvPr/>
-        </p:nvSpPr>
-        <p:spPr>
-          <a:xfrm>
-            <a:off x="365760" y="4480560"/>
-            <a:ext cx="2423160" cy="320040"/>
-          </a:xfrm>
-          <a:prstGeom prst="rect">
-            <a:avLst/>
-          </a:prstGeom>
-          <a:noFill/>
-          <a:ln/>
-        </p:spPr>
-        <p:txBody>
-          <a:bodyPr wrap="square" rtlCol="0" anchor="ctr"/>
-          <a:lstStyle/>
-          <a:p>
-            <a:pPr algn="ctr" indent="0" marL="0">
-              <a:lnSpc>
-                <a:spcPct val="110000"/>
-              </a:lnSpc>
-              <a:buNone/>
-            </a:pPr>
-            <a:r>
-              <a:rPr lang="en-US" sz="1300" b="1" dirty="0">
-                <a:solidFill>
-                  <a:srgbClr val="4A5568"/>
-                </a:solidFill>
-                <a:latin typeface="Calibri" pitchFamily="34" charset="0"/>
-                <a:ea typeface="Calibri" pitchFamily="34" charset="-122"/>
-                <a:cs typeface="Calibri" pitchFamily="34" charset="-120"/>
-              </a:rPr>
-              <a:t>最佳 Eval</a:t>
-            </a:r>
-            <a:endParaRPr lang="en-US" sz="1300" dirty="0"/>
-          </a:p>
-        </p:txBody>
-      </p:sp>
-      <p:sp>
-        <p:nvSpPr>
-          <p:cNvPr id="11" name="Shape 9"/>
-          <p:cNvSpPr/>
-          <p:nvPr/>
-        </p:nvSpPr>
-        <p:spPr>
-          <a:xfrm>
-            <a:off x="2971800" y="3840480"/>
-            <a:ext cx="2423160" cy="1234440"/>
-          </a:xfrm>
-          <a:prstGeom prst="roundRect">
-            <a:avLst>
-              <a:gd name="adj" fmla="val 4444"/>
-            </a:avLst>
-          </a:prstGeom>
-          <a:solidFill>
-            <a:srgbClr val="FFFFFF"/>
-          </a:solidFill>
-          <a:ln/>
-          <a:effectLst>
-            <a:outerShdw sx="100000" sy="100000" kx="0" ky="0" algn="bl" rotWithShape="0" blurRad="38100" dist="12700" dir="16200000">
-              <a:srgbClr val="C0D0D8">
-                <a:alpha val="18000"/>
-              </a:srgbClr>
-            </a:outerShdw>
-          </a:effectLst>
-        </p:spPr>
-      </p:sp>
-      <p:sp>
-        <p:nvSpPr>
-          <p:cNvPr id="12" name="Text 10"/>
-          <p:cNvSpPr/>
-          <p:nvPr/>
-        </p:nvSpPr>
-        <p:spPr>
-          <a:xfrm>
-            <a:off x="2971800" y="3913632"/>
-            <a:ext cx="2423160" cy="548640"/>
-          </a:xfrm>
-          <a:prstGeom prst="rect">
-            <a:avLst/>
-          </a:prstGeom>
-          <a:noFill/>
-          <a:ln/>
-        </p:spPr>
-        <p:txBody>
-          <a:bodyPr wrap="square" rtlCol="0" anchor="ctr"/>
-          <a:lstStyle/>
-          <a:p>
-            <a:pPr algn="ctr" indent="0" marL="0">
-              <a:buNone/>
-            </a:pPr>
-            <a:r>
-              <a:rPr lang="en-US" sz="3000" b="1" dirty="0">
-                <a:solidFill>
-                  <a:srgbClr val="F96167"/>
-                </a:solidFill>
-                <a:latin typeface="Georgia" pitchFamily="34" charset="0"/>
-                <a:ea typeface="Georgia" pitchFamily="34" charset="-122"/>
-                <a:cs typeface="Georgia" pitchFamily="34" charset="-120"/>
-              </a:rPr>
-              <a:t>3x</a:t>
-            </a:r>
-            <a:endParaRPr lang="en-US" sz="3000" dirty="0"/>
-          </a:p>
-        </p:txBody>
-      </p:sp>
-      <p:sp>
-        <p:nvSpPr>
-          <p:cNvPr id="13" name="Text 11"/>
-          <p:cNvSpPr/>
-          <p:nvPr/>
-        </p:nvSpPr>
-        <p:spPr>
-          <a:xfrm>
-            <a:off x="2971800" y="4480560"/>
-            <a:ext cx="2423160" cy="320040"/>
-          </a:xfrm>
-          <a:prstGeom prst="rect">
-            <a:avLst/>
-          </a:prstGeom>
-          <a:noFill/>
-          <a:ln/>
-        </p:spPr>
-        <p:txBody>
-          <a:bodyPr wrap="square" rtlCol="0" anchor="ctr"/>
-          <a:lstStyle/>
-          <a:p>
-            <a:pPr algn="ctr" indent="0" marL="0">
-              <a:lnSpc>
-                <a:spcPct val="110000"/>
-              </a:lnSpc>
-              <a:buNone/>
-            </a:pPr>
-            <a:r>
-              <a:rPr lang="en-US" sz="1300" b="1" dirty="0">
-                <a:solidFill>
-                  <a:srgbClr val="4A5568"/>
-                </a:solidFill>
-                <a:latin typeface="Calibri" pitchFamily="34" charset="0"/>
-                <a:ea typeface="Calibri" pitchFamily="34" charset="-122"/>
-                <a:cs typeface="Calibri" pitchFamily="34" charset="-120"/>
-              </a:rPr>
-              <a:t>正向突破</a:t>
-            </a:r>
-            <a:endParaRPr lang="en-US" sz="1300" dirty="0"/>
-          </a:p>
-        </p:txBody>
-      </p:sp>
-      <p:sp>
-        <p:nvSpPr>
-          <p:cNvPr id="14" name="Shape 12"/>
-          <p:cNvSpPr/>
-          <p:nvPr/>
-        </p:nvSpPr>
-        <p:spPr>
-          <a:xfrm>
-            <a:off x="5577840" y="3840480"/>
-            <a:ext cx="2423160" cy="1234440"/>
-          </a:xfrm>
-          <a:prstGeom prst="roundRect">
-            <a:avLst>
-              <a:gd name="adj" fmla="val 4444"/>
-            </a:avLst>
-          </a:prstGeom>
-          <a:solidFill>
-            <a:srgbClr val="FFFFFF"/>
-          </a:solidFill>
-          <a:ln/>
-          <a:effectLst>
-            <a:outerShdw sx="100000" sy="100000" kx="0" ky="0" algn="bl" rotWithShape="0" blurRad="38100" dist="12700" dir="16200000">
-              <a:srgbClr val="C0D0D8">
-                <a:alpha val="18000"/>
-              </a:srgbClr>
-            </a:outerShdw>
-          </a:effectLst>
-        </p:spPr>
-      </p:sp>
-      <p:sp>
-        <p:nvSpPr>
-          <p:cNvPr id="15" name="Text 13"/>
-          <p:cNvSpPr/>
-          <p:nvPr/>
-        </p:nvSpPr>
-        <p:spPr>
-          <a:xfrm>
-            <a:off x="5577840" y="3913632"/>
-            <a:ext cx="2423160" cy="548640"/>
-          </a:xfrm>
-          <a:prstGeom prst="rect">
-            <a:avLst/>
-          </a:prstGeom>
-          <a:noFill/>
-          <a:ln/>
-        </p:spPr>
-        <p:txBody>
-          <a:bodyPr wrap="square" rtlCol="0" anchor="ctr"/>
-          <a:lstStyle/>
-          <a:p>
-            <a:pPr algn="ctr" indent="0" marL="0">
-              <a:buNone/>
-            </a:pPr>
-            <a:r>
-              <a:rPr lang="en-US" sz="3000" b="1" dirty="0">
-                <a:solidFill>
-                  <a:srgbClr val="F96167"/>
-                </a:solidFill>
-                <a:latin typeface="Georgia" pitchFamily="34" charset="0"/>
-                <a:ea typeface="Georgia" pitchFamily="34" charset="-122"/>
-                <a:cs typeface="Georgia" pitchFamily="34" charset="-120"/>
-              </a:rPr>
-              <a:t>320</a:t>
-            </a:r>
-            <a:endParaRPr lang="en-US" sz="3000" dirty="0"/>
-          </a:p>
-        </p:txBody>
-      </p:sp>
-      <p:sp>
-        <p:nvSpPr>
-          <p:cNvPr id="16" name="Text 14"/>
-          <p:cNvSpPr/>
-          <p:nvPr/>
-        </p:nvSpPr>
-        <p:spPr>
-          <a:xfrm>
-            <a:off x="5577840" y="4480560"/>
-            <a:ext cx="2423160" cy="320040"/>
-          </a:xfrm>
-          <a:prstGeom prst="rect">
-            <a:avLst/>
-          </a:prstGeom>
-          <a:noFill/>
-          <a:ln/>
-        </p:spPr>
-        <p:txBody>
-          <a:bodyPr wrap="square" rtlCol="0" anchor="ctr"/>
-          <a:lstStyle/>
-          <a:p>
-            <a:pPr algn="ctr" indent="0" marL="0">
-              <a:lnSpc>
-                <a:spcPct val="110000"/>
-              </a:lnSpc>
-              <a:buNone/>
-            </a:pPr>
-            <a:r>
-              <a:rPr lang="en-US" sz="1300" b="1" dirty="0">
-                <a:solidFill>
-                  <a:srgbClr val="4A5568"/>
-                </a:solidFill>
-                <a:latin typeface="Calibri" pitchFamily="34" charset="0"/>
-                <a:ea typeface="Calibri" pitchFamily="34" charset="-122"/>
-                <a:cs typeface="Calibri" pitchFamily="34" charset="-120"/>
-              </a:rPr>
-              <a:t>训练轮数</a:t>
-            </a:r>
-            <a:endParaRPr lang="en-US" sz="1300" dirty="0"/>
-          </a:p>
-        </p:txBody>
-      </p:sp>
-      <p:sp>
-        <p:nvSpPr>
-          <p:cNvPr id="17" name="Shape 15"/>
-          <p:cNvSpPr/>
-          <p:nvPr/>
-        </p:nvSpPr>
-        <p:spPr>
-          <a:xfrm>
-            <a:off x="8183880" y="3840480"/>
-            <a:ext cx="2423160" cy="1234440"/>
-          </a:xfrm>
-          <a:prstGeom prst="roundRect">
-            <a:avLst>
-              <a:gd name="adj" fmla="val 4444"/>
-            </a:avLst>
-          </a:prstGeom>
-          <a:solidFill>
-            <a:srgbClr val="FFFFFF"/>
-          </a:solidFill>
-          <a:ln/>
-          <a:effectLst>
-            <a:outerShdw sx="100000" sy="100000" kx="0" ky="0" algn="bl" rotWithShape="0" blurRad="38100" dist="12700" dir="16200000">
-              <a:srgbClr val="C0D0D8">
-                <a:alpha val="18000"/>
-              </a:srgbClr>
-            </a:outerShdw>
-          </a:effectLst>
-        </p:spPr>
-      </p:sp>
-      <p:sp>
-        <p:nvSpPr>
-          <p:cNvPr id="18" name="Text 16"/>
-          <p:cNvSpPr/>
-          <p:nvPr/>
-        </p:nvSpPr>
-        <p:spPr>
-          <a:xfrm>
-            <a:off x="8183880" y="3913632"/>
-            <a:ext cx="2423160" cy="548640"/>
-          </a:xfrm>
-          <a:prstGeom prst="rect">
-            <a:avLst/>
-          </a:prstGeom>
-          <a:noFill/>
-          <a:ln/>
-        </p:spPr>
-        <p:txBody>
-          <a:bodyPr wrap="square" rtlCol="0" anchor="ctr"/>
-          <a:lstStyle/>
-          <a:p>
-            <a:pPr algn="ctr" indent="0" marL="0">
-              <a:buNone/>
-            </a:pPr>
-            <a:r>
-              <a:rPr lang="en-US" sz="3000" b="1" dirty="0">
-                <a:solidFill>
-                  <a:srgbClr val="F96167"/>
-                </a:solidFill>
-                <a:latin typeface="Georgia" pitchFamily="34" charset="0"/>
-                <a:ea typeface="Georgia" pitchFamily="34" charset="-122"/>
-                <a:cs typeface="Georgia" pitchFamily="34" charset="-120"/>
-              </a:rPr>
-              <a:t>0</a:t>
-            </a:r>
-            <a:endParaRPr lang="en-US" sz="3000" dirty="0"/>
-          </a:p>
-        </p:txBody>
-      </p:sp>
-      <p:sp>
-        <p:nvSpPr>
-          <p:cNvPr id="19" name="Text 17"/>
-          <p:cNvSpPr/>
-          <p:nvPr/>
-        </p:nvSpPr>
-        <p:spPr>
-          <a:xfrm>
-            <a:off x="8183880" y="4480560"/>
-            <a:ext cx="2423160" cy="320040"/>
-          </a:xfrm>
-          <a:prstGeom prst="rect">
-            <a:avLst/>
-          </a:prstGeom>
-          <a:noFill/>
-          <a:ln/>
-        </p:spPr>
-        <p:txBody>
-          <a:bodyPr wrap="square" rtlCol="0" anchor="ctr"/>
-          <a:lstStyle/>
-          <a:p>
-            <a:pPr algn="ctr" indent="0" marL="0">
-              <a:lnSpc>
-                <a:spcPct val="110000"/>
-              </a:lnSpc>
-              <a:buNone/>
-            </a:pPr>
-            <a:r>
-              <a:rPr lang="en-US" sz="1300" b="1" dirty="0">
-                <a:solidFill>
-                  <a:srgbClr val="4A5568"/>
-                </a:solidFill>
-                <a:latin typeface="Calibri" pitchFamily="34" charset="0"/>
-                <a:ea typeface="Calibri" pitchFamily="34" charset="-122"/>
-                <a:cs typeface="Calibri" pitchFamily="34" charset="-120"/>
-              </a:rPr>
-              <a:t>专家样本</a:t>
-            </a:r>
-            <a:endParaRPr lang="en-US" sz="1300" dirty="0"/>
-          </a:p>
-        </p:txBody>
-      </p:sp>
-      <p:pic>
-        <p:nvPicPr>
-          <p:cNvPr id="20" name="Image 0" descr="results/viz/paper_charts/chart2_spatial_kde.png">    </p:cNvPr>
-          <p:cNvPicPr>
-            <a:picLocks noChangeAspect="1"/>
-          </p:cNvPicPr>
-          <p:nvPr/>
-        </p:nvPicPr>
-        <p:blipFill>
-          <a:blip r:embed="rId1"/>
-          <a:srcRect l="0" r="0" t="0" b="0"/>
-          <a:stretch/>
-        </p:blipFill>
-        <p:spPr>
-          <a:xfrm>
-            <a:off x="6949440" y="1005840"/>
-            <a:ext cx="5029200" cy="3291840"/>
-          </a:xfrm>
-          <a:prstGeom prst="rect">
-            <a:avLst/>
-          </a:prstGeom>
-        </p:spPr>
-      </p:pic>
-      <p:sp>
-        <p:nvSpPr>
-          <p:cNvPr id="21" name="Text 18"/>
-          <p:cNvSpPr/>
-          <p:nvPr/>
-        </p:nvSpPr>
-        <p:spPr>
-          <a:xfrm>
-            <a:off x="6949440" y="4389120"/>
-            <a:ext cx="5029200" cy="457200"/>
-          </a:xfrm>
-          <a:prstGeom prst="rect">
-            <a:avLst/>
-          </a:prstGeom>
-          <a:noFill/>
-          <a:ln/>
-        </p:spPr>
-        <p:txBody>
-          <a:bodyPr wrap="square" rtlCol="0" anchor="ctr"/>
-          <a:lstStyle/>
-          <a:p>
-            <a:pPr indent="0" marL="0">
-              <a:buNone/>
-            </a:pPr>
-            <a:r>
-              <a:rPr lang="en-US" sz="1100" i="1" dirty="0">
-                <a:solidFill>
-                  <a:srgbClr val="8899A6"/>
-                </a:solidFill>
-                <a:latin typeface="Calibri" pitchFamily="34" charset="0"/>
-                <a:ea typeface="Calibri" pitchFamily="34" charset="-122"/>
-                <a:cs typeface="Calibri" pitchFamily="34" charset="-120"/>
-              </a:rPr>
-              <a:t>Spatial KDE: 50 集 Eval, 127K 帧. 目标尾部 30-60 deg 扇区高密度聚集 — 统计级合围几何收敛.</a:t>
-            </a:r>
-            <a:endParaRPr lang="en-US" sz="1100" dirty="0"/>
-          </a:p>
-        </p:txBody>
-      </p:sp>
-      <p:pic>
-        <p:nvPicPr>
-          <p:cNvPr id="22" name="Image 1" descr="results/viz/paper_charts/chart5_health_metrics.png">    </p:cNvPr>
-          <p:cNvPicPr>
-            <a:picLocks noChangeAspect="1"/>
-          </p:cNvPicPr>
-          <p:nvPr/>
-        </p:nvPicPr>
-        <p:blipFill>
-          <a:blip r:embed="rId2"/>
-          <a:srcRect l="0" r="0" t="0" b="0"/>
-          <a:stretch/>
-        </p:blipFill>
-        <p:spPr>
-          <a:xfrm>
-            <a:off x="6949440" y="4709160"/>
-            <a:ext cx="5029200" cy="1920240"/>
-          </a:xfrm>
-          <a:prstGeom prst="rect">
-            <a:avLst/>
-          </a:prstGeom>
-        </p:spPr>
-      </p:pic>
     </p:spTree>
   </p:cSld>
   <p:clrMapOvr>
@@ -12264,4 +11933,299 @@
     </a:ext>
   </a:extLst>
 </a:theme>
+</file>
+
+<file path=ppt/theme/theme2.xml><?xml version="1.0" encoding="utf-8"?>
+<a:theme xmlns:a="http://schemas.openxmlformats.org/drawingml/2006/main" name="Office 主题​​">
+  <a:themeElements>
+    <a:clrScheme name="Office">
+      <a:dk1>
+        <a:sysClr val="windowText" lastClr="000000"/>
+      </a:dk1>
+      <a:lt1>
+        <a:sysClr val="window" lastClr="FFFFFF"/>
+      </a:lt1>
+      <a:dk2>
+        <a:srgbClr val="44546A"/>
+      </a:dk2>
+      <a:lt2>
+        <a:srgbClr val="E7E6E6"/>
+      </a:lt2>
+      <a:accent1>
+        <a:srgbClr val="4472C4"/>
+      </a:accent1>
+      <a:accent2>
+        <a:srgbClr val="ED7D31"/>
+      </a:accent2>
+      <a:accent3>
+        <a:srgbClr val="A5A5A5"/>
+      </a:accent3>
+      <a:accent4>
+        <a:srgbClr val="FFC000"/>
+      </a:accent4>
+      <a:accent5>
+        <a:srgbClr val="5B9BD5"/>
+      </a:accent5>
+      <a:accent6>
+        <a:srgbClr val="70AD47"/>
+      </a:accent6>
+      <a:hlink>
+        <a:srgbClr val="0563C1"/>
+      </a:hlink>
+      <a:folHlink>
+        <a:srgbClr val="954F72"/>
+      </a:folHlink>
+    </a:clrScheme>
+    <a:fontScheme name="Office">
+      <a:majorFont>
+        <a:latin typeface="等线 Light" panose="020F0302020204030204"/>
+        <a:ea typeface=""/>
+        <a:cs typeface=""/>
+        <a:font script="Jpan" typeface="游ゴシック Light"/>
+        <a:font script="Hang" typeface="맑은 고딕"/>
+        <a:font script="Hans" typeface="等线 Light"/>
+        <a:font script="Hant" typeface="新細明體"/>
+        <a:font script="Arab" typeface="Times New Roman"/>
+        <a:font script="Hebr" typeface="Times New Roman"/>
+        <a:font script="Thai" typeface="Angsana New"/>
+        <a:font script="Ethi" typeface="Nyala"/>
+        <a:font script="Beng" typeface="Vrinda"/>
+        <a:font script="Gujr" typeface="Shruti"/>
+        <a:font script="Khmr" typeface="MoolBoran"/>
+        <a:font script="Knda" typeface="Tunga"/>
+        <a:font script="Guru" typeface="Raavi"/>
+        <a:font script="Cans" typeface="Euphemia"/>
+        <a:font script="Cher" typeface="Plantagenet Cherokee"/>
+        <a:font script="Yiii" typeface="Microsoft Yi Baiti"/>
+        <a:font script="Tibt" typeface="Microsoft Himalaya"/>
+        <a:font script="Thaa" typeface="MV Boli"/>
+        <a:font script="Deva" typeface="Mangal"/>
+        <a:font script="Telu" typeface="Gautami"/>
+        <a:font script="Taml" typeface="Latha"/>
+        <a:font script="Syrc" typeface="Estrangelo Edessa"/>
+        <a:font script="Orya" typeface="Kalinga"/>
+        <a:font script="Mlym" typeface="Kartika"/>
+        <a:font script="Laoo" typeface="DokChampa"/>
+        <a:font script="Sinh" typeface="Iskoola Pota"/>
+        <a:font script="Mong" typeface="Mongolian Baiti"/>
+        <a:font script="Viet" typeface="Times New Roman"/>
+        <a:font script="Uigh" typeface="Microsoft Uighur"/>
+        <a:font script="Geor" typeface="Sylfaen"/>
+        <a:font script="Armn" typeface="Arial"/>
+        <a:font script="Bugi" typeface="Leelawadee UI"/>
+        <a:font script="Bopo" typeface="Microsoft JhengHei"/>
+        <a:font script="Java" typeface="Javanese Text"/>
+        <a:font script="Lisu" typeface="Segoe UI"/>
+        <a:font script="Mymr" typeface="Myanmar Text"/>
+        <a:font script="Nkoo" typeface="Ebrima"/>
+        <a:font script="Olck" typeface="Nirmala UI"/>
+        <a:font script="Osma" typeface="Ebrima"/>
+        <a:font script="Phag" typeface="Phagspa"/>
+        <a:font script="Syrn" typeface="Estrangelo Edessa"/>
+        <a:font script="Syrj" typeface="Estrangelo Edessa"/>
+        <a:font script="Syre" typeface="Estrangelo Edessa"/>
+        <a:font script="Sora" typeface="Nirmala UI"/>
+        <a:font script="Tale" typeface="Microsoft Tai Le"/>
+        <a:font script="Talu" typeface="Microsoft New Tai Lue"/>
+        <a:font script="Tfng" typeface="Ebrima"/>
+      </a:majorFont>
+      <a:minorFont>
+        <a:latin typeface="等线" panose="020F0502020204030204"/>
+        <a:ea typeface=""/>
+        <a:cs typeface=""/>
+        <a:font script="Jpan" typeface="游ゴシック"/>
+        <a:font script="Hang" typeface="맑은 고딕"/>
+        <a:font script="Hans" typeface="等线"/>
+        <a:font script="Hant" typeface="新細明體"/>
+        <a:font script="Arab" typeface="Arial"/>
+        <a:font script="Hebr" typeface="Arial"/>
+        <a:font script="Thai" typeface="Cordia New"/>
+        <a:font script="Ethi" typeface="Nyala"/>
+        <a:font script="Beng" typeface="Vrinda"/>
+        <a:font script="Gujr" typeface="Shruti"/>
+        <a:font script="Khmr" typeface="DaunPenh"/>
+        <a:font script="Knda" typeface="Tunga"/>
+        <a:font script="Guru" typeface="Raavi"/>
+        <a:font script="Cans" typeface="Euphemia"/>
+        <a:font script="Cher" typeface="Plantagenet Cherokee"/>
+        <a:font script="Yiii" typeface="Microsoft Yi Baiti"/>
+        <a:font script="Tibt" typeface="Microsoft Himalaya"/>
+        <a:font script="Thaa" typeface="MV Boli"/>
+        <a:font script="Deva" typeface="Mangal"/>
+        <a:font script="Telu" typeface="Gautami"/>
+        <a:font script="Taml" typeface="Latha"/>
+        <a:font script="Syrc" typeface="Estrangelo Edessa"/>
+        <a:font script="Orya" typeface="Kalinga"/>
+        <a:font script="Mlym" typeface="Kartika"/>
+        <a:font script="Laoo" typeface="DokChampa"/>
+        <a:font script="Sinh" typeface="Iskoola Pota"/>
+        <a:font script="Mong" typeface="Mongolian Baiti"/>
+        <a:font script="Viet" typeface="Arial"/>
+        <a:font script="Uigh" typeface="Microsoft Uighur"/>
+        <a:font script="Geor" typeface="Sylfaen"/>
+        <a:font script="Armn" typeface="Arial"/>
+        <a:font script="Bugi" typeface="Leelawadee UI"/>
+        <a:font script="Bopo" typeface="Microsoft JhengHei"/>
+        <a:font script="Java" typeface="Javanese Text"/>
+        <a:font script="Lisu" typeface="Segoe UI"/>
+        <a:font script="Mymr" typeface="Myanmar Text"/>
+        <a:font script="Nkoo" typeface="Ebrima"/>
+        <a:font script="Olck" typeface="Nirmala UI"/>
+        <a:font script="Osma" typeface="Ebrima"/>
+        <a:font script="Phag" typeface="Phagspa"/>
+        <a:font script="Syrn" typeface="Estrangelo Edessa"/>
+        <a:font script="Syrj" typeface="Estrangelo Edessa"/>
+        <a:font script="Syre" typeface="Estrangelo Edessa"/>
+        <a:font script="Sora" typeface="Nirmala UI"/>
+        <a:font script="Tale" typeface="Microsoft Tai Le"/>
+        <a:font script="Talu" typeface="Microsoft New Tai Lue"/>
+        <a:font script="Tfng" typeface="Ebrima"/>
+      </a:minorFont>
+    </a:fontScheme>
+    <a:fmtScheme name="Office">
+      <a:fillStyleLst>
+        <a:solidFill>
+          <a:schemeClr val="phClr"/>
+        </a:solidFill>
+        <a:gradFill rotWithShape="1">
+          <a:gsLst>
+            <a:gs pos="0">
+              <a:schemeClr val="phClr">
+                <a:lumMod val="110000"/>
+                <a:satMod val="105000"/>
+                <a:tint val="67000"/>
+              </a:schemeClr>
+            </a:gs>
+            <a:gs pos="50000">
+              <a:schemeClr val="phClr">
+                <a:lumMod val="105000"/>
+                <a:satMod val="103000"/>
+                <a:tint val="73000"/>
+              </a:schemeClr>
+            </a:gs>
+            <a:gs pos="100000">
+              <a:schemeClr val="phClr">
+                <a:lumMod val="105000"/>
+                <a:satMod val="109000"/>
+                <a:tint val="81000"/>
+              </a:schemeClr>
+            </a:gs>
+          </a:gsLst>
+          <a:lin ang="5400000" scaled="0"/>
+        </a:gradFill>
+        <a:gradFill rotWithShape="1">
+          <a:gsLst>
+            <a:gs pos="0">
+              <a:schemeClr val="phClr">
+                <a:satMod val="103000"/>
+                <a:lumMod val="102000"/>
+                <a:tint val="94000"/>
+              </a:schemeClr>
+            </a:gs>
+            <a:gs pos="50000">
+              <a:schemeClr val="phClr">
+                <a:satMod val="110000"/>
+                <a:lumMod val="100000"/>
+                <a:shade val="100000"/>
+              </a:schemeClr>
+            </a:gs>
+            <a:gs pos="100000">
+              <a:schemeClr val="phClr">
+                <a:lumMod val="99000"/>
+                <a:satMod val="120000"/>
+                <a:shade val="78000"/>
+              </a:schemeClr>
+            </a:gs>
+          </a:gsLst>
+          <a:lin ang="5400000" scaled="0"/>
+        </a:gradFill>
+      </a:fillStyleLst>
+      <a:lnStyleLst>
+        <a:ln w="6350" cap="flat" cmpd="sng" algn="ctr">
+          <a:solidFill>
+            <a:schemeClr val="phClr"/>
+          </a:solidFill>
+          <a:prstDash val="solid"/>
+          <a:miter lim="800000"/>
+        </a:ln>
+        <a:ln w="12700" cap="flat" cmpd="sng" algn="ctr">
+          <a:solidFill>
+            <a:schemeClr val="phClr"/>
+          </a:solidFill>
+          <a:prstDash val="solid"/>
+          <a:miter lim="800000"/>
+        </a:ln>
+        <a:ln w="19050" cap="flat" cmpd="sng" algn="ctr">
+          <a:solidFill>
+            <a:schemeClr val="phClr"/>
+          </a:solidFill>
+          <a:prstDash val="solid"/>
+          <a:miter lim="800000"/>
+        </a:ln>
+      </a:lnStyleLst>
+      <a:effectStyleLst>
+        <a:effectStyle>
+          <a:effectLst/>
+        </a:effectStyle>
+        <a:effectStyle>
+          <a:effectLst/>
+        </a:effectStyle>
+        <a:effectStyle>
+          <a:effectLst>
+            <a:outerShdw blurRad="57150" dist="19050" dir="5400000" algn="ctr" rotWithShape="0">
+              <a:srgbClr val="000000">
+                <a:alpha val="63000"/>
+              </a:srgbClr>
+            </a:outerShdw>
+          </a:effectLst>
+        </a:effectStyle>
+      </a:effectStyleLst>
+      <a:bgFillStyleLst>
+        <a:solidFill>
+          <a:schemeClr val="phClr"/>
+        </a:solidFill>
+        <a:solidFill>
+          <a:schemeClr val="phClr">
+            <a:tint val="95000"/>
+            <a:satMod val="170000"/>
+          </a:schemeClr>
+        </a:solidFill>
+        <a:gradFill rotWithShape="1">
+          <a:gsLst>
+            <a:gs pos="0">
+              <a:schemeClr val="phClr">
+                <a:tint val="93000"/>
+                <a:satMod val="150000"/>
+                <a:shade val="98000"/>
+                <a:lumMod val="102000"/>
+              </a:schemeClr>
+            </a:gs>
+            <a:gs pos="50000">
+              <a:schemeClr val="phClr">
+                <a:tint val="98000"/>
+                <a:satMod val="130000"/>
+                <a:shade val="90000"/>
+                <a:lumMod val="103000"/>
+              </a:schemeClr>
+            </a:gs>
+            <a:gs pos="100000">
+              <a:schemeClr val="phClr">
+                <a:shade val="63000"/>
+                <a:satMod val="120000"/>
+              </a:schemeClr>
+            </a:gs>
+          </a:gsLst>
+          <a:lin ang="5400000" scaled="0"/>
+        </a:gradFill>
+      </a:bgFillStyleLst>
+    </a:fmtScheme>
+  </a:themeElements>
+  <a:objectDefaults/>
+  <a:extraClrSchemeLst/>
+  <a:extLst>
+    <a:ext uri="{05A4C25C-085E-4340-85A3-A5531E510DB2}">
+      <thm15:themeFamily xmlns:thm15="http://schemas.microsoft.com/office/thememl/2012/main" name="Office Theme" id="{62F939B6-93AF-4DB8-9C6B-D6C7DFDC589F}" vid="{4A3C46E8-61CC-4603-A589-7422A47A8E4A}"/>
+    </a:ext>
+  </a:extLst>
+</a:theme>
 </file>